--- a/flysfly/簡報/LIVE_1_48-1_20261021_Man_Ray_FlysFly_蜂飛記_鄭丁南20261021.pptx
+++ b/flysfly/簡報/LIVE_1_48-1_20261021_Man_Ray_FlysFly_蜂飛記_鄭丁南20261021.pptx
@@ -118,23 +118,23 @@
   <p:extLst>
     <p:ext uri="{521415D9-36F7-43E2-AB2F-B90AF26B5E84}">
       <p14:sectionLst xmlns:p14="http://schemas.microsoft.com/office/powerpoint/2010/main">
-        <p14:section name="封面" id="{bf658c73-9417-b414-ee9c-8ff5e5093a7f}">
+        <p14:section name="封面" id="{d31dbd14-6b32-ddd2-3e82-a6f0ed212034}">
           <p14:sldIdLst>
             <p14:sldId id="256"/>
           </p14:sldIdLst>
         </p14:section>
-        <p14:section name="前菜" id="{51f3f40f-4047-f44c-23e8-7ee756f3c7ec}">
+        <p14:section name="前菜" id="{31c8487d-4e8c-48f1-5d52-d019fc18596a}">
           <p14:sldIdLst>
             <p14:sldId id="257"/>
           </p14:sldIdLst>
         </p14:section>
-        <p14:section name="中場" id="{2693ff81-c648-feb3-cfc0-c20263daa846}">
+        <p14:section name="中場" id="{9e027911-2fab-482d-737e-01fb40f42ad4}">
           <p14:sldIdLst>
             <p14:sldId id="258"/>
             <p14:sldId id="259"/>
           </p14:sldIdLst>
         </p14:section>
-        <p14:section name="主菜" id="{35977073-1f21-1dde-e808-1aedcad7828b}">
+        <p14:section name="主菜" id="{192c9e45-2dc8-7846-95b7-7e7165d1a17c}">
           <p14:sldIdLst>
             <p14:sldId id="260"/>
             <p14:sldId id="261"/>
@@ -143,12 +143,12 @@
             <p14:sldId id="264"/>
           </p14:sldIdLst>
         </p14:section>
-        <p14:section name="甜點" id="{4ad584ff-fe8e-fb00-9868-556b134bf41d}">
+        <p14:section name="甜點" id="{8e177662-5da3-27ba-758e-6af329e077e9}">
           <p14:sldIdLst>
             <p14:sldId id="265"/>
           </p14:sldIdLst>
         </p14:section>
-        <p14:section name="彩蛋" id="{f630d93d-80ee-3833-b039-bd6d0227a7b1}">
+        <p14:section name="彩蛋" id="{4c330d6f-fd07-1b14-37a3-abb6fc781246}">
           <p14:sldIdLst>
             <p14:sldId id="266"/>
             <p14:sldId id="267"/>
@@ -743,7 +743,7 @@
 《Mouche》約 1930：p.244 的蜂底片。
 《Sauterelle》約 1945：Pompidou 蚱蜢底片，好萊塢時期，共 18 筆。
 《Untitled (For Immobility)》1947：五隻昆蟲擬態藏在枯枝落葉間的 shadow box，送給書籍裝幀家 Mary Reynolds；主題是昆蟲在眼前卻看不見。
-《Dragonfly》1926：《Revolving Doors》十張 pochoir 之一（MoMA）；《Insectes》vers 1930（André Breton 舊藏，背面 MR 花押）。這兩件沒有可用圖片。
+《Dragonfly》1926：《Revolving Doors》十張 pochoir 之一（圖：National Gallery of Art；MoMA 385.1988.10 同版）。《Insectes》vers 1930（André Breton 舊藏，背面 MR 花押）：一隻花潛金龜與一隻天牛，和 Met [Butterflies] 下緣的兩隻是同一批標本。
 「只有 p.244」是目前查到的範圍，不是定論；Steidl《Trees &amp; Flowers – Insects &amp; Animals》（2009）可能還有。</a:t>
             </a:r>
             <a:endParaRPr lang="en-US" dirty="0"/>
@@ -1018,7 +1018,7 @@
               <a:t>MFAH 2015.90：the artist experimented with a double exposure during the printing process by layering two negatives on top of each other.（在印相過程中把兩張底片疊在一起做雙重曝光。）
 BMA 1988.430《Marcel Duchamp》c.1920：Superimposition of two negatives。
 Sotheby’s 2017 Lot 118：two of Man Ray’s photographs are printed together…
-Duchamp 與 Magnolia 館方／拍賣頁沒有可用圖片，這裡只列文字。
+Phillips 2024 Lot 261《Magnolia Blossom, Paris》1926：疊印用的木蘭花原作之一。疊印版裡木蘭花呈暗色調、眼睛透在花瓣裡。Duchamp 的 BMA 館方頁沒有圖片，只列文字。
 重點：這些疊合是透明、互相滲透的「疊影」；p.244 的蜂則是實心剪影，用法不同。</a:t>
             </a:r>
             <a:endParaRPr lang="en-US" dirty="0"/>
@@ -3297,8 +3297,8 @@
         </p:blipFill>
         <p:spPr>
           <a:xfrm>
-            <a:off x="457200" y="2432907"/>
-            <a:ext cx="1755648" cy="986346"/>
+            <a:off x="457200" y="2553632"/>
+            <a:ext cx="1325880" cy="744897"/>
           </a:xfrm>
           <a:prstGeom prst="rect">
             <a:avLst/>
@@ -3313,7 +3313,7 @@
         </p:nvSpPr>
         <p:spPr>
           <a:xfrm>
-            <a:off x="1261872" y="4453128"/>
+            <a:off x="1046988" y="4453128"/>
             <a:ext cx="146304" cy="146304"/>
           </a:xfrm>
           <a:prstGeom prst="ellipse">
@@ -3338,8 +3338,8 @@
         </p:nvSpPr>
         <p:spPr>
           <a:xfrm>
-            <a:off x="457200" y="4645152"/>
-            <a:ext cx="1755648" cy="320040"/>
+            <a:off x="411480" y="4645152"/>
+            <a:ext cx="1417320" cy="320040"/>
           </a:xfrm>
           <a:prstGeom prst="rect">
             <a:avLst/>
@@ -3355,14 +3355,14 @@
               <a:buNone/>
             </a:pPr>
             <a:r>
-              <a:rPr lang="en-US" sz="1600" b="1" dirty="0">
+              <a:rPr lang="en-US" sz="1500" b="1" dirty="0">
                 <a:solidFill>
                   <a:srgbClr val="1C1B1D"/>
                 </a:solidFill>
               </a:rPr>
               <a:t>1922</a:t>
             </a:r>
-            <a:endParaRPr lang="en-US" sz="1600" dirty="0"/>
+            <a:endParaRPr lang="en-US" sz="1500" dirty="0"/>
           </a:p>
         </p:txBody>
       </p:sp>
@@ -3374,8 +3374,8 @@
         </p:nvSpPr>
         <p:spPr>
           <a:xfrm>
-            <a:off x="457200" y="4956048"/>
-            <a:ext cx="1755648" cy="274320"/>
+            <a:off x="411480" y="4956048"/>
+            <a:ext cx="1417320" cy="274320"/>
           </a:xfrm>
           <a:prstGeom prst="rect">
             <a:avLst/>
@@ -3391,14 +3391,14 @@
               <a:buNone/>
             </a:pPr>
             <a:r>
-              <a:rPr lang="en-US" sz="1200" dirty="0">
+              <a:rPr lang="en-US" sz="1100" dirty="0">
                 <a:solidFill>
                   <a:srgbClr val="1C1B1D"/>
                 </a:solidFill>
               </a:rPr>
               <a:t>Rayograph（局部）</a:t>
             </a:r>
-            <a:endParaRPr lang="en-US" sz="1200" dirty="0"/>
+            <a:endParaRPr lang="en-US" sz="1100" dirty="0"/>
           </a:p>
         </p:txBody>
       </p:sp>
@@ -3410,8 +3410,8 @@
         </p:nvSpPr>
         <p:spPr>
           <a:xfrm>
-            <a:off x="457200" y="5212080"/>
-            <a:ext cx="1755648" cy="274320"/>
+            <a:off x="411480" y="5212080"/>
+            <a:ext cx="1417320" cy="274320"/>
           </a:xfrm>
           <a:prstGeom prst="rect">
             <a:avLst/>
@@ -3427,20 +3427,20 @@
               <a:buNone/>
             </a:pPr>
             <a:r>
-              <a:rPr lang="en-US" sz="1000" dirty="0">
+              <a:rPr lang="en-US" sz="900" dirty="0">
                 <a:solidFill>
                   <a:srgbClr val="5F5D63"/>
                 </a:solidFill>
               </a:rPr>
-              <a:t>The Met 2025 大展主視覺</a:t>
-            </a:r>
-            <a:endParaRPr lang="en-US" sz="1000" dirty="0"/>
+              <a:t>The Met 大展主視覺</a:t>
+            </a:r>
+            <a:endParaRPr lang="en-US" sz="900" dirty="0"/>
           </a:p>
         </p:txBody>
       </p:sp>
       <p:pic>
         <p:nvPicPr>
-          <p:cNvPr id="10" name="[Butterflies]" descr="/tmp/claude-0/deck12/img/ffsl_manray_butterflies_met.jpg">    </p:cNvPr>
+          <p:cNvPr id="10" name="《Dragonfly》" descr="/tmp/claude-0/deck12/img/mr_dragonfly_nga.jpg">    </p:cNvPr>
           <p:cNvPicPr>
             <a:picLocks noChangeAspect="1"/>
           </p:cNvPicPr>
@@ -3454,8 +3454,8 @@
         </p:blipFill>
         <p:spPr>
           <a:xfrm>
-            <a:off x="2359152" y="2218252"/>
-            <a:ext cx="1755648" cy="1415656"/>
+            <a:off x="1879092" y="1966881"/>
+            <a:ext cx="1325880" cy="1918398"/>
           </a:xfrm>
           <a:prstGeom prst="rect">
             <a:avLst/>
@@ -3470,7 +3470,7 @@
         </p:nvSpPr>
         <p:spPr>
           <a:xfrm>
-            <a:off x="3163824" y="4453128"/>
+            <a:off x="2468880" y="4453128"/>
             <a:ext cx="146304" cy="146304"/>
           </a:xfrm>
           <a:prstGeom prst="ellipse">
@@ -3495,8 +3495,8 @@
         </p:nvSpPr>
         <p:spPr>
           <a:xfrm>
-            <a:off x="2359152" y="4645152"/>
-            <a:ext cx="1755648" cy="320040"/>
+            <a:off x="1833372" y="4645152"/>
+            <a:ext cx="1417320" cy="320040"/>
           </a:xfrm>
           <a:prstGeom prst="rect">
             <a:avLst/>
@@ -3512,14 +3512,14 @@
               <a:buNone/>
             </a:pPr>
             <a:r>
-              <a:rPr lang="en-US" sz="1600" b="1" dirty="0">
+              <a:rPr lang="en-US" sz="1500" b="1" dirty="0">
                 <a:solidFill>
                   <a:srgbClr val="1C1B1D"/>
                 </a:solidFill>
               </a:rPr>
-              <a:t>約 1930</a:t>
-            </a:r>
-            <a:endParaRPr lang="en-US" sz="1600" dirty="0"/>
+              <a:t>1926</a:t>
+            </a:r>
+            <a:endParaRPr lang="en-US" sz="1500" dirty="0"/>
           </a:p>
         </p:txBody>
       </p:sp>
@@ -3531,8 +3531,8 @@
         </p:nvSpPr>
         <p:spPr>
           <a:xfrm>
-            <a:off x="2359152" y="4956048"/>
-            <a:ext cx="1755648" cy="274320"/>
+            <a:off x="1833372" y="4956048"/>
+            <a:ext cx="1417320" cy="274320"/>
           </a:xfrm>
           <a:prstGeom prst="rect">
             <a:avLst/>
@@ -3548,14 +3548,14 @@
               <a:buNone/>
             </a:pPr>
             <a:r>
-              <a:rPr lang="en-US" sz="1200" dirty="0">
+              <a:rPr lang="en-US" sz="1100" dirty="0">
                 <a:solidFill>
                   <a:srgbClr val="1C1B1D"/>
                 </a:solidFill>
               </a:rPr>
-              <a:t>[Butterflies]</a:t>
-            </a:r>
-            <a:endParaRPr lang="en-US" sz="1200" dirty="0"/>
+              <a:t>《Dragonfly》</a:t>
+            </a:r>
+            <a:endParaRPr lang="en-US" sz="1100" dirty="0"/>
           </a:p>
         </p:txBody>
       </p:sp>
@@ -3567,8 +3567,8 @@
         </p:nvSpPr>
         <p:spPr>
           <a:xfrm>
-            <a:off x="2359152" y="5212080"/>
-            <a:ext cx="1755648" cy="274320"/>
+            <a:off x="1833372" y="5212080"/>
+            <a:ext cx="1417320" cy="274320"/>
           </a:xfrm>
           <a:prstGeom prst="rect">
             <a:avLst/>
@@ -3584,20 +3584,20 @@
               <a:buNone/>
             </a:pPr>
             <a:r>
-              <a:rPr lang="en-US" sz="1000" dirty="0">
+              <a:rPr lang="en-US" sz="900" dirty="0">
                 <a:solidFill>
                   <a:srgbClr val="5F5D63"/>
                 </a:solidFill>
               </a:rPr>
-              <a:t>The Met 1977.539</a:t>
-            </a:r>
-            <a:endParaRPr lang="en-US" sz="1000" dirty="0"/>
+              <a:t>NGA</a:t>
+            </a:r>
+            <a:endParaRPr lang="en-US" sz="900" dirty="0"/>
           </a:p>
         </p:txBody>
       </p:sp>
       <p:pic>
         <p:nvPicPr>
-          <p:cNvPr id="15" name="《Mouche》蜂底片" descr="/tmp/claude-0/deck12/img/v82_pomp4543_pos.jpg">    </p:cNvPr>
+          <p:cNvPr id="15" name="[Butterflies]" descr="/tmp/claude-0/deck12/img/ffsl_manray_butterflies_met.jpg">    </p:cNvPr>
           <p:cNvPicPr>
             <a:picLocks noChangeAspect="1"/>
           </p:cNvPicPr>
@@ -3611,8 +3611,8 @@
         </p:blipFill>
         <p:spPr>
           <a:xfrm>
-            <a:off x="4261104" y="2298436"/>
-            <a:ext cx="1755648" cy="1255288"/>
+            <a:off x="3300984" y="2391522"/>
+            <a:ext cx="1325880" cy="1069115"/>
           </a:xfrm>
           <a:prstGeom prst="rect">
             <a:avLst/>
@@ -3621,14 +3621,328 @@
       </p:pic>
       <p:sp>
         <p:nvSpPr>
-          <p:cNvPr id="16" name="蜂 紅框"/>
+          <p:cNvPr id="16" name="dot2"/>
           <p:cNvSpPr/>
           <p:nvPr/>
         </p:nvSpPr>
         <p:spPr>
           <a:xfrm>
-            <a:off x="4215384" y="2252716"/>
-            <a:ext cx="1847088" cy="1346728"/>
+            <a:off x="3890772" y="4453128"/>
+            <a:ext cx="146304" cy="146304"/>
+          </a:xfrm>
+          <a:prstGeom prst="ellipse">
+            <a:avLst/>
+          </a:prstGeom>
+          <a:solidFill>
+            <a:srgbClr val="8A877F"/>
+          </a:solidFill>
+          <a:ln w="12700">
+            <a:solidFill>
+              <a:srgbClr val="8A877F"/>
+            </a:solidFill>
+            <a:prstDash val="solid"/>
+          </a:ln>
+        </p:spPr>
+      </p:sp>
+      <p:sp>
+        <p:nvSpPr>
+          <p:cNvPr id="17" name="yr2"/>
+          <p:cNvSpPr txBox="1"/>
+          <p:nvPr/>
+        </p:nvSpPr>
+        <p:spPr>
+          <a:xfrm>
+            <a:off x="3255264" y="4645152"/>
+            <a:ext cx="1417320" cy="320040"/>
+          </a:xfrm>
+          <a:prstGeom prst="rect">
+            <a:avLst/>
+          </a:prstGeom>
+          <a:noFill/>
+          <a:ln/>
+        </p:spPr>
+        <p:txBody>
+          <a:bodyPr wrap="square" lIns="0" tIns="0" rIns="0" bIns="0" rtlCol="0" anchor="ctr"/>
+          <a:lstStyle/>
+          <a:p>
+            <a:pPr algn="ctr" indent="0" marL="0">
+              <a:buNone/>
+            </a:pPr>
+            <a:r>
+              <a:rPr lang="en-US" sz="1500" b="1" dirty="0">
+                <a:solidFill>
+                  <a:srgbClr val="1C1B1D"/>
+                </a:solidFill>
+              </a:rPr>
+              <a:t>約 1930</a:t>
+            </a:r>
+            <a:endParaRPr lang="en-US" sz="1500" dirty="0"/>
+          </a:p>
+        </p:txBody>
+      </p:sp>
+      <p:sp>
+        <p:nvSpPr>
+          <p:cNvPr id="18" name="caption"/>
+          <p:cNvSpPr txBox="1"/>
+          <p:nvPr/>
+        </p:nvSpPr>
+        <p:spPr>
+          <a:xfrm>
+            <a:off x="3255264" y="4956048"/>
+            <a:ext cx="1417320" cy="274320"/>
+          </a:xfrm>
+          <a:prstGeom prst="rect">
+            <a:avLst/>
+          </a:prstGeom>
+          <a:noFill/>
+          <a:ln/>
+        </p:spPr>
+        <p:txBody>
+          <a:bodyPr wrap="square" lIns="0" tIns="0" rIns="0" bIns="0" rtlCol="0" anchor="t"/>
+          <a:lstStyle/>
+          <a:p>
+            <a:pPr algn="ctr" indent="0" marL="0">
+              <a:buNone/>
+            </a:pPr>
+            <a:r>
+              <a:rPr lang="en-US" sz="1100" dirty="0">
+                <a:solidFill>
+                  <a:srgbClr val="1C1B1D"/>
+                </a:solidFill>
+              </a:rPr>
+              <a:t>[Butterflies]</a:t>
+            </a:r>
+            <a:endParaRPr lang="en-US" sz="1100" dirty="0"/>
+          </a:p>
+        </p:txBody>
+      </p:sp>
+      <p:sp>
+        <p:nvSpPr>
+          <p:cNvPr id="19" name="caption"/>
+          <p:cNvSpPr txBox="1"/>
+          <p:nvPr/>
+        </p:nvSpPr>
+        <p:spPr>
+          <a:xfrm>
+            <a:off x="3255264" y="5212080"/>
+            <a:ext cx="1417320" cy="274320"/>
+          </a:xfrm>
+          <a:prstGeom prst="rect">
+            <a:avLst/>
+          </a:prstGeom>
+          <a:noFill/>
+          <a:ln/>
+        </p:spPr>
+        <p:txBody>
+          <a:bodyPr wrap="square" lIns="0" tIns="0" rIns="0" bIns="0" rtlCol="0" anchor="t"/>
+          <a:lstStyle/>
+          <a:p>
+            <a:pPr algn="ctr" indent="0" marL="0">
+              <a:buNone/>
+            </a:pPr>
+            <a:r>
+              <a:rPr lang="en-US" sz="900" dirty="0">
+                <a:solidFill>
+                  <a:srgbClr val="5F5D63"/>
+                </a:solidFill>
+              </a:rPr>
+              <a:t>The Met 1977.539</a:t>
+            </a:r>
+            <a:endParaRPr lang="en-US" sz="900" dirty="0"/>
+          </a:p>
+        </p:txBody>
+      </p:sp>
+      <p:pic>
+        <p:nvPicPr>
+          <p:cNvPr id="20" name="《Insectes》" descr="/tmp/claude-0/deck12/img/mr_insectes_breton.jpg">    </p:cNvPr>
+          <p:cNvPicPr>
+            <a:picLocks noChangeAspect="1"/>
+          </p:cNvPicPr>
+          <p:nvPr/>
+        </p:nvPicPr>
+        <p:blipFill>
+          <a:blip r:embed="rId4"/>
+          <a:stretch>
+            <a:fillRect/>
+          </a:stretch>
+        </p:blipFill>
+        <p:spPr>
+          <a:xfrm>
+            <a:off x="4722876" y="2467178"/>
+            <a:ext cx="1325880" cy="917804"/>
+          </a:xfrm>
+          <a:prstGeom prst="rect">
+            <a:avLst/>
+          </a:prstGeom>
+        </p:spPr>
+      </p:pic>
+      <p:sp>
+        <p:nvSpPr>
+          <p:cNvPr id="21" name="dot3"/>
+          <p:cNvSpPr/>
+          <p:nvPr/>
+        </p:nvSpPr>
+        <p:spPr>
+          <a:xfrm>
+            <a:off x="5312664" y="4453128"/>
+            <a:ext cx="146304" cy="146304"/>
+          </a:xfrm>
+          <a:prstGeom prst="ellipse">
+            <a:avLst/>
+          </a:prstGeom>
+          <a:solidFill>
+            <a:srgbClr val="8A877F"/>
+          </a:solidFill>
+          <a:ln w="12700">
+            <a:solidFill>
+              <a:srgbClr val="8A877F"/>
+            </a:solidFill>
+            <a:prstDash val="solid"/>
+          </a:ln>
+        </p:spPr>
+      </p:sp>
+      <p:sp>
+        <p:nvSpPr>
+          <p:cNvPr id="22" name="yr3"/>
+          <p:cNvSpPr txBox="1"/>
+          <p:nvPr/>
+        </p:nvSpPr>
+        <p:spPr>
+          <a:xfrm>
+            <a:off x="4677156" y="4645152"/>
+            <a:ext cx="1417320" cy="320040"/>
+          </a:xfrm>
+          <a:prstGeom prst="rect">
+            <a:avLst/>
+          </a:prstGeom>
+          <a:noFill/>
+          <a:ln/>
+        </p:spPr>
+        <p:txBody>
+          <a:bodyPr wrap="square" lIns="0" tIns="0" rIns="0" bIns="0" rtlCol="0" anchor="ctr"/>
+          <a:lstStyle/>
+          <a:p>
+            <a:pPr algn="ctr" indent="0" marL="0">
+              <a:buNone/>
+            </a:pPr>
+            <a:r>
+              <a:rPr lang="en-US" sz="1500" b="1" dirty="0">
+                <a:solidFill>
+                  <a:srgbClr val="1C1B1D"/>
+                </a:solidFill>
+              </a:rPr>
+              <a:t>約 1930</a:t>
+            </a:r>
+            <a:endParaRPr lang="en-US" sz="1500" dirty="0"/>
+          </a:p>
+        </p:txBody>
+      </p:sp>
+      <p:sp>
+        <p:nvSpPr>
+          <p:cNvPr id="23" name="caption"/>
+          <p:cNvSpPr txBox="1"/>
+          <p:nvPr/>
+        </p:nvSpPr>
+        <p:spPr>
+          <a:xfrm>
+            <a:off x="4677156" y="4956048"/>
+            <a:ext cx="1417320" cy="274320"/>
+          </a:xfrm>
+          <a:prstGeom prst="rect">
+            <a:avLst/>
+          </a:prstGeom>
+          <a:noFill/>
+          <a:ln/>
+        </p:spPr>
+        <p:txBody>
+          <a:bodyPr wrap="square" lIns="0" tIns="0" rIns="0" bIns="0" rtlCol="0" anchor="t"/>
+          <a:lstStyle/>
+          <a:p>
+            <a:pPr algn="ctr" indent="0" marL="0">
+              <a:buNone/>
+            </a:pPr>
+            <a:r>
+              <a:rPr lang="en-US" sz="1100" dirty="0">
+                <a:solidFill>
+                  <a:srgbClr val="1C1B1D"/>
+                </a:solidFill>
+              </a:rPr>
+              <a:t>《Insectes》</a:t>
+            </a:r>
+            <a:endParaRPr lang="en-US" sz="1100" dirty="0"/>
+          </a:p>
+        </p:txBody>
+      </p:sp>
+      <p:sp>
+        <p:nvSpPr>
+          <p:cNvPr id="24" name="caption"/>
+          <p:cNvSpPr txBox="1"/>
+          <p:nvPr/>
+        </p:nvSpPr>
+        <p:spPr>
+          <a:xfrm>
+            <a:off x="4677156" y="5212080"/>
+            <a:ext cx="1417320" cy="274320"/>
+          </a:xfrm>
+          <a:prstGeom prst="rect">
+            <a:avLst/>
+          </a:prstGeom>
+          <a:noFill/>
+          <a:ln/>
+        </p:spPr>
+        <p:txBody>
+          <a:bodyPr wrap="square" lIns="0" tIns="0" rIns="0" bIns="0" rtlCol="0" anchor="t"/>
+          <a:lstStyle/>
+          <a:p>
+            <a:pPr algn="ctr" indent="0" marL="0">
+              <a:buNone/>
+            </a:pPr>
+            <a:r>
+              <a:rPr lang="en-US" sz="900" dirty="0">
+                <a:solidFill>
+                  <a:srgbClr val="5F5D63"/>
+                </a:solidFill>
+              </a:rPr>
+              <a:t>André Breton 舊藏</a:t>
+            </a:r>
+            <a:endParaRPr lang="en-US" sz="900" dirty="0"/>
+          </a:p>
+        </p:txBody>
+      </p:sp>
+      <p:pic>
+        <p:nvPicPr>
+          <p:cNvPr id="25" name="《Mouche》蜂底片" descr="/tmp/claude-0/deck12/img/v82_pomp4543_pos.jpg">    </p:cNvPr>
+          <p:cNvPicPr>
+            <a:picLocks noChangeAspect="1"/>
+          </p:cNvPicPr>
+          <p:nvPr/>
+        </p:nvPicPr>
+        <p:blipFill>
+          <a:blip r:embed="rId5"/>
+          <a:stretch>
+            <a:fillRect/>
+          </a:stretch>
+        </p:blipFill>
+        <p:spPr>
+          <a:xfrm>
+            <a:off x="6144768" y="2452078"/>
+            <a:ext cx="1325880" cy="948004"/>
+          </a:xfrm>
+          <a:prstGeom prst="rect">
+            <a:avLst/>
+          </a:prstGeom>
+        </p:spPr>
+      </p:pic>
+      <p:sp>
+        <p:nvSpPr>
+          <p:cNvPr id="26" name="蜂 紅框"/>
+          <p:cNvSpPr/>
+          <p:nvPr/>
+        </p:nvSpPr>
+        <p:spPr>
+          <a:xfrm>
+            <a:off x="6099048" y="2406358"/>
+            <a:ext cx="1417320" cy="1039444"/>
           </a:xfrm>
           <a:prstGeom prst="rect">
             <a:avLst/>
@@ -3643,13 +3957,13 @@
       </p:sp>
       <p:sp>
         <p:nvSpPr>
-          <p:cNvPr id="17" name="dot2"/>
+          <p:cNvPr id="27" name="dot4"/>
           <p:cNvSpPr/>
           <p:nvPr/>
         </p:nvSpPr>
         <p:spPr>
           <a:xfrm>
-            <a:off x="5065776" y="4453128"/>
+            <a:off x="6734556" y="4453128"/>
             <a:ext cx="146304" cy="146304"/>
           </a:xfrm>
           <a:prstGeom prst="ellipse">
@@ -3668,14 +3982,14 @@
       </p:sp>
       <p:sp>
         <p:nvSpPr>
-          <p:cNvPr id="18" name="yr2"/>
-          <p:cNvSpPr txBox="1"/>
-          <p:nvPr/>
-        </p:nvSpPr>
-        <p:spPr>
-          <a:xfrm>
-            <a:off x="4261104" y="4645152"/>
-            <a:ext cx="1755648" cy="320040"/>
+          <p:cNvPr id="28" name="yr4"/>
+          <p:cNvSpPr txBox="1"/>
+          <p:nvPr/>
+        </p:nvSpPr>
+        <p:spPr>
+          <a:xfrm>
+            <a:off x="6099048" y="4645152"/>
+            <a:ext cx="1417320" cy="320040"/>
           </a:xfrm>
           <a:prstGeom prst="rect">
             <a:avLst/>
@@ -3691,27 +4005,27 @@
               <a:buNone/>
             </a:pPr>
             <a:r>
-              <a:rPr lang="en-US" sz="1600" b="1" dirty="0">
+              <a:rPr lang="en-US" sz="1500" b="1" dirty="0">
                 <a:solidFill>
                   <a:srgbClr val="A8321F"/>
                 </a:solidFill>
               </a:rPr>
               <a:t>約 1930</a:t>
             </a:r>
-            <a:endParaRPr lang="en-US" sz="1600" dirty="0"/>
-          </a:p>
-        </p:txBody>
-      </p:sp>
-      <p:sp>
-        <p:nvSpPr>
-          <p:cNvPr id="19" name="caption"/>
-          <p:cNvSpPr txBox="1"/>
-          <p:nvPr/>
-        </p:nvSpPr>
-        <p:spPr>
-          <a:xfrm>
-            <a:off x="4261104" y="4956048"/>
-            <a:ext cx="1755648" cy="274320"/>
+            <a:endParaRPr lang="en-US" sz="1500" dirty="0"/>
+          </a:p>
+        </p:txBody>
+      </p:sp>
+      <p:sp>
+        <p:nvSpPr>
+          <p:cNvPr id="29" name="caption"/>
+          <p:cNvSpPr txBox="1"/>
+          <p:nvPr/>
+        </p:nvSpPr>
+        <p:spPr>
+          <a:xfrm>
+            <a:off x="6099048" y="4956048"/>
+            <a:ext cx="1417320" cy="274320"/>
           </a:xfrm>
           <a:prstGeom prst="rect">
             <a:avLst/>
@@ -3727,27 +4041,27 @@
               <a:buNone/>
             </a:pPr>
             <a:r>
-              <a:rPr lang="en-US" sz="1200" dirty="0">
+              <a:rPr lang="en-US" sz="1100" dirty="0">
                 <a:solidFill>
                   <a:srgbClr val="1C1B1D"/>
                 </a:solidFill>
               </a:rPr>
               <a:t>《Mouche》蜂底片</a:t>
             </a:r>
-            <a:endParaRPr lang="en-US" sz="1200" dirty="0"/>
-          </a:p>
-        </p:txBody>
-      </p:sp>
-      <p:sp>
-        <p:nvSpPr>
-          <p:cNvPr id="20" name="caption"/>
-          <p:cNvSpPr txBox="1"/>
-          <p:nvPr/>
-        </p:nvSpPr>
-        <p:spPr>
-          <a:xfrm>
-            <a:off x="4261104" y="5212080"/>
-            <a:ext cx="1755648" cy="274320"/>
+            <a:endParaRPr lang="en-US" sz="1100" dirty="0"/>
+          </a:p>
+        </p:txBody>
+      </p:sp>
+      <p:sp>
+        <p:nvSpPr>
+          <p:cNvPr id="30" name="caption"/>
+          <p:cNvSpPr txBox="1"/>
+          <p:nvPr/>
+        </p:nvSpPr>
+        <p:spPr>
+          <a:xfrm>
+            <a:off x="6099048" y="5212080"/>
+            <a:ext cx="1417320" cy="274320"/>
           </a:xfrm>
           <a:prstGeom prst="rect">
             <a:avLst/>
@@ -3763,35 +4077,35 @@
               <a:buNone/>
             </a:pPr>
             <a:r>
-              <a:rPr lang="en-US" sz="1000" dirty="0">
+              <a:rPr lang="en-US" sz="900" dirty="0">
                 <a:solidFill>
                   <a:srgbClr val="5F5D63"/>
                 </a:solidFill>
               </a:rPr>
               <a:t>Pompidou</a:t>
             </a:r>
-            <a:endParaRPr lang="en-US" sz="1000" dirty="0"/>
+            <a:endParaRPr lang="en-US" sz="900" dirty="0"/>
           </a:p>
         </p:txBody>
       </p:sp>
       <p:pic>
         <p:nvPicPr>
-          <p:cNvPr id="21" name="《Butterflies》" descr="/tmp/claude-0/deck12/img/p242.jpg">    </p:cNvPr>
+          <p:cNvPr id="31" name="《Butterflies》" descr="/tmp/claude-0/deck12/img/p242.jpg">    </p:cNvPr>
           <p:cNvPicPr>
             <a:picLocks noChangeAspect="1"/>
           </p:cNvPicPr>
           <p:nvPr/>
         </p:nvPicPr>
         <p:blipFill>
-          <a:blip r:embed="rId4"/>
+          <a:blip r:embed="rId6"/>
           <a:stretch>
             <a:fillRect/>
           </a:stretch>
         </p:blipFill>
         <p:spPr>
           <a:xfrm>
-            <a:off x="6163056" y="2384577"/>
-            <a:ext cx="1755648" cy="1083005"/>
+            <a:off x="7566660" y="2517133"/>
+            <a:ext cx="1325880" cy="817895"/>
           </a:xfrm>
           <a:prstGeom prst="rect">
             <a:avLst/>
@@ -3800,13 +4114,13 @@
       </p:pic>
       <p:sp>
         <p:nvSpPr>
-          <p:cNvPr id="22" name="dot3"/>
+          <p:cNvPr id="32" name="dot5"/>
           <p:cNvSpPr/>
           <p:nvPr/>
         </p:nvSpPr>
         <p:spPr>
           <a:xfrm>
-            <a:off x="6967728" y="4453128"/>
+            <a:off x="8156448" y="4453128"/>
             <a:ext cx="146304" cy="146304"/>
           </a:xfrm>
           <a:prstGeom prst="ellipse">
@@ -3825,14 +4139,14 @@
       </p:sp>
       <p:sp>
         <p:nvSpPr>
-          <p:cNvPr id="23" name="yr3"/>
-          <p:cNvSpPr txBox="1"/>
-          <p:nvPr/>
-        </p:nvSpPr>
-        <p:spPr>
-          <a:xfrm>
-            <a:off x="6163056" y="4645152"/>
-            <a:ext cx="1755648" cy="320040"/>
+          <p:cNvPr id="33" name="yr5"/>
+          <p:cNvSpPr txBox="1"/>
+          <p:nvPr/>
+        </p:nvSpPr>
+        <p:spPr>
+          <a:xfrm>
+            <a:off x="7520940" y="4645152"/>
+            <a:ext cx="1417320" cy="320040"/>
           </a:xfrm>
           <a:prstGeom prst="rect">
             <a:avLst/>
@@ -3848,27 +4162,27 @@
               <a:buNone/>
             </a:pPr>
             <a:r>
-              <a:rPr lang="en-US" sz="1600" b="1" dirty="0">
+              <a:rPr lang="en-US" sz="1500" b="1" dirty="0">
                 <a:solidFill>
                   <a:srgbClr val="1C1B1D"/>
                 </a:solidFill>
               </a:rPr>
               <a:t>1935</a:t>
             </a:r>
-            <a:endParaRPr lang="en-US" sz="1600" dirty="0"/>
-          </a:p>
-        </p:txBody>
-      </p:sp>
-      <p:sp>
-        <p:nvSpPr>
-          <p:cNvPr id="24" name="caption"/>
-          <p:cNvSpPr txBox="1"/>
-          <p:nvPr/>
-        </p:nvSpPr>
-        <p:spPr>
-          <a:xfrm>
-            <a:off x="6163056" y="4956048"/>
-            <a:ext cx="1755648" cy="274320"/>
+            <a:endParaRPr lang="en-US" sz="1500" dirty="0"/>
+          </a:p>
+        </p:txBody>
+      </p:sp>
+      <p:sp>
+        <p:nvSpPr>
+          <p:cNvPr id="34" name="caption"/>
+          <p:cNvSpPr txBox="1"/>
+          <p:nvPr/>
+        </p:nvSpPr>
+        <p:spPr>
+          <a:xfrm>
+            <a:off x="7520940" y="4956048"/>
+            <a:ext cx="1417320" cy="274320"/>
           </a:xfrm>
           <a:prstGeom prst="rect">
             <a:avLst/>
@@ -3884,27 +4198,27 @@
               <a:buNone/>
             </a:pPr>
             <a:r>
-              <a:rPr lang="en-US" sz="1200" dirty="0">
+              <a:rPr lang="en-US" sz="1100" dirty="0">
                 <a:solidFill>
                   <a:srgbClr val="1C1B1D"/>
                 </a:solidFill>
               </a:rPr>
               <a:t>《Butterflies》</a:t>
             </a:r>
-            <a:endParaRPr lang="en-US" sz="1200" dirty="0"/>
-          </a:p>
-        </p:txBody>
-      </p:sp>
-      <p:sp>
-        <p:nvSpPr>
-          <p:cNvPr id="25" name="caption"/>
-          <p:cNvSpPr txBox="1"/>
-          <p:nvPr/>
-        </p:nvSpPr>
-        <p:spPr>
-          <a:xfrm>
-            <a:off x="6163056" y="5212080"/>
-            <a:ext cx="1755648" cy="274320"/>
+            <a:endParaRPr lang="en-US" sz="1100" dirty="0"/>
+          </a:p>
+        </p:txBody>
+      </p:sp>
+      <p:sp>
+        <p:nvSpPr>
+          <p:cNvPr id="35" name="caption"/>
+          <p:cNvSpPr txBox="1"/>
+          <p:nvPr/>
+        </p:nvSpPr>
+        <p:spPr>
+          <a:xfrm>
+            <a:off x="7520940" y="5212080"/>
+            <a:ext cx="1417320" cy="274320"/>
           </a:xfrm>
           <a:prstGeom prst="rect">
             <a:avLst/>
@@ -3920,35 +4234,35 @@
               <a:buNone/>
             </a:pPr>
             <a:r>
-              <a:rPr lang="en-US" sz="1000" dirty="0">
+              <a:rPr lang="en-US" sz="900" dirty="0">
                 <a:solidFill>
                   <a:srgbClr val="5F5D63"/>
                 </a:solidFill>
               </a:rPr>
               <a:t>研究素材 p.242</a:t>
             </a:r>
-            <a:endParaRPr lang="en-US" sz="1000" dirty="0"/>
+            <a:endParaRPr lang="en-US" sz="900" dirty="0"/>
           </a:p>
         </p:txBody>
       </p:sp>
       <p:pic>
         <p:nvPicPr>
-          <p:cNvPr id="26" name="《Sauterelle》蚱蜢" descr="/tmp/claude-0/deck12/img/pomp4553_sauterelle_inv.jpg">    </p:cNvPr>
+          <p:cNvPr id="36" name="《Sauterelle》" descr="/tmp/claude-0/deck12/img/pomp4553_sauterelle_inv.jpg">    </p:cNvPr>
           <p:cNvPicPr>
             <a:picLocks noChangeAspect="1"/>
           </p:cNvPicPr>
           <p:nvPr/>
         </p:nvPicPr>
         <p:blipFill>
-          <a:blip r:embed="rId5"/>
+          <a:blip r:embed="rId7"/>
           <a:stretch>
             <a:fillRect/>
           </a:stretch>
         </p:blipFill>
         <p:spPr>
           <a:xfrm>
-            <a:off x="8065008" y="2350954"/>
-            <a:ext cx="1755648" cy="1150252"/>
+            <a:off x="8988552" y="2491740"/>
+            <a:ext cx="1325880" cy="868680"/>
           </a:xfrm>
           <a:prstGeom prst="rect">
             <a:avLst/>
@@ -3957,13 +4271,13 @@
       </p:pic>
       <p:sp>
         <p:nvSpPr>
-          <p:cNvPr id="27" name="dot4"/>
+          <p:cNvPr id="37" name="dot6"/>
           <p:cNvSpPr/>
           <p:nvPr/>
         </p:nvSpPr>
         <p:spPr>
           <a:xfrm>
-            <a:off x="8869680" y="4453128"/>
+            <a:off x="9578340" y="4453128"/>
             <a:ext cx="146304" cy="146304"/>
           </a:xfrm>
           <a:prstGeom prst="ellipse">
@@ -3982,14 +4296,14 @@
       </p:sp>
       <p:sp>
         <p:nvSpPr>
-          <p:cNvPr id="28" name="yr4"/>
-          <p:cNvSpPr txBox="1"/>
-          <p:nvPr/>
-        </p:nvSpPr>
-        <p:spPr>
-          <a:xfrm>
-            <a:off x="8065008" y="4645152"/>
-            <a:ext cx="1755648" cy="320040"/>
+          <p:cNvPr id="38" name="yr6"/>
+          <p:cNvSpPr txBox="1"/>
+          <p:nvPr/>
+        </p:nvSpPr>
+        <p:spPr>
+          <a:xfrm>
+            <a:off x="8942832" y="4645152"/>
+            <a:ext cx="1417320" cy="320040"/>
           </a:xfrm>
           <a:prstGeom prst="rect">
             <a:avLst/>
@@ -4005,27 +4319,27 @@
               <a:buNone/>
             </a:pPr>
             <a:r>
-              <a:rPr lang="en-US" sz="1600" b="1" dirty="0">
+              <a:rPr lang="en-US" sz="1500" b="1" dirty="0">
                 <a:solidFill>
                   <a:srgbClr val="1C1B1D"/>
                 </a:solidFill>
               </a:rPr>
               <a:t>約 1945</a:t>
             </a:r>
-            <a:endParaRPr lang="en-US" sz="1600" dirty="0"/>
-          </a:p>
-        </p:txBody>
-      </p:sp>
-      <p:sp>
-        <p:nvSpPr>
-          <p:cNvPr id="29" name="caption"/>
-          <p:cNvSpPr txBox="1"/>
-          <p:nvPr/>
-        </p:nvSpPr>
-        <p:spPr>
-          <a:xfrm>
-            <a:off x="8065008" y="4956048"/>
-            <a:ext cx="1755648" cy="274320"/>
+            <a:endParaRPr lang="en-US" sz="1500" dirty="0"/>
+          </a:p>
+        </p:txBody>
+      </p:sp>
+      <p:sp>
+        <p:nvSpPr>
+          <p:cNvPr id="39" name="caption"/>
+          <p:cNvSpPr txBox="1"/>
+          <p:nvPr/>
+        </p:nvSpPr>
+        <p:spPr>
+          <a:xfrm>
+            <a:off x="8942832" y="4956048"/>
+            <a:ext cx="1417320" cy="274320"/>
           </a:xfrm>
           <a:prstGeom prst="rect">
             <a:avLst/>
@@ -4041,27 +4355,27 @@
               <a:buNone/>
             </a:pPr>
             <a:r>
-              <a:rPr lang="en-US" sz="1200" dirty="0">
+              <a:rPr lang="en-US" sz="1100" dirty="0">
                 <a:solidFill>
                   <a:srgbClr val="1C1B1D"/>
                 </a:solidFill>
               </a:rPr>
-              <a:t>《Sauterelle》蚱蜢</a:t>
-            </a:r>
-            <a:endParaRPr lang="en-US" sz="1200" dirty="0"/>
-          </a:p>
-        </p:txBody>
-      </p:sp>
-      <p:sp>
-        <p:nvSpPr>
-          <p:cNvPr id="30" name="caption"/>
-          <p:cNvSpPr txBox="1"/>
-          <p:nvPr/>
-        </p:nvSpPr>
-        <p:spPr>
-          <a:xfrm>
-            <a:off x="8065008" y="5212080"/>
-            <a:ext cx="1755648" cy="274320"/>
+              <a:t>《Sauterelle》</a:t>
+            </a:r>
+            <a:endParaRPr lang="en-US" sz="1100" dirty="0"/>
+          </a:p>
+        </p:txBody>
+      </p:sp>
+      <p:sp>
+        <p:nvSpPr>
+          <p:cNvPr id="40" name="caption"/>
+          <p:cNvSpPr txBox="1"/>
+          <p:nvPr/>
+        </p:nvSpPr>
+        <p:spPr>
+          <a:xfrm>
+            <a:off x="8942832" y="5212080"/>
+            <a:ext cx="1417320" cy="274320"/>
           </a:xfrm>
           <a:prstGeom prst="rect">
             <a:avLst/>
@@ -4077,35 +4391,35 @@
               <a:buNone/>
             </a:pPr>
             <a:r>
-              <a:rPr lang="en-US" sz="1000" dirty="0">
+              <a:rPr lang="en-US" sz="900" dirty="0">
                 <a:solidFill>
                   <a:srgbClr val="5F5D63"/>
                 </a:solidFill>
               </a:rPr>
               <a:t>Pompidou（反相）</a:t>
             </a:r>
-            <a:endParaRPr lang="en-US" sz="1000" dirty="0"/>
+            <a:endParaRPr lang="en-US" sz="900" dirty="0"/>
           </a:p>
         </p:txBody>
       </p:sp>
       <p:pic>
         <p:nvPicPr>
-          <p:cNvPr id="31" name="《For Immobility》" descr="/tmp/claude-0/deck12/img/ffsl_manray_for_immobility_aic.jpg">    </p:cNvPr>
+          <p:cNvPr id="41" name="《For Immobility》" descr="/tmp/claude-0/deck12/img/ffsl_manray_for_immobility_aic.jpg">    </p:cNvPr>
           <p:cNvPicPr>
             <a:picLocks noChangeAspect="1"/>
           </p:cNvPicPr>
           <p:nvPr/>
         </p:nvPicPr>
         <p:blipFill>
-          <a:blip r:embed="rId6"/>
+          <a:blip r:embed="rId8"/>
           <a:stretch>
             <a:fillRect/>
           </a:stretch>
         </p:blipFill>
         <p:spPr>
           <a:xfrm>
-            <a:off x="9966960" y="2300224"/>
-            <a:ext cx="1755648" cy="1251712"/>
+            <a:off x="10410444" y="2453428"/>
+            <a:ext cx="1325880" cy="945303"/>
           </a:xfrm>
           <a:prstGeom prst="rect">
             <a:avLst/>
@@ -4114,13 +4428,13 @@
       </p:pic>
       <p:sp>
         <p:nvSpPr>
-          <p:cNvPr id="32" name="dot5"/>
+          <p:cNvPr id="42" name="dot7"/>
           <p:cNvSpPr/>
           <p:nvPr/>
         </p:nvSpPr>
         <p:spPr>
           <a:xfrm>
-            <a:off x="10771632" y="4453128"/>
+            <a:off x="11000232" y="4453128"/>
             <a:ext cx="146304" cy="146304"/>
           </a:xfrm>
           <a:prstGeom prst="ellipse">
@@ -4139,14 +4453,14 @@
       </p:sp>
       <p:sp>
         <p:nvSpPr>
-          <p:cNvPr id="33" name="yr5"/>
-          <p:cNvSpPr txBox="1"/>
-          <p:nvPr/>
-        </p:nvSpPr>
-        <p:spPr>
-          <a:xfrm>
-            <a:off x="9966960" y="4645152"/>
-            <a:ext cx="1755648" cy="320040"/>
+          <p:cNvPr id="43" name="yr7"/>
+          <p:cNvSpPr txBox="1"/>
+          <p:nvPr/>
+        </p:nvSpPr>
+        <p:spPr>
+          <a:xfrm>
+            <a:off x="10364724" y="4645152"/>
+            <a:ext cx="1417320" cy="320040"/>
           </a:xfrm>
           <a:prstGeom prst="rect">
             <a:avLst/>
@@ -4162,27 +4476,27 @@
               <a:buNone/>
             </a:pPr>
             <a:r>
-              <a:rPr lang="en-US" sz="1600" b="1" dirty="0">
+              <a:rPr lang="en-US" sz="1500" b="1" dirty="0">
                 <a:solidFill>
                   <a:srgbClr val="1C1B1D"/>
                 </a:solidFill>
               </a:rPr>
               <a:t>1947</a:t>
             </a:r>
-            <a:endParaRPr lang="en-US" sz="1600" dirty="0"/>
-          </a:p>
-        </p:txBody>
-      </p:sp>
-      <p:sp>
-        <p:nvSpPr>
-          <p:cNvPr id="34" name="caption"/>
-          <p:cNvSpPr txBox="1"/>
-          <p:nvPr/>
-        </p:nvSpPr>
-        <p:spPr>
-          <a:xfrm>
-            <a:off x="9966960" y="4956048"/>
-            <a:ext cx="1755648" cy="274320"/>
+            <a:endParaRPr lang="en-US" sz="1500" dirty="0"/>
+          </a:p>
+        </p:txBody>
+      </p:sp>
+      <p:sp>
+        <p:nvSpPr>
+          <p:cNvPr id="44" name="caption"/>
+          <p:cNvSpPr txBox="1"/>
+          <p:nvPr/>
+        </p:nvSpPr>
+        <p:spPr>
+          <a:xfrm>
+            <a:off x="10364724" y="4956048"/>
+            <a:ext cx="1417320" cy="274320"/>
           </a:xfrm>
           <a:prstGeom prst="rect">
             <a:avLst/>
@@ -4198,27 +4512,27 @@
               <a:buNone/>
             </a:pPr>
             <a:r>
-              <a:rPr lang="en-US" sz="1200" dirty="0">
+              <a:rPr lang="en-US" sz="1100" dirty="0">
                 <a:solidFill>
                   <a:srgbClr val="1C1B1D"/>
                 </a:solidFill>
               </a:rPr>
               <a:t>《For Immobility》</a:t>
             </a:r>
-            <a:endParaRPr lang="en-US" sz="1200" dirty="0"/>
-          </a:p>
-        </p:txBody>
-      </p:sp>
-      <p:sp>
-        <p:nvSpPr>
-          <p:cNvPr id="35" name="caption"/>
-          <p:cNvSpPr txBox="1"/>
-          <p:nvPr/>
-        </p:nvSpPr>
-        <p:spPr>
-          <a:xfrm>
-            <a:off x="9966960" y="5212080"/>
-            <a:ext cx="1755648" cy="274320"/>
+            <a:endParaRPr lang="en-US" sz="1100" dirty="0"/>
+          </a:p>
+        </p:txBody>
+      </p:sp>
+      <p:sp>
+        <p:nvSpPr>
+          <p:cNvPr id="45" name="caption"/>
+          <p:cNvSpPr txBox="1"/>
+          <p:nvPr/>
+        </p:nvSpPr>
+        <p:spPr>
+          <a:xfrm>
+            <a:off x="10364724" y="5212080"/>
+            <a:ext cx="1417320" cy="274320"/>
           </a:xfrm>
           <a:prstGeom prst="rect">
             <a:avLst/>
@@ -4234,20 +4548,20 @@
               <a:buNone/>
             </a:pPr>
             <a:r>
-              <a:rPr lang="en-US" sz="1000" dirty="0">
+              <a:rPr lang="en-US" sz="900" dirty="0">
                 <a:solidFill>
                   <a:srgbClr val="5F5D63"/>
                 </a:solidFill>
               </a:rPr>
-              <a:t>Art Institute of Chicago</a:t>
-            </a:r>
-            <a:endParaRPr lang="en-US" sz="1000" dirty="0"/>
-          </a:p>
-        </p:txBody>
-      </p:sp>
-      <p:sp>
-        <p:nvSpPr>
-          <p:cNvPr id="36" name="body"/>
+              <a:t>AIC 249441</a:t>
+            </a:r>
+            <a:endParaRPr lang="en-US" sz="900" dirty="0"/>
+          </a:p>
+        </p:txBody>
+      </p:sp>
+      <p:sp>
+        <p:nvSpPr>
+          <p:cNvPr id="46" name="body"/>
           <p:cNvSpPr txBox="1"/>
           <p:nvPr/>
         </p:nvSpPr>
@@ -4278,7 +4592,7 @@
                   <a:srgbClr val="5F5D63"/>
                 </a:solidFill>
               </a:rPr>
-              <a:t>另有：《Dragonfly》1926（MoMA，pochoir 版畫）、《Insectes》約 1930（André Breton 舊藏）</a:t>
+              <a:t>《Insectes》裡的天牛與花潛金龜，也出現在 [Butterflies] 下緣：同一批標本</a:t>
             </a:r>
             <a:endParaRPr lang="en-US" sz="1200" dirty="0"/>
           </a:p>
@@ -4286,7 +4600,7 @@
       </p:sp>
       <p:sp>
         <p:nvSpPr>
-          <p:cNvPr id="37" name="takeaway-bar"/>
+          <p:cNvPr id="47" name="takeaway-bar"/>
           <p:cNvSpPr/>
           <p:nvPr/>
         </p:nvSpPr>
@@ -4311,7 +4625,7 @@
       </p:sp>
       <p:sp>
         <p:nvSpPr>
-          <p:cNvPr id="38" name="takeaway"/>
+          <p:cNvPr id="48" name="takeaway"/>
           <p:cNvSpPr txBox="1"/>
           <p:nvPr/>
         </p:nvSpPr>
@@ -4347,7 +4661,7 @@
       </p:sp>
       <p:sp>
         <p:nvSpPr>
-          <p:cNvPr id="39" name="source"/>
+          <p:cNvPr id="49" name="source"/>
           <p:cNvSpPr txBox="1"/>
           <p:nvPr/>
         </p:nvSpPr>
@@ -4375,7 +4689,7 @@
                   <a:srgbClr val="8A877F"/>
                 </a:solidFill>
               </a:rPr>
-              <a:t>出處：The Met 新聞稿《Man Ray: When Objects Dream》、1977.539；Centre Pompidou；研究素材 p.242；AIC 249441；MoMA 385.1988.10；André Breton 舊藏 2003 Lot 5144</a:t>
+              <a:t>出處：The Met 新聞稿、1977.539；NGA《Revolving Doors》（MoMA 385.1988.10 同版）；André Breton 舊藏 2003 Lot 5144；Centre Pompidou；研究素材 p.242；AIC 249441</a:t>
             </a:r>
             <a:endParaRPr lang="en-US" sz="900" dirty="0"/>
           </a:p>
@@ -5636,7 +5950,7 @@
         <p:spPr>
           <a:xfrm>
             <a:off x="457200" y="1325880"/>
-            <a:ext cx="3805453" cy="4709160"/>
+            <a:ext cx="3362099" cy="4160520"/>
           </a:xfrm>
           <a:prstGeom prst="rect">
             <a:avLst/>
@@ -5651,8 +5965,8 @@
         </p:nvSpPr>
         <p:spPr>
           <a:xfrm>
-            <a:off x="457200" y="6071616"/>
-            <a:ext cx="5029200" cy="320040"/>
+            <a:off x="457200" y="5522976"/>
+            <a:ext cx="4206240" cy="320040"/>
           </a:xfrm>
           <a:prstGeom prst="rect">
             <a:avLst/>
@@ -5679,16 +5993,208 @@
           </a:p>
         </p:txBody>
       </p:sp>
-      <p:sp>
-        <p:nvSpPr>
-          <p:cNvPr id="6" name="body"/>
-          <p:cNvSpPr txBox="1"/>
-          <p:nvPr/>
-        </p:nvSpPr>
-        <p:spPr>
-          <a:xfrm>
-            <a:off x="5486400" y="1463040"/>
-            <a:ext cx="6217920" cy="3291840"/>
+      <p:pic>
+        <p:nvPicPr>
+          <p:cNvPr id="6" name="Magnolia 1926" descr="/tmp/claude-0/deck12/img/mr_magnolia_1926.jpg">    </p:cNvPr>
+          <p:cNvPicPr>
+            <a:picLocks noChangeAspect="1"/>
+          </p:cNvPicPr>
+          <p:nvPr/>
+        </p:nvPicPr>
+        <p:blipFill>
+          <a:blip r:embed="rId2"/>
+          <a:stretch>
+            <a:fillRect/>
+          </a:stretch>
+        </p:blipFill>
+        <p:spPr>
+          <a:xfrm>
+            <a:off x="4709160" y="1325880"/>
+            <a:ext cx="2427593" cy="2926080"/>
+          </a:xfrm>
+          <a:prstGeom prst="rect">
+            <a:avLst/>
+          </a:prstGeom>
+        </p:spPr>
+      </p:pic>
+      <p:sp>
+        <p:nvSpPr>
+          <p:cNvPr id="7" name="caption"/>
+          <p:cNvSpPr txBox="1"/>
+          <p:nvPr/>
+        </p:nvSpPr>
+        <p:spPr>
+          <a:xfrm>
+            <a:off x="4709160" y="4288536"/>
+            <a:ext cx="3017520" cy="320040"/>
+          </a:xfrm>
+          <a:prstGeom prst="rect">
+            <a:avLst/>
+          </a:prstGeom>
+          <a:noFill/>
+          <a:ln/>
+        </p:spPr>
+        <p:txBody>
+          <a:bodyPr wrap="square" lIns="0" tIns="0" rIns="0" bIns="0" rtlCol="0" anchor="t"/>
+          <a:lstStyle/>
+          <a:p>
+            <a:pPr algn="l" indent="0" marL="0">
+              <a:buNone/>
+            </a:pPr>
+            <a:r>
+              <a:rPr lang="en-US" sz="1200" dirty="0">
+                <a:solidFill>
+                  <a:srgbClr val="5F5D63"/>
+                </a:solidFill>
+              </a:rPr>
+              <a:t>《Magnolia》1926（Phillips 2024）</a:t>
+            </a:r>
+            <a:endParaRPr lang="en-US" sz="1200" dirty="0"/>
+          </a:p>
+        </p:txBody>
+      </p:sp>
+      <p:sp>
+        <p:nvSpPr>
+          <p:cNvPr id="8" name="plus"/>
+          <p:cNvSpPr txBox="1"/>
+          <p:nvPr/>
+        </p:nvSpPr>
+        <p:spPr>
+          <a:xfrm>
+            <a:off x="7589520" y="2331720"/>
+            <a:ext cx="457200" cy="548640"/>
+          </a:xfrm>
+          <a:prstGeom prst="rect">
+            <a:avLst/>
+          </a:prstGeom>
+          <a:noFill/>
+          <a:ln/>
+        </p:spPr>
+        <p:txBody>
+          <a:bodyPr wrap="square" lIns="0" tIns="0" rIns="0" bIns="0" rtlCol="0" anchor="ctr"/>
+          <a:lstStyle/>
+          <a:p>
+            <a:pPr algn="ctr" indent="0" marL="0">
+              <a:buNone/>
+            </a:pPr>
+            <a:r>
+              <a:rPr lang="en-US" sz="2800" b="1" dirty="0">
+                <a:solidFill>
+                  <a:srgbClr val="A8321F"/>
+                </a:solidFill>
+              </a:rPr>
+              <a:t>＋</a:t>
+            </a:r>
+            <a:endParaRPr lang="en-US" sz="2800" dirty="0"/>
+          </a:p>
+        </p:txBody>
+      </p:sp>
+      <p:pic>
+        <p:nvPicPr>
+          <p:cNvPr id="9" name="Magnolia double" descr="/tmp/claude-0/deck12/img/mr_magnolia_double.jpg">    </p:cNvPr>
+          <p:cNvPicPr>
+            <a:picLocks noChangeAspect="1"/>
+          </p:cNvPicPr>
+          <p:nvPr/>
+        </p:nvPicPr>
+        <p:blipFill>
+          <a:blip r:embed="rId3"/>
+          <a:stretch>
+            <a:fillRect/>
+          </a:stretch>
+        </p:blipFill>
+        <p:spPr>
+          <a:xfrm>
+            <a:off x="8046720" y="1325880"/>
+            <a:ext cx="3657600" cy="2365248"/>
+          </a:xfrm>
+          <a:prstGeom prst="rect">
+            <a:avLst/>
+          </a:prstGeom>
+        </p:spPr>
+      </p:pic>
+      <p:sp>
+        <p:nvSpPr>
+          <p:cNvPr id="10" name="caption"/>
+          <p:cNvSpPr txBox="1"/>
+          <p:nvPr/>
+        </p:nvSpPr>
+        <p:spPr>
+          <a:xfrm>
+            <a:off x="8046720" y="3727704"/>
+            <a:ext cx="3657600" cy="320040"/>
+          </a:xfrm>
+          <a:prstGeom prst="rect">
+            <a:avLst/>
+          </a:prstGeom>
+          <a:noFill/>
+          <a:ln/>
+        </p:spPr>
+        <p:txBody>
+          <a:bodyPr wrap="square" lIns="0" tIns="0" rIns="0" bIns="0" rtlCol="0" anchor="t"/>
+          <a:lstStyle/>
+          <a:p>
+            <a:pPr algn="l" indent="0" marL="0">
+              <a:buNone/>
+            </a:pPr>
+            <a:r>
+              <a:rPr lang="en-US" sz="1200" dirty="0">
+                <a:solidFill>
+                  <a:srgbClr val="5F5D63"/>
+                </a:solidFill>
+              </a:rPr>
+              <a:t>《Magnolia（Double exposure）》1930s</a:t>
+            </a:r>
+            <a:endParaRPr lang="en-US" sz="1200" dirty="0"/>
+          </a:p>
+        </p:txBody>
+      </p:sp>
+      <p:sp>
+        <p:nvSpPr>
+          <p:cNvPr id="11" name="caption"/>
+          <p:cNvSpPr txBox="1"/>
+          <p:nvPr/>
+        </p:nvSpPr>
+        <p:spPr>
+          <a:xfrm>
+            <a:off x="8046720" y="3965448"/>
+            <a:ext cx="3657600" cy="320040"/>
+          </a:xfrm>
+          <a:prstGeom prst="rect">
+            <a:avLst/>
+          </a:prstGeom>
+          <a:noFill/>
+          <a:ln/>
+        </p:spPr>
+        <p:txBody>
+          <a:bodyPr wrap="square" lIns="0" tIns="0" rIns="0" bIns="0" rtlCol="0" anchor="t"/>
+          <a:lstStyle/>
+          <a:p>
+            <a:pPr algn="l" indent="0" marL="0">
+              <a:buNone/>
+            </a:pPr>
+            <a:r>
+              <a:rPr lang="en-US" sz="1200" dirty="0">
+                <a:solidFill>
+                  <a:srgbClr val="5F5D63"/>
+                </a:solidFill>
+              </a:rPr>
+              <a:t>木蘭花＋女性的眼睛（Sotheby’s 2017）</a:t>
+            </a:r>
+            <a:endParaRPr lang="en-US" sz="1200" dirty="0"/>
+          </a:p>
+        </p:txBody>
+      </p:sp>
+      <p:sp>
+        <p:nvSpPr>
+          <p:cNvPr id="12" name="body"/>
+          <p:cNvSpPr txBox="1"/>
+          <p:nvPr/>
+        </p:nvSpPr>
+        <p:spPr>
+          <a:xfrm>
+            <a:off x="4709160" y="4800600"/>
+            <a:ext cx="7040880" cy="822960"/>
           </a:xfrm>
           <a:prstGeom prst="rect">
             <a:avLst/>
@@ -5702,24 +6208,24 @@
           <a:p>
             <a:pPr algn="l" indent="0" marL="0">
               <a:spcAft>
-                <a:spcPts val="400"/>
+                <a:spcPts val="200"/>
               </a:spcAft>
               <a:buNone/>
             </a:pPr>
             <a:r>
-              <a:rPr lang="en-US" sz="1800" b="1" dirty="0">
+              <a:rPr lang="en-US" sz="1600" b="1" dirty="0">
                 <a:solidFill>
                   <a:srgbClr val="1C1B1D"/>
                 </a:solidFill>
               </a:rPr>
-              <a:t>印相時把兩張底片疊在一起</a:t>
-            </a:r>
-            <a:endParaRPr lang="en-US" sz="1800" dirty="0"/>
+              <a:t>木蘭花裡浮出一雙眼睛：兩張照片疊印</a:t>
+            </a:r>
+            <a:endParaRPr lang="en-US" sz="1600" dirty="0"/>
           </a:p>
           <a:p>
             <a:pPr algn="l" indent="0" marL="0">
               <a:spcAft>
-                <a:spcPts val="400"/>
+                <a:spcPts val="200"/>
               </a:spcAft>
               <a:buNone/>
             </a:pPr>
@@ -5729,89 +6235,21 @@
                   <a:srgbClr val="5F5D63"/>
                 </a:solidFill>
               </a:rPr>
-              <a:t>（MFAH 館方解說）</a:t>
-            </a:r>
-            <a:endParaRPr lang="en-US" sz="1800" dirty="0"/>
-          </a:p>
-          <a:p>
-            <a:pPr algn="l" indent="0" marL="0">
-              <a:spcAft>
-                <a:spcPts val="400"/>
-              </a:spcAft>
-              <a:buNone/>
-            </a:pPr>
-            <a:r>
-              <a:rPr lang="en-US" sz="1800" dirty="0">
-                <a:solidFill>
-                  <a:srgbClr val="1C1B1D"/>
-                </a:solidFill>
-              </a:rPr>
-              <a:t> </a:t>
-            </a:r>
-            <a:endParaRPr lang="en-US" sz="1800" dirty="0"/>
-          </a:p>
-          <a:p>
-            <a:pPr algn="l" indent="0" marL="0">
-              <a:spcAft>
-                <a:spcPts val="400"/>
-              </a:spcAft>
-              <a:buNone/>
-            </a:pPr>
-            <a:r>
-              <a:rPr lang="en-US" sz="1800" dirty="0">
-                <a:solidFill>
-                  <a:srgbClr val="1C1B1D"/>
-                </a:solidFill>
-              </a:rPr>
-              <a:t>同一時期的例子：</a:t>
-            </a:r>
-            <a:endParaRPr lang="en-US" sz="1800" dirty="0"/>
-          </a:p>
-          <a:p>
-            <a:pPr algn="l" indent="0" marL="0">
-              <a:spcAft>
-                <a:spcPts val="400"/>
-              </a:spcAft>
-              <a:buNone/>
-            </a:pPr>
-            <a:r>
-              <a:rPr lang="en-US" sz="1500" dirty="0">
-                <a:solidFill>
-                  <a:srgbClr val="1C1B1D"/>
-                </a:solidFill>
-              </a:rPr>
-              <a:t>・《Marcel Duchamp》c.1920，兩張底片疊合（BMA 1988.430）</a:t>
-            </a:r>
-            <a:endParaRPr lang="en-US" sz="1800" dirty="0"/>
-          </a:p>
-          <a:p>
-            <a:pPr algn="l" indent="0" marL="0">
-              <a:spcAft>
-                <a:spcPts val="400"/>
-              </a:spcAft>
-              <a:buNone/>
-            </a:pPr>
-            <a:r>
-              <a:rPr lang="en-US" sz="1500" dirty="0">
-                <a:solidFill>
-                  <a:srgbClr val="1C1B1D"/>
-                </a:solidFill>
-              </a:rPr>
-              <a:t>・《Magnolia（Double exposure）》：木蘭花＋女性肖像</a:t>
-            </a:r>
-            <a:endParaRPr lang="en-US" sz="1800" dirty="0"/>
-          </a:p>
-        </p:txBody>
-      </p:sp>
-      <p:sp>
-        <p:nvSpPr>
-          <p:cNvPr id="7" name="takeaway-bar"/>
+              <a:t>《Marcel Duchamp》c.1920 也是兩張底片疊合（BMA 1988.430，館方無圖）</a:t>
+            </a:r>
+            <a:endParaRPr lang="en-US" sz="1600" dirty="0"/>
+          </a:p>
+        </p:txBody>
+      </p:sp>
+      <p:sp>
+        <p:nvSpPr>
+          <p:cNvPr id="13" name="takeaway-bar"/>
           <p:cNvSpPr/>
           <p:nvPr/>
         </p:nvSpPr>
         <p:spPr>
           <a:xfrm>
-            <a:off x="5486400" y="5166360"/>
+            <a:off x="457200" y="5897880"/>
             <a:ext cx="54864" cy="347472"/>
           </a:xfrm>
           <a:prstGeom prst="rect">
@@ -5830,14 +6268,14 @@
       </p:sp>
       <p:sp>
         <p:nvSpPr>
-          <p:cNvPr id="8" name="takeaway"/>
-          <p:cNvSpPr txBox="1"/>
-          <p:nvPr/>
-        </p:nvSpPr>
-        <p:spPr>
-          <a:xfrm>
-            <a:off x="5650992" y="5120640"/>
-            <a:ext cx="6053328" cy="438912"/>
+          <p:cNvPr id="14" name="takeaway"/>
+          <p:cNvSpPr txBox="1"/>
+          <p:nvPr/>
+        </p:nvSpPr>
+        <p:spPr>
+          <a:xfrm>
+            <a:off x="621792" y="5852160"/>
+            <a:ext cx="11082528" cy="438912"/>
           </a:xfrm>
           <a:prstGeom prst="rect">
             <a:avLst/>
@@ -5866,7 +6304,7 @@
       </p:sp>
       <p:sp>
         <p:nvSpPr>
-          <p:cNvPr id="9" name="source"/>
+          <p:cNvPr id="15" name="source"/>
           <p:cNvSpPr txBox="1"/>
           <p:nvPr/>
         </p:nvSpPr>
@@ -5894,7 +6332,7 @@
                   <a:srgbClr val="8A877F"/>
                 </a:solidFill>
               </a:rPr>
-              <a:t>出處：MFAH 2015.90；Baltimore Museum of Art 1988.430；Sotheby’s 2017 Lot 118《Magnolia (Double Exposure)》</a:t>
+              <a:t>出處：MFAH 2015.90；Phillips 2024 Lot 261《Magnolia Blossom, Paris》；Sotheby’s 2017 Lot 118《Magnolia (Double Exposure)》（圖：Luminous-Lint）；BMA 1988.430</a:t>
             </a:r>
             <a:endParaRPr lang="en-US" sz="900" dirty="0"/>
           </a:p>

--- a/flysfly/簡報/LIVE_1_48-1_20261021_Man_Ray_FlysFly_蜂飛記_鄭丁南20261021.pptx
+++ b/flysfly/簡報/LIVE_1_48-1_20261021_Man_Ray_FlysFly_蜂飛記_鄭丁南20261021.pptx
@@ -118,23 +118,23 @@
   <p:extLst>
     <p:ext uri="{521415D9-36F7-43E2-AB2F-B90AF26B5E84}">
       <p14:sectionLst xmlns:p14="http://schemas.microsoft.com/office/powerpoint/2010/main">
-        <p14:section name="封面" id="{d31dbd14-6b32-ddd2-3e82-a6f0ed212034}">
+        <p14:section name="封面" id="{b4184add-ee99-42a2-bb66-5ee892cbbd74}">
           <p14:sldIdLst>
             <p14:sldId id="256"/>
           </p14:sldIdLst>
         </p14:section>
-        <p14:section name="前菜" id="{31c8487d-4e8c-48f1-5d52-d019fc18596a}">
+        <p14:section name="前菜" id="{d7a938e8-8cdf-0d24-a714-15c54849f2df}">
           <p14:sldIdLst>
             <p14:sldId id="257"/>
           </p14:sldIdLst>
         </p14:section>
-        <p14:section name="中場" id="{9e027911-2fab-482d-737e-01fb40f42ad4}">
+        <p14:section name="中場" id="{71a49d04-95ae-90c9-a341-4e3b6defd672}">
           <p14:sldIdLst>
             <p14:sldId id="258"/>
             <p14:sldId id="259"/>
           </p14:sldIdLst>
         </p14:section>
-        <p14:section name="主菜" id="{192c9e45-2dc8-7846-95b7-7e7165d1a17c}">
+        <p14:section name="主菜" id="{7aebc178-d254-2bf6-f006-d9087e693427}">
           <p14:sldIdLst>
             <p14:sldId id="260"/>
             <p14:sldId id="261"/>
@@ -143,12 +143,12 @@
             <p14:sldId id="264"/>
           </p14:sldIdLst>
         </p14:section>
-        <p14:section name="甜點" id="{8e177662-5da3-27ba-758e-6af329e077e9}">
+        <p14:section name="甜點" id="{4a34bb3a-2f0c-5180-0954-18827377a15b}">
           <p14:sldIdLst>
             <p14:sldId id="265"/>
           </p14:sldIdLst>
         </p14:section>
-        <p14:section name="彩蛋" id="{4c330d6f-fd07-1b14-37a3-abb6fc781246}">
+        <p14:section name="彩蛋" id="{45498f5b-0393-d5ef-6cc0-4ce29da0bbd0}">
           <p14:sldIdLst>
             <p14:sldId id="266"/>
             <p14:sldId id="267"/>
@@ -1379,11 +1379,12 @@
           <a:p>
             <a:r>
               <a:rPr lang="en-US" dirty="0"/>
-              <a:t>甲 單次近攝：Pompidou 底片只有蜂、背景均勻，直接排除；景深計算也排除（見下一張）。
-乙 相機內重覆曝光：Adorama：white and very light areas will “burn through” darker areas → 腳壓在亮天空上會變成半透明鬼影。
-丙 夾印（sandwich print）：兩張底片疊著透光，一張影像只出現在另一張的暗部 → 腳在天空段也會被透亮。
-丁 暗房依序印相（combination print）：同一張相紙先印蜂、再印風景，曝光相加 → 任何一次讓它變黑，它就是黑。
-示意圖的灰階是示意值；實測值見下一張。</a:t>
+              <a:t>上排是底片（看燈箱）：亮的天空在底片上是「密」（看起來暗），暗的腳和山丘在底片上是「薄」（看起來亮）。
+甲 單次近攝：一張底片同時有蜂和風景；但 Pompidou 底片只有蜂、背景均勻，直接排除；景深也排除。
+乙 相機內重覆曝光：同一張底片曝光兩次，天空的密度加在腳上 → 腳在底片上被蓋成密的 → 印出來變白（Adorama：white and very light areas will “burn through” darker areas）。
+丙 夾印（sandwich print）：蜂底片和風景底片疊在一起放進放大機，光要穿過兩張，密度相加 → 腳壓在天空那段一樣變密 → 印出來是灰白鬼影。
+丁 暗房依序印相（combination print）：兩張底片分開、各自完整，先後印在同一張相紙；相紙上相加的是曝光 → 任何一次讓它變黑，它就是黑。
+一句話：底片相加是「密的贏」＝印出來白的贏；相紙相加是「黑的贏」。</a:t>
             </a:r>
             <a:endParaRPr lang="en-US" dirty="0"/>
           </a:p>
@@ -8023,7 +8024,7 @@
                 <a:ea typeface="Songti TC" pitchFamily="34" charset="-122"/>
                 <a:cs typeface="Songti TC" pitchFamily="34" charset="-120"/>
               </a:rPr>
-              <a:t>四種做法：黑的贏，還是白的贏？</a:t>
+              <a:t>四種做法：底片上看，相紙上看</a:t>
             </a:r>
             <a:endParaRPr lang="en-US" sz="3000" dirty="0"/>
           </a:p>
@@ -8037,8 +8038,8 @@
         </p:nvSpPr>
         <p:spPr>
           <a:xfrm>
-            <a:off x="457200" y="1417320"/>
-            <a:ext cx="2606040" cy="411480"/>
+            <a:off x="457200" y="1325880"/>
+            <a:ext cx="2606040" cy="365760"/>
           </a:xfrm>
           <a:prstGeom prst="rect">
             <a:avLst/>
@@ -8054,7 +8055,7 @@
               <a:buNone/>
             </a:pPr>
             <a:r>
-              <a:rPr lang="en-US" sz="1900" b="1" dirty="0">
+              <a:rPr lang="en-US" sz="1800" b="1" dirty="0">
                 <a:solidFill>
                   <a:srgbClr val="1C1B1D"/>
                 </a:solidFill>
@@ -8064,7 +8065,7 @@
               </a:rPr>
               <a:t>甲　單次近攝</a:t>
             </a:r>
-            <a:endParaRPr lang="en-US" sz="1900" dirty="0"/>
+            <a:endParaRPr lang="en-US" sz="1800" dirty="0"/>
           </a:p>
         </p:txBody>
       </p:sp>
@@ -8076,8 +8077,8 @@
         </p:nvSpPr>
         <p:spPr>
           <a:xfrm>
-            <a:off x="457200" y="1856232"/>
-            <a:ext cx="2606040" cy="292608"/>
+            <a:off x="457200" y="1691640"/>
+            <a:ext cx="2606040" cy="256032"/>
           </a:xfrm>
           <a:prstGeom prst="rect">
             <a:avLst/>
@@ -8093,27 +8094,221 @@
               <a:buNone/>
             </a:pPr>
             <a:r>
-              <a:rPr lang="en-US" sz="1300" dirty="0">
+              <a:rPr lang="en-US" sz="1200" dirty="0">
                 <a:solidFill>
                   <a:srgbClr val="5F5D63"/>
                 </a:solidFill>
               </a:rPr>
               <a:t>蜂和風景一次拍</a:t>
             </a:r>
-            <a:endParaRPr lang="en-US" sz="1300" dirty="0"/>
-          </a:p>
-        </p:txBody>
-      </p:sp>
-      <p:sp>
-        <p:nvSpPr>
-          <p:cNvPr id="6" name="sky0"/>
+            <a:endParaRPr lang="en-US" sz="1200" dirty="0"/>
+          </a:p>
+        </p:txBody>
+      </p:sp>
+      <p:sp>
+        <p:nvSpPr>
+          <p:cNvPr id="6" name="n0-sky"/>
           <p:cNvSpPr/>
           <p:nvPr/>
         </p:nvSpPr>
         <p:spPr>
           <a:xfrm>
-            <a:off x="457200" y="2286000"/>
-            <a:ext cx="2606040" cy="1207008"/>
+            <a:off x="457200" y="2103120"/>
+            <a:ext cx="2606040" cy="704088"/>
+          </a:xfrm>
+          <a:prstGeom prst="rect">
+            <a:avLst/>
+          </a:prstGeom>
+          <a:solidFill>
+            <a:srgbClr val="3F3C38"/>
+          </a:solidFill>
+          <a:ln w="12700">
+            <a:solidFill>
+              <a:srgbClr val="3F3C38"/>
+            </a:solidFill>
+            <a:prstDash val="solid"/>
+          </a:ln>
+        </p:spPr>
+      </p:sp>
+      <p:sp>
+        <p:nvSpPr>
+          <p:cNvPr id="7" name="n0-hill"/>
+          <p:cNvSpPr/>
+          <p:nvPr/>
+        </p:nvSpPr>
+        <p:spPr>
+          <a:xfrm>
+            <a:off x="457200" y="2807208"/>
+            <a:ext cx="2606040" cy="576072"/>
+          </a:xfrm>
+          <a:prstGeom prst="rect">
+            <a:avLst/>
+          </a:prstGeom>
+          <a:solidFill>
+            <a:srgbClr val="D8D4CA"/>
+          </a:solidFill>
+          <a:ln w="12700">
+            <a:solidFill>
+              <a:srgbClr val="D8D4CA"/>
+            </a:solidFill>
+            <a:prstDash val="solid"/>
+          </a:ln>
+        </p:spPr>
+      </p:sp>
+      <p:sp>
+        <p:nvSpPr>
+          <p:cNvPr id="8" name="n0-legsky"/>
+          <p:cNvSpPr/>
+          <p:nvPr/>
+        </p:nvSpPr>
+        <p:spPr>
+          <a:xfrm>
+            <a:off x="1655978" y="2240280"/>
+            <a:ext cx="208483" cy="566928"/>
+          </a:xfrm>
+          <a:prstGeom prst="rect">
+            <a:avLst/>
+          </a:prstGeom>
+          <a:solidFill>
+            <a:srgbClr val="F4F1EA"/>
+          </a:solidFill>
+          <a:ln w="12700">
+            <a:solidFill>
+              <a:srgbClr val="F4F1EA"/>
+            </a:solidFill>
+            <a:prstDash val="solid"/>
+          </a:ln>
+        </p:spPr>
+      </p:sp>
+      <p:sp>
+        <p:nvSpPr>
+          <p:cNvPr id="9" name="n0-leghill"/>
+          <p:cNvSpPr/>
+          <p:nvPr/>
+        </p:nvSpPr>
+        <p:spPr>
+          <a:xfrm>
+            <a:off x="1655978" y="2807208"/>
+            <a:ext cx="208483" cy="409651"/>
+          </a:xfrm>
+          <a:prstGeom prst="rect">
+            <a:avLst/>
+          </a:prstGeom>
+          <a:solidFill>
+            <a:srgbClr val="F4F1EA"/>
+          </a:solidFill>
+          <a:ln w="12700">
+            <a:solidFill>
+              <a:srgbClr val="F4F1EA"/>
+            </a:solidFill>
+            <a:prstDash val="solid"/>
+          </a:ln>
+        </p:spPr>
+      </p:sp>
+      <p:sp>
+        <p:nvSpPr>
+          <p:cNvPr id="10" name="n0-frame"/>
+          <p:cNvSpPr/>
+          <p:nvPr/>
+        </p:nvSpPr>
+        <p:spPr>
+          <a:xfrm>
+            <a:off x="457200" y="2103120"/>
+            <a:ext cx="2606040" cy="1280160"/>
+          </a:xfrm>
+          <a:prstGeom prst="rect">
+            <a:avLst/>
+          </a:prstGeom>
+          <a:ln w="9525">
+            <a:solidFill>
+              <a:srgbClr val="8A877F"/>
+            </a:solidFill>
+            <a:prstDash val="solid"/>
+          </a:ln>
+        </p:spPr>
+      </p:sp>
+      <p:sp>
+        <p:nvSpPr>
+          <p:cNvPr id="11" name="n0-x"/>
+          <p:cNvSpPr txBox="1"/>
+          <p:nvPr/>
+        </p:nvSpPr>
+        <p:spPr>
+          <a:xfrm>
+            <a:off x="457200" y="2103120"/>
+            <a:ext cx="2606040" cy="1280160"/>
+          </a:xfrm>
+          <a:prstGeom prst="rect">
+            <a:avLst/>
+          </a:prstGeom>
+          <a:noFill/>
+          <a:ln/>
+        </p:spPr>
+        <p:txBody>
+          <a:bodyPr wrap="square" lIns="0" tIns="0" rIns="0" bIns="0" rtlCol="0" anchor="ctr"/>
+          <a:lstStyle/>
+          <a:p>
+            <a:pPr algn="ctr" indent="0" marL="0">
+              <a:buNone/>
+            </a:pPr>
+            <a:r>
+              <a:rPr lang="en-US" sz="4000" dirty="0">
+                <a:solidFill>
+                  <a:srgbClr val="A8321F"/>
+                </a:solidFill>
+              </a:rPr>
+              <a:t>✕</a:t>
+            </a:r>
+            <a:endParaRPr lang="en-US" sz="4000" dirty="0"/>
+          </a:p>
+        </p:txBody>
+      </p:sp>
+      <p:sp>
+        <p:nvSpPr>
+          <p:cNvPr id="12" name="negres0"/>
+          <p:cNvSpPr txBox="1"/>
+          <p:nvPr/>
+        </p:nvSpPr>
+        <p:spPr>
+          <a:xfrm>
+            <a:off x="457200" y="3438144"/>
+            <a:ext cx="2606040" cy="274320"/>
+          </a:xfrm>
+          <a:prstGeom prst="rect">
+            <a:avLst/>
+          </a:prstGeom>
+          <a:noFill/>
+          <a:ln/>
+        </p:spPr>
+        <p:txBody>
+          <a:bodyPr wrap="square" lIns="0" tIns="0" rIns="0" bIns="0" rtlCol="0" anchor="ctr"/>
+          <a:lstStyle/>
+          <a:p>
+            <a:pPr indent="0" marL="0">
+              <a:buNone/>
+            </a:pPr>
+            <a:r>
+              <a:rPr lang="en-US" sz="1200" dirty="0">
+                <a:solidFill>
+                  <a:srgbClr val="1C1B1D"/>
+                </a:solidFill>
+              </a:rPr>
+              <a:t>底片｜1 張底片，腳是透明的</a:t>
+            </a:r>
+            <a:endParaRPr lang="en-US" sz="1200" dirty="0"/>
+          </a:p>
+        </p:txBody>
+      </p:sp>
+      <p:sp>
+        <p:nvSpPr>
+          <p:cNvPr id="13" name="sky0"/>
+          <p:cNvSpPr/>
+          <p:nvPr/>
+        </p:nvSpPr>
+        <p:spPr>
+          <a:xfrm>
+            <a:off x="457200" y="3840480"/>
+            <a:ext cx="2606040" cy="704088"/>
           </a:xfrm>
           <a:prstGeom prst="rect">
             <a:avLst/>
@@ -8131,14 +8326,14 @@
       </p:sp>
       <p:sp>
         <p:nvSpPr>
-          <p:cNvPr id="7" name="hill0"/>
+          <p:cNvPr id="14" name="hill0"/>
           <p:cNvSpPr/>
           <p:nvPr/>
         </p:nvSpPr>
         <p:spPr>
           <a:xfrm>
-            <a:off x="457200" y="3493008"/>
-            <a:ext cx="2606040" cy="987552"/>
+            <a:off x="457200" y="4544568"/>
+            <a:ext cx="2606040" cy="576072"/>
           </a:xfrm>
           <a:prstGeom prst="rect">
             <a:avLst/>
@@ -8156,14 +8351,14 @@
       </p:sp>
       <p:sp>
         <p:nvSpPr>
-          <p:cNvPr id="8" name="cross"/>
-          <p:cNvSpPr txBox="1"/>
-          <p:nvPr/>
-        </p:nvSpPr>
-        <p:spPr>
-          <a:xfrm>
-            <a:off x="457200" y="2286000"/>
-            <a:ext cx="2606040" cy="2194560"/>
+          <p:cNvPr id="15" name="cross"/>
+          <p:cNvSpPr txBox="1"/>
+          <p:nvPr/>
+        </p:nvSpPr>
+        <p:spPr>
+          <a:xfrm>
+            <a:off x="457200" y="3840480"/>
+            <a:ext cx="2606040" cy="1280160"/>
           </a:xfrm>
           <a:prstGeom prst="rect">
             <a:avLst/>
@@ -8179,26 +8374,62 @@
               <a:buNone/>
             </a:pPr>
             <a:r>
-              <a:rPr lang="en-US" sz="6000" dirty="0">
+              <a:rPr lang="en-US" sz="4000" dirty="0">
                 <a:solidFill>
                   <a:srgbClr val="A8321F"/>
                 </a:solidFill>
               </a:rPr>
               <a:t>✕</a:t>
             </a:r>
-            <a:endParaRPr lang="en-US" sz="6000" dirty="0"/>
-          </a:p>
-        </p:txBody>
-      </p:sp>
-      <p:sp>
-        <p:nvSpPr>
-          <p:cNvPr id="9" name="res0"/>
-          <p:cNvSpPr txBox="1"/>
-          <p:nvPr/>
-        </p:nvSpPr>
-        <p:spPr>
-          <a:xfrm>
-            <a:off x="457200" y="4590288"/>
+            <a:endParaRPr lang="en-US" sz="4000" dirty="0"/>
+          </a:p>
+        </p:txBody>
+      </p:sp>
+      <p:sp>
+        <p:nvSpPr>
+          <p:cNvPr id="16" name="res0"/>
+          <p:cNvSpPr txBox="1"/>
+          <p:nvPr/>
+        </p:nvSpPr>
+        <p:spPr>
+          <a:xfrm>
+            <a:off x="457200" y="5175504"/>
+            <a:ext cx="2606040" cy="274320"/>
+          </a:xfrm>
+          <a:prstGeom prst="rect">
+            <a:avLst/>
+          </a:prstGeom>
+          <a:noFill/>
+          <a:ln/>
+        </p:spPr>
+        <p:txBody>
+          <a:bodyPr wrap="square" lIns="0" tIns="0" rIns="0" bIns="0" rtlCol="0" anchor="ctr"/>
+          <a:lstStyle/>
+          <a:p>
+            <a:pPr indent="0" marL="0">
+              <a:buNone/>
+            </a:pPr>
+            <a:r>
+              <a:rPr lang="en-US" sz="1200" dirty="0">
+                <a:solidFill>
+                  <a:srgbClr val="1C1B1D"/>
+                </a:solidFill>
+              </a:rPr>
+              <a:t>相紙｜底片上沒有風景</a:t>
+            </a:r>
+            <a:endParaRPr lang="en-US" sz="1200" dirty="0"/>
+          </a:p>
+        </p:txBody>
+      </p:sp>
+      <p:sp>
+        <p:nvSpPr>
+          <p:cNvPr id="17" name="way1"/>
+          <p:cNvSpPr txBox="1"/>
+          <p:nvPr/>
+        </p:nvSpPr>
+        <p:spPr>
+          <a:xfrm>
+            <a:off x="3291840" y="1325880"/>
             <a:ext cx="2606040" cy="365760"/>
           </a:xfrm>
           <a:prstGeom prst="rect">
@@ -8215,43 +8446,7 @@
               <a:buNone/>
             </a:pPr>
             <a:r>
-              <a:rPr lang="en-US" sz="1400" dirty="0">
-                <a:solidFill>
-                  <a:srgbClr val="1C1B1D"/>
-                </a:solidFill>
-              </a:rPr>
-              <a:t>底片上沒有風景</a:t>
-            </a:r>
-            <a:endParaRPr lang="en-US" sz="1400" dirty="0"/>
-          </a:p>
-        </p:txBody>
-      </p:sp>
-      <p:sp>
-        <p:nvSpPr>
-          <p:cNvPr id="10" name="way1"/>
-          <p:cNvSpPr txBox="1"/>
-          <p:nvPr/>
-        </p:nvSpPr>
-        <p:spPr>
-          <a:xfrm>
-            <a:off x="3291840" y="1417320"/>
-            <a:ext cx="2606040" cy="411480"/>
-          </a:xfrm>
-          <a:prstGeom prst="rect">
-            <a:avLst/>
-          </a:prstGeom>
-          <a:noFill/>
-          <a:ln/>
-        </p:spPr>
-        <p:txBody>
-          <a:bodyPr wrap="square" lIns="0" tIns="0" rIns="0" bIns="0" rtlCol="0" anchor="ctr"/>
-          <a:lstStyle/>
-          <a:p>
-            <a:pPr indent="0" marL="0">
-              <a:buNone/>
-            </a:pPr>
-            <a:r>
-              <a:rPr lang="en-US" sz="1900" b="1" dirty="0">
+              <a:rPr lang="en-US" sz="1800" b="1" dirty="0">
                 <a:solidFill>
                   <a:srgbClr val="1C1B1D"/>
                 </a:solidFill>
@@ -8261,20 +8456,20 @@
               </a:rPr>
               <a:t>乙　相機內重覆曝光</a:t>
             </a:r>
-            <a:endParaRPr lang="en-US" sz="1900" dirty="0"/>
-          </a:p>
-        </p:txBody>
-      </p:sp>
-      <p:sp>
-        <p:nvSpPr>
-          <p:cNvPr id="11" name="caption"/>
-          <p:cNvSpPr txBox="1"/>
-          <p:nvPr/>
-        </p:nvSpPr>
-        <p:spPr>
-          <a:xfrm>
-            <a:off x="3291840" y="1856232"/>
-            <a:ext cx="2606040" cy="292608"/>
+            <a:endParaRPr lang="en-US" sz="1800" dirty="0"/>
+          </a:p>
+        </p:txBody>
+      </p:sp>
+      <p:sp>
+        <p:nvSpPr>
+          <p:cNvPr id="18" name="caption"/>
+          <p:cNvSpPr txBox="1"/>
+          <p:nvPr/>
+        </p:nvSpPr>
+        <p:spPr>
+          <a:xfrm>
+            <a:off x="3291840" y="1691640"/>
+            <a:ext cx="2606040" cy="256032"/>
           </a:xfrm>
           <a:prstGeom prst="rect">
             <a:avLst/>
@@ -8290,27 +8485,185 @@
               <a:buNone/>
             </a:pPr>
             <a:r>
-              <a:rPr lang="en-US" sz="1300" dirty="0">
+              <a:rPr lang="en-US" sz="1200" dirty="0">
                 <a:solidFill>
                   <a:srgbClr val="5F5D63"/>
                 </a:solidFill>
               </a:rPr>
               <a:t>同一張底片曝光兩次</a:t>
             </a:r>
-            <a:endParaRPr lang="en-US" sz="1300" dirty="0"/>
-          </a:p>
-        </p:txBody>
-      </p:sp>
-      <p:sp>
-        <p:nvSpPr>
-          <p:cNvPr id="12" name="sky1"/>
+            <a:endParaRPr lang="en-US" sz="1200" dirty="0"/>
+          </a:p>
+        </p:txBody>
+      </p:sp>
+      <p:sp>
+        <p:nvSpPr>
+          <p:cNvPr id="19" name="n1-sky"/>
           <p:cNvSpPr/>
           <p:nvPr/>
         </p:nvSpPr>
         <p:spPr>
           <a:xfrm>
-            <a:off x="3291840" y="2286000"/>
-            <a:ext cx="2606040" cy="1207008"/>
+            <a:off x="3291840" y="2103120"/>
+            <a:ext cx="2606040" cy="704088"/>
+          </a:xfrm>
+          <a:prstGeom prst="rect">
+            <a:avLst/>
+          </a:prstGeom>
+          <a:solidFill>
+            <a:srgbClr val="3F3C38"/>
+          </a:solidFill>
+          <a:ln w="12700">
+            <a:solidFill>
+              <a:srgbClr val="3F3C38"/>
+            </a:solidFill>
+            <a:prstDash val="solid"/>
+          </a:ln>
+        </p:spPr>
+      </p:sp>
+      <p:sp>
+        <p:nvSpPr>
+          <p:cNvPr id="20" name="n1-hill"/>
+          <p:cNvSpPr/>
+          <p:nvPr/>
+        </p:nvSpPr>
+        <p:spPr>
+          <a:xfrm>
+            <a:off x="3291840" y="2807208"/>
+            <a:ext cx="2606040" cy="576072"/>
+          </a:xfrm>
+          <a:prstGeom prst="rect">
+            <a:avLst/>
+          </a:prstGeom>
+          <a:solidFill>
+            <a:srgbClr val="D8D4CA"/>
+          </a:solidFill>
+          <a:ln w="12700">
+            <a:solidFill>
+              <a:srgbClr val="D8D4CA"/>
+            </a:solidFill>
+            <a:prstDash val="solid"/>
+          </a:ln>
+        </p:spPr>
+      </p:sp>
+      <p:sp>
+        <p:nvSpPr>
+          <p:cNvPr id="21" name="n1-legsky"/>
+          <p:cNvSpPr/>
+          <p:nvPr/>
+        </p:nvSpPr>
+        <p:spPr>
+          <a:xfrm>
+            <a:off x="4490618" y="2240280"/>
+            <a:ext cx="208483" cy="566928"/>
+          </a:xfrm>
+          <a:prstGeom prst="rect">
+            <a:avLst/>
+          </a:prstGeom>
+          <a:solidFill>
+            <a:srgbClr val="55514B"/>
+          </a:solidFill>
+          <a:ln w="12700">
+            <a:solidFill>
+              <a:srgbClr val="55514B"/>
+            </a:solidFill>
+            <a:prstDash val="solid"/>
+          </a:ln>
+        </p:spPr>
+      </p:sp>
+      <p:sp>
+        <p:nvSpPr>
+          <p:cNvPr id="22" name="n1-leghill"/>
+          <p:cNvSpPr/>
+          <p:nvPr/>
+        </p:nvSpPr>
+        <p:spPr>
+          <a:xfrm>
+            <a:off x="4490618" y="2807208"/>
+            <a:ext cx="208483" cy="409651"/>
+          </a:xfrm>
+          <a:prstGeom prst="rect">
+            <a:avLst/>
+          </a:prstGeom>
+          <a:solidFill>
+            <a:srgbClr val="F4F1EA"/>
+          </a:solidFill>
+          <a:ln w="12700">
+            <a:solidFill>
+              <a:srgbClr val="F4F1EA"/>
+            </a:solidFill>
+            <a:prstDash val="solid"/>
+          </a:ln>
+        </p:spPr>
+      </p:sp>
+      <p:sp>
+        <p:nvSpPr>
+          <p:cNvPr id="23" name="n1-frame"/>
+          <p:cNvSpPr/>
+          <p:nvPr/>
+        </p:nvSpPr>
+        <p:spPr>
+          <a:xfrm>
+            <a:off x="3291840" y="2103120"/>
+            <a:ext cx="2606040" cy="1280160"/>
+          </a:xfrm>
+          <a:prstGeom prst="rect">
+            <a:avLst/>
+          </a:prstGeom>
+          <a:ln w="9525">
+            <a:solidFill>
+              <a:srgbClr val="8A877F"/>
+            </a:solidFill>
+            <a:prstDash val="solid"/>
+          </a:ln>
+        </p:spPr>
+      </p:sp>
+      <p:sp>
+        <p:nvSpPr>
+          <p:cNvPr id="24" name="negres1"/>
+          <p:cNvSpPr txBox="1"/>
+          <p:nvPr/>
+        </p:nvSpPr>
+        <p:spPr>
+          <a:xfrm>
+            <a:off x="3291840" y="3438144"/>
+            <a:ext cx="2606040" cy="274320"/>
+          </a:xfrm>
+          <a:prstGeom prst="rect">
+            <a:avLst/>
+          </a:prstGeom>
+          <a:noFill/>
+          <a:ln/>
+        </p:spPr>
+        <p:txBody>
+          <a:bodyPr wrap="square" lIns="0" tIns="0" rIns="0" bIns="0" rtlCol="0" anchor="ctr"/>
+          <a:lstStyle/>
+          <a:p>
+            <a:pPr indent="0" marL="0">
+              <a:buNone/>
+            </a:pPr>
+            <a:r>
+              <a:rPr lang="en-US" sz="1200" dirty="0">
+                <a:solidFill>
+                  <a:srgbClr val="1C1B1D"/>
+                </a:solidFill>
+              </a:rPr>
+              <a:t>底片｜1 張底片：天空的密度蓋過腳</a:t>
+            </a:r>
+            <a:endParaRPr lang="en-US" sz="1200" dirty="0"/>
+          </a:p>
+        </p:txBody>
+      </p:sp>
+      <p:sp>
+        <p:nvSpPr>
+          <p:cNvPr id="25" name="sky1"/>
+          <p:cNvSpPr/>
+          <p:nvPr/>
+        </p:nvSpPr>
+        <p:spPr>
+          <a:xfrm>
+            <a:off x="3291840" y="3840480"/>
+            <a:ext cx="2606040" cy="704088"/>
           </a:xfrm>
           <a:prstGeom prst="rect">
             <a:avLst/>
@@ -8328,14 +8681,14 @@
       </p:sp>
       <p:sp>
         <p:nvSpPr>
-          <p:cNvPr id="13" name="hill1"/>
+          <p:cNvPr id="26" name="hill1"/>
           <p:cNvSpPr/>
           <p:nvPr/>
         </p:nvSpPr>
         <p:spPr>
           <a:xfrm>
-            <a:off x="3291840" y="3493008"/>
-            <a:ext cx="2606040" cy="987552"/>
+            <a:off x="3291840" y="4544568"/>
+            <a:ext cx="2606040" cy="576072"/>
           </a:xfrm>
           <a:prstGeom prst="rect">
             <a:avLst/>
@@ -8353,14 +8706,14 @@
       </p:sp>
       <p:sp>
         <p:nvSpPr>
-          <p:cNvPr id="14" name="leg-sky1"/>
+          <p:cNvPr id="27" name="leg-sky1"/>
           <p:cNvSpPr/>
           <p:nvPr/>
         </p:nvSpPr>
         <p:spPr>
           <a:xfrm>
-            <a:off x="4480560" y="2514600"/>
-            <a:ext cx="201168" cy="978408"/>
+            <a:off x="4480560" y="3977640"/>
+            <a:ext cx="182880" cy="566928"/>
           </a:xfrm>
           <a:prstGeom prst="rect">
             <a:avLst/>
@@ -8378,14 +8731,14 @@
       </p:sp>
       <p:sp>
         <p:nvSpPr>
-          <p:cNvPr id="15" name="leg-hill1"/>
+          <p:cNvPr id="28" name="leg-hill1"/>
           <p:cNvSpPr/>
           <p:nvPr/>
         </p:nvSpPr>
         <p:spPr>
           <a:xfrm>
-            <a:off x="4480560" y="3493008"/>
-            <a:ext cx="201168" cy="768096"/>
+            <a:off x="4480560" y="4544568"/>
+            <a:ext cx="182880" cy="409651"/>
           </a:xfrm>
           <a:prstGeom prst="rect">
             <a:avLst/>
@@ -8403,13 +8756,49 @@
       </p:sp>
       <p:sp>
         <p:nvSpPr>
-          <p:cNvPr id="16" name="res1"/>
-          <p:cNvSpPr txBox="1"/>
-          <p:nvPr/>
-        </p:nvSpPr>
-        <p:spPr>
-          <a:xfrm>
-            <a:off x="3291840" y="4590288"/>
+          <p:cNvPr id="29" name="res1"/>
+          <p:cNvSpPr txBox="1"/>
+          <p:nvPr/>
+        </p:nvSpPr>
+        <p:spPr>
+          <a:xfrm>
+            <a:off x="3291840" y="5175504"/>
+            <a:ext cx="2606040" cy="274320"/>
+          </a:xfrm>
+          <a:prstGeom prst="rect">
+            <a:avLst/>
+          </a:prstGeom>
+          <a:noFill/>
+          <a:ln/>
+        </p:spPr>
+        <p:txBody>
+          <a:bodyPr wrap="square" lIns="0" tIns="0" rIns="0" bIns="0" rtlCol="0" anchor="ctr"/>
+          <a:lstStyle/>
+          <a:p>
+            <a:pPr indent="0" marL="0">
+              <a:buNone/>
+            </a:pPr>
+            <a:r>
+              <a:rPr lang="en-US" sz="1200" dirty="0">
+                <a:solidFill>
+                  <a:srgbClr val="1C1B1D"/>
+                </a:solidFill>
+              </a:rPr>
+              <a:t>相紙｜白的贏：亮天空燒穿腳</a:t>
+            </a:r>
+            <a:endParaRPr lang="en-US" sz="1200" dirty="0"/>
+          </a:p>
+        </p:txBody>
+      </p:sp>
+      <p:sp>
+        <p:nvSpPr>
+          <p:cNvPr id="30" name="way2"/>
+          <p:cNvSpPr txBox="1"/>
+          <p:nvPr/>
+        </p:nvSpPr>
+        <p:spPr>
+          <a:xfrm>
+            <a:off x="6126480" y="1325880"/>
             <a:ext cx="2606040" cy="365760"/>
           </a:xfrm>
           <a:prstGeom prst="rect">
@@ -8426,43 +8815,7 @@
               <a:buNone/>
             </a:pPr>
             <a:r>
-              <a:rPr lang="en-US" sz="1400" dirty="0">
-                <a:solidFill>
-                  <a:srgbClr val="1C1B1D"/>
-                </a:solidFill>
-              </a:rPr>
-              <a:t>白的贏：亮天空燒穿腳</a:t>
-            </a:r>
-            <a:endParaRPr lang="en-US" sz="1400" dirty="0"/>
-          </a:p>
-        </p:txBody>
-      </p:sp>
-      <p:sp>
-        <p:nvSpPr>
-          <p:cNvPr id="17" name="way2"/>
-          <p:cNvSpPr txBox="1"/>
-          <p:nvPr/>
-        </p:nvSpPr>
-        <p:spPr>
-          <a:xfrm>
-            <a:off x="6126480" y="1417320"/>
-            <a:ext cx="2606040" cy="411480"/>
-          </a:xfrm>
-          <a:prstGeom prst="rect">
-            <a:avLst/>
-          </a:prstGeom>
-          <a:noFill/>
-          <a:ln/>
-        </p:spPr>
-        <p:txBody>
-          <a:bodyPr wrap="square" lIns="0" tIns="0" rIns="0" bIns="0" rtlCol="0" anchor="ctr"/>
-          <a:lstStyle/>
-          <a:p>
-            <a:pPr indent="0" marL="0">
-              <a:buNone/>
-            </a:pPr>
-            <a:r>
-              <a:rPr lang="en-US" sz="1900" b="1" dirty="0">
+              <a:rPr lang="en-US" sz="1800" b="1" dirty="0">
                 <a:solidFill>
                   <a:srgbClr val="1C1B1D"/>
                 </a:solidFill>
@@ -8472,20 +8825,20 @@
               </a:rPr>
               <a:t>丙　夾印</a:t>
             </a:r>
-            <a:endParaRPr lang="en-US" sz="1900" dirty="0"/>
-          </a:p>
-        </p:txBody>
-      </p:sp>
-      <p:sp>
-        <p:nvSpPr>
-          <p:cNvPr id="18" name="caption"/>
-          <p:cNvSpPr txBox="1"/>
-          <p:nvPr/>
-        </p:nvSpPr>
-        <p:spPr>
-          <a:xfrm>
-            <a:off x="6126480" y="1856232"/>
-            <a:ext cx="2606040" cy="292608"/>
+            <a:endParaRPr lang="en-US" sz="1800" dirty="0"/>
+          </a:p>
+        </p:txBody>
+      </p:sp>
+      <p:sp>
+        <p:nvSpPr>
+          <p:cNvPr id="31" name="caption"/>
+          <p:cNvSpPr txBox="1"/>
+          <p:nvPr/>
+        </p:nvSpPr>
+        <p:spPr>
+          <a:xfrm>
+            <a:off x="6126480" y="1691640"/>
+            <a:ext cx="2606040" cy="256032"/>
           </a:xfrm>
           <a:prstGeom prst="rect">
             <a:avLst/>
@@ -8501,27 +8854,282 @@
               <a:buNone/>
             </a:pPr>
             <a:r>
-              <a:rPr lang="en-US" sz="1300" dirty="0">
+              <a:rPr lang="en-US" sz="1200" dirty="0">
                 <a:solidFill>
                   <a:srgbClr val="5F5D63"/>
                 </a:solidFill>
               </a:rPr>
               <a:t>兩張底片疊著一起印</a:t>
             </a:r>
-            <a:endParaRPr lang="en-US" sz="1300" dirty="0"/>
-          </a:p>
-        </p:txBody>
-      </p:sp>
-      <p:sp>
-        <p:nvSpPr>
-          <p:cNvPr id="19" name="sky2"/>
+            <a:endParaRPr lang="en-US" sz="1200" dirty="0"/>
+          </a:p>
+        </p:txBody>
+      </p:sp>
+      <p:sp>
+        <p:nvSpPr>
+          <p:cNvPr id="32" name="n2b-bg"/>
           <p:cNvSpPr/>
           <p:nvPr/>
         </p:nvSpPr>
         <p:spPr>
           <a:xfrm>
-            <a:off x="6126480" y="2286000"/>
-            <a:ext cx="2606040" cy="1207008"/>
+            <a:off x="6291072" y="2011680"/>
+            <a:ext cx="2441448" cy="1280160"/>
+          </a:xfrm>
+          <a:prstGeom prst="rect">
+            <a:avLst/>
+          </a:prstGeom>
+          <a:solidFill>
+            <a:srgbClr val="8C887F"/>
+          </a:solidFill>
+          <a:ln w="12700">
+            <a:solidFill>
+              <a:srgbClr val="8C887F"/>
+            </a:solidFill>
+            <a:prstDash val="solid"/>
+          </a:ln>
+        </p:spPr>
+      </p:sp>
+      <p:sp>
+        <p:nvSpPr>
+          <p:cNvPr id="33" name="n2b-legsky"/>
+          <p:cNvSpPr/>
+          <p:nvPr/>
+        </p:nvSpPr>
+        <p:spPr>
+          <a:xfrm>
+            <a:off x="7414138" y="2148840"/>
+            <a:ext cx="195316" cy="566928"/>
+          </a:xfrm>
+          <a:prstGeom prst="rect">
+            <a:avLst/>
+          </a:prstGeom>
+          <a:solidFill>
+            <a:srgbClr val="F4F1EA"/>
+          </a:solidFill>
+          <a:ln w="12700">
+            <a:solidFill>
+              <a:srgbClr val="F4F1EA"/>
+            </a:solidFill>
+            <a:prstDash val="solid"/>
+          </a:ln>
+        </p:spPr>
+      </p:sp>
+      <p:sp>
+        <p:nvSpPr>
+          <p:cNvPr id="34" name="n2b-leghill"/>
+          <p:cNvSpPr/>
+          <p:nvPr/>
+        </p:nvSpPr>
+        <p:spPr>
+          <a:xfrm>
+            <a:off x="7414138" y="2715768"/>
+            <a:ext cx="195316" cy="409651"/>
+          </a:xfrm>
+          <a:prstGeom prst="rect">
+            <a:avLst/>
+          </a:prstGeom>
+          <a:solidFill>
+            <a:srgbClr val="F4F1EA"/>
+          </a:solidFill>
+          <a:ln w="12700">
+            <a:solidFill>
+              <a:srgbClr val="F4F1EA"/>
+            </a:solidFill>
+            <a:prstDash val="solid"/>
+          </a:ln>
+        </p:spPr>
+      </p:sp>
+      <p:sp>
+        <p:nvSpPr>
+          <p:cNvPr id="35" name="n2b-frame"/>
+          <p:cNvSpPr/>
+          <p:nvPr/>
+        </p:nvSpPr>
+        <p:spPr>
+          <a:xfrm>
+            <a:off x="6291072" y="2011680"/>
+            <a:ext cx="2441448" cy="1280160"/>
+          </a:xfrm>
+          <a:prstGeom prst="rect">
+            <a:avLst/>
+          </a:prstGeom>
+          <a:ln w="9525">
+            <a:solidFill>
+              <a:srgbClr val="8A877F"/>
+            </a:solidFill>
+            <a:prstDash val="solid"/>
+          </a:ln>
+        </p:spPr>
+      </p:sp>
+      <p:sp>
+        <p:nvSpPr>
+          <p:cNvPr id="36" name="n2a-sky"/>
+          <p:cNvSpPr/>
+          <p:nvPr/>
+        </p:nvSpPr>
+        <p:spPr>
+          <a:xfrm>
+            <a:off x="6126480" y="2103120"/>
+            <a:ext cx="2441448" cy="704088"/>
+          </a:xfrm>
+          <a:prstGeom prst="rect">
+            <a:avLst/>
+          </a:prstGeom>
+          <a:solidFill>
+            <a:srgbClr val="3F3C38"/>
+          </a:solidFill>
+          <a:ln w="12700">
+            <a:solidFill>
+              <a:srgbClr val="3F3C38"/>
+            </a:solidFill>
+            <a:prstDash val="solid"/>
+          </a:ln>
+        </p:spPr>
+      </p:sp>
+      <p:sp>
+        <p:nvSpPr>
+          <p:cNvPr id="37" name="n2a-hill"/>
+          <p:cNvSpPr/>
+          <p:nvPr/>
+        </p:nvSpPr>
+        <p:spPr>
+          <a:xfrm>
+            <a:off x="6126480" y="2807208"/>
+            <a:ext cx="2441448" cy="576072"/>
+          </a:xfrm>
+          <a:prstGeom prst="rect">
+            <a:avLst/>
+          </a:prstGeom>
+          <a:solidFill>
+            <a:srgbClr val="D8D4CA"/>
+          </a:solidFill>
+          <a:ln w="12700">
+            <a:solidFill>
+              <a:srgbClr val="D8D4CA"/>
+            </a:solidFill>
+            <a:prstDash val="solid"/>
+          </a:ln>
+        </p:spPr>
+      </p:sp>
+      <p:sp>
+        <p:nvSpPr>
+          <p:cNvPr id="38" name="n2a-legsky"/>
+          <p:cNvSpPr/>
+          <p:nvPr/>
+        </p:nvSpPr>
+        <p:spPr>
+          <a:xfrm>
+            <a:off x="7249546" y="2240280"/>
+            <a:ext cx="195316" cy="566928"/>
+          </a:xfrm>
+          <a:prstGeom prst="rect">
+            <a:avLst/>
+          </a:prstGeom>
+          <a:solidFill>
+            <a:srgbClr val="4A4641"/>
+          </a:solidFill>
+          <a:ln w="12700">
+            <a:solidFill>
+              <a:srgbClr val="4A4641"/>
+            </a:solidFill>
+            <a:prstDash val="solid"/>
+          </a:ln>
+        </p:spPr>
+      </p:sp>
+      <p:sp>
+        <p:nvSpPr>
+          <p:cNvPr id="39" name="n2a-leghill"/>
+          <p:cNvSpPr/>
+          <p:nvPr/>
+        </p:nvSpPr>
+        <p:spPr>
+          <a:xfrm>
+            <a:off x="7249546" y="2807208"/>
+            <a:ext cx="195316" cy="409651"/>
+          </a:xfrm>
+          <a:prstGeom prst="rect">
+            <a:avLst/>
+          </a:prstGeom>
+          <a:solidFill>
+            <a:srgbClr val="F4F1EA"/>
+          </a:solidFill>
+          <a:ln w="12700">
+            <a:solidFill>
+              <a:srgbClr val="F4F1EA"/>
+            </a:solidFill>
+            <a:prstDash val="solid"/>
+          </a:ln>
+        </p:spPr>
+      </p:sp>
+      <p:sp>
+        <p:nvSpPr>
+          <p:cNvPr id="40" name="n2a-frame"/>
+          <p:cNvSpPr/>
+          <p:nvPr/>
+        </p:nvSpPr>
+        <p:spPr>
+          <a:xfrm>
+            <a:off x="6126480" y="2103120"/>
+            <a:ext cx="2441448" cy="1280160"/>
+          </a:xfrm>
+          <a:prstGeom prst="rect">
+            <a:avLst/>
+          </a:prstGeom>
+          <a:ln w="9525">
+            <a:solidFill>
+              <a:srgbClr val="8A877F"/>
+            </a:solidFill>
+            <a:prstDash val="solid"/>
+          </a:ln>
+        </p:spPr>
+      </p:sp>
+      <p:sp>
+        <p:nvSpPr>
+          <p:cNvPr id="41" name="negres2"/>
+          <p:cNvSpPr txBox="1"/>
+          <p:nvPr/>
+        </p:nvSpPr>
+        <p:spPr>
+          <a:xfrm>
+            <a:off x="6126480" y="3438144"/>
+            <a:ext cx="2606040" cy="274320"/>
+          </a:xfrm>
+          <a:prstGeom prst="rect">
+            <a:avLst/>
+          </a:prstGeom>
+          <a:noFill/>
+          <a:ln/>
+        </p:spPr>
+        <p:txBody>
+          <a:bodyPr wrap="square" lIns="0" tIns="0" rIns="0" bIns="0" rtlCol="0" anchor="ctr"/>
+          <a:lstStyle/>
+          <a:p>
+            <a:pPr indent="0" marL="0">
+              <a:buNone/>
+            </a:pPr>
+            <a:r>
+              <a:rPr lang="en-US" sz="1200" dirty="0">
+                <a:solidFill>
+                  <a:srgbClr val="1C1B1D"/>
+                </a:solidFill>
+              </a:rPr>
+              <a:t>底片｜2 張疊著透光：密度相加</a:t>
+            </a:r>
+            <a:endParaRPr lang="en-US" sz="1200" dirty="0"/>
+          </a:p>
+        </p:txBody>
+      </p:sp>
+      <p:sp>
+        <p:nvSpPr>
+          <p:cNvPr id="42" name="sky2"/>
+          <p:cNvSpPr/>
+          <p:nvPr/>
+        </p:nvSpPr>
+        <p:spPr>
+          <a:xfrm>
+            <a:off x="6126480" y="3840480"/>
+            <a:ext cx="2606040" cy="704088"/>
           </a:xfrm>
           <a:prstGeom prst="rect">
             <a:avLst/>
@@ -8539,14 +9147,14 @@
       </p:sp>
       <p:sp>
         <p:nvSpPr>
-          <p:cNvPr id="20" name="hill2"/>
+          <p:cNvPr id="43" name="hill2"/>
           <p:cNvSpPr/>
           <p:nvPr/>
         </p:nvSpPr>
         <p:spPr>
           <a:xfrm>
-            <a:off x="6126480" y="3493008"/>
-            <a:ext cx="2606040" cy="987552"/>
+            <a:off x="6126480" y="4544568"/>
+            <a:ext cx="2606040" cy="576072"/>
           </a:xfrm>
           <a:prstGeom prst="rect">
             <a:avLst/>
@@ -8564,14 +9172,14 @@
       </p:sp>
       <p:sp>
         <p:nvSpPr>
-          <p:cNvPr id="21" name="leg-sky2"/>
+          <p:cNvPr id="44" name="leg-sky2"/>
           <p:cNvSpPr/>
           <p:nvPr/>
         </p:nvSpPr>
         <p:spPr>
           <a:xfrm>
-            <a:off x="7315200" y="2514600"/>
-            <a:ext cx="201168" cy="978408"/>
+            <a:off x="7315200" y="3977640"/>
+            <a:ext cx="182880" cy="566928"/>
           </a:xfrm>
           <a:prstGeom prst="rect">
             <a:avLst/>
@@ -8589,14 +9197,14 @@
       </p:sp>
       <p:sp>
         <p:nvSpPr>
-          <p:cNvPr id="22" name="leg-hill2"/>
+          <p:cNvPr id="45" name="leg-hill2"/>
           <p:cNvSpPr/>
           <p:nvPr/>
         </p:nvSpPr>
         <p:spPr>
           <a:xfrm>
-            <a:off x="7315200" y="3493008"/>
-            <a:ext cx="201168" cy="768096"/>
+            <a:off x="7315200" y="4544568"/>
+            <a:ext cx="182880" cy="409651"/>
           </a:xfrm>
           <a:prstGeom prst="rect">
             <a:avLst/>
@@ -8614,13 +9222,49 @@
       </p:sp>
       <p:sp>
         <p:nvSpPr>
-          <p:cNvPr id="23" name="res2"/>
-          <p:cNvSpPr txBox="1"/>
-          <p:nvPr/>
-        </p:nvSpPr>
-        <p:spPr>
-          <a:xfrm>
-            <a:off x="6126480" y="4590288"/>
+          <p:cNvPr id="46" name="res2"/>
+          <p:cNvSpPr txBox="1"/>
+          <p:nvPr/>
+        </p:nvSpPr>
+        <p:spPr>
+          <a:xfrm>
+            <a:off x="6126480" y="5175504"/>
+            <a:ext cx="2606040" cy="274320"/>
+          </a:xfrm>
+          <a:prstGeom prst="rect">
+            <a:avLst/>
+          </a:prstGeom>
+          <a:noFill/>
+          <a:ln/>
+        </p:spPr>
+        <p:txBody>
+          <a:bodyPr wrap="square" lIns="0" tIns="0" rIns="0" bIns="0" rtlCol="0" anchor="ctr"/>
+          <a:lstStyle/>
+          <a:p>
+            <a:pPr indent="0" marL="0">
+              <a:buNone/>
+            </a:pPr>
+            <a:r>
+              <a:rPr lang="en-US" sz="1200" dirty="0">
+                <a:solidFill>
+                  <a:srgbClr val="1C1B1D"/>
+                </a:solidFill>
+              </a:rPr>
+              <a:t>相紙｜白的贏：腳變灰白鬼影</a:t>
+            </a:r>
+            <a:endParaRPr lang="en-US" sz="1200" dirty="0"/>
+          </a:p>
+        </p:txBody>
+      </p:sp>
+      <p:sp>
+        <p:nvSpPr>
+          <p:cNvPr id="47" name="way3"/>
+          <p:cNvSpPr txBox="1"/>
+          <p:nvPr/>
+        </p:nvSpPr>
+        <p:spPr>
+          <a:xfrm>
+            <a:off x="8961120" y="1325880"/>
             <a:ext cx="2606040" cy="365760"/>
           </a:xfrm>
           <a:prstGeom prst="rect">
@@ -8637,43 +9281,7 @@
               <a:buNone/>
             </a:pPr>
             <a:r>
-              <a:rPr lang="en-US" sz="1400" dirty="0">
-                <a:solidFill>
-                  <a:srgbClr val="1C1B1D"/>
-                </a:solidFill>
-              </a:rPr>
-              <a:t>白的贏：腳變灰白鬼影</a:t>
-            </a:r>
-            <a:endParaRPr lang="en-US" sz="1400" dirty="0"/>
-          </a:p>
-        </p:txBody>
-      </p:sp>
-      <p:sp>
-        <p:nvSpPr>
-          <p:cNvPr id="24" name="way3"/>
-          <p:cNvSpPr txBox="1"/>
-          <p:nvPr/>
-        </p:nvSpPr>
-        <p:spPr>
-          <a:xfrm>
-            <a:off x="8961120" y="1417320"/>
-            <a:ext cx="2606040" cy="411480"/>
-          </a:xfrm>
-          <a:prstGeom prst="rect">
-            <a:avLst/>
-          </a:prstGeom>
-          <a:noFill/>
-          <a:ln/>
-        </p:spPr>
-        <p:txBody>
-          <a:bodyPr wrap="square" lIns="0" tIns="0" rIns="0" bIns="0" rtlCol="0" anchor="ctr"/>
-          <a:lstStyle/>
-          <a:p>
-            <a:pPr indent="0" marL="0">
-              <a:buNone/>
-            </a:pPr>
-            <a:r>
-              <a:rPr lang="en-US" sz="1900" b="1" dirty="0">
+              <a:rPr lang="en-US" sz="1800" b="1" dirty="0">
                 <a:solidFill>
                   <a:srgbClr val="A8321F"/>
                 </a:solidFill>
@@ -8683,20 +9291,20 @@
               </a:rPr>
               <a:t>丁　暗房依序印相</a:t>
             </a:r>
-            <a:endParaRPr lang="en-US" sz="1900" dirty="0"/>
-          </a:p>
-        </p:txBody>
-      </p:sp>
-      <p:sp>
-        <p:nvSpPr>
-          <p:cNvPr id="25" name="caption"/>
-          <p:cNvSpPr txBox="1"/>
-          <p:nvPr/>
-        </p:nvSpPr>
-        <p:spPr>
-          <a:xfrm>
-            <a:off x="8961120" y="1856232"/>
-            <a:ext cx="2606040" cy="292608"/>
+            <a:endParaRPr lang="en-US" sz="1800" dirty="0"/>
+          </a:p>
+        </p:txBody>
+      </p:sp>
+      <p:sp>
+        <p:nvSpPr>
+          <p:cNvPr id="48" name="caption"/>
+          <p:cNvSpPr txBox="1"/>
+          <p:nvPr/>
+        </p:nvSpPr>
+        <p:spPr>
+          <a:xfrm>
+            <a:off x="8961120" y="1691640"/>
+            <a:ext cx="2606040" cy="256032"/>
           </a:xfrm>
           <a:prstGeom prst="rect">
             <a:avLst/>
@@ -8712,27 +9320,282 @@
               <a:buNone/>
             </a:pPr>
             <a:r>
-              <a:rPr lang="en-US" sz="1300" dirty="0">
+              <a:rPr lang="en-US" sz="1200" dirty="0">
                 <a:solidFill>
                   <a:srgbClr val="5F5D63"/>
                 </a:solidFill>
               </a:rPr>
               <a:t>同一張相紙先後印兩次</a:t>
             </a:r>
-            <a:endParaRPr lang="en-US" sz="1300" dirty="0"/>
-          </a:p>
-        </p:txBody>
-      </p:sp>
-      <p:sp>
-        <p:nvSpPr>
-          <p:cNvPr id="26" name="sky3"/>
+            <a:endParaRPr lang="en-US" sz="1200" dirty="0"/>
+          </a:p>
+        </p:txBody>
+      </p:sp>
+      <p:sp>
+        <p:nvSpPr>
+          <p:cNvPr id="49" name="n3a-bg"/>
           <p:cNvSpPr/>
           <p:nvPr/>
         </p:nvSpPr>
         <p:spPr>
           <a:xfrm>
-            <a:off x="8961120" y="2286000"/>
-            <a:ext cx="2606040" cy="1207008"/>
+            <a:off x="8961120" y="2103120"/>
+            <a:ext cx="1198778" cy="1280160"/>
+          </a:xfrm>
+          <a:prstGeom prst="rect">
+            <a:avLst/>
+          </a:prstGeom>
+          <a:solidFill>
+            <a:srgbClr val="8C887F"/>
+          </a:solidFill>
+          <a:ln w="12700">
+            <a:solidFill>
+              <a:srgbClr val="8C887F"/>
+            </a:solidFill>
+            <a:prstDash val="solid"/>
+          </a:ln>
+        </p:spPr>
+      </p:sp>
+      <p:sp>
+        <p:nvSpPr>
+          <p:cNvPr id="50" name="n3a-legsky"/>
+          <p:cNvSpPr/>
+          <p:nvPr/>
+        </p:nvSpPr>
+        <p:spPr>
+          <a:xfrm>
+            <a:off x="9512558" y="2240280"/>
+            <a:ext cx="109728" cy="566928"/>
+          </a:xfrm>
+          <a:prstGeom prst="rect">
+            <a:avLst/>
+          </a:prstGeom>
+          <a:solidFill>
+            <a:srgbClr val="F4F1EA"/>
+          </a:solidFill>
+          <a:ln w="12700">
+            <a:solidFill>
+              <a:srgbClr val="F4F1EA"/>
+            </a:solidFill>
+            <a:prstDash val="solid"/>
+          </a:ln>
+        </p:spPr>
+      </p:sp>
+      <p:sp>
+        <p:nvSpPr>
+          <p:cNvPr id="51" name="n3a-leghill"/>
+          <p:cNvSpPr/>
+          <p:nvPr/>
+        </p:nvSpPr>
+        <p:spPr>
+          <a:xfrm>
+            <a:off x="9512558" y="2807208"/>
+            <a:ext cx="109728" cy="409651"/>
+          </a:xfrm>
+          <a:prstGeom prst="rect">
+            <a:avLst/>
+          </a:prstGeom>
+          <a:solidFill>
+            <a:srgbClr val="F4F1EA"/>
+          </a:solidFill>
+          <a:ln w="12700">
+            <a:solidFill>
+              <a:srgbClr val="F4F1EA"/>
+            </a:solidFill>
+            <a:prstDash val="solid"/>
+          </a:ln>
+        </p:spPr>
+      </p:sp>
+      <p:sp>
+        <p:nvSpPr>
+          <p:cNvPr id="52" name="n3a-frame"/>
+          <p:cNvSpPr/>
+          <p:nvPr/>
+        </p:nvSpPr>
+        <p:spPr>
+          <a:xfrm>
+            <a:off x="8961120" y="2103120"/>
+            <a:ext cx="1198778" cy="1280160"/>
+          </a:xfrm>
+          <a:prstGeom prst="rect">
+            <a:avLst/>
+          </a:prstGeom>
+          <a:ln w="9525">
+            <a:solidFill>
+              <a:srgbClr val="8A877F"/>
+            </a:solidFill>
+            <a:prstDash val="solid"/>
+          </a:ln>
+        </p:spPr>
+      </p:sp>
+      <p:sp>
+        <p:nvSpPr>
+          <p:cNvPr id="53" name="n3b-sky"/>
+          <p:cNvSpPr/>
+          <p:nvPr/>
+        </p:nvSpPr>
+        <p:spPr>
+          <a:xfrm>
+            <a:off x="10368382" y="2103120"/>
+            <a:ext cx="1198778" cy="704088"/>
+          </a:xfrm>
+          <a:prstGeom prst="rect">
+            <a:avLst/>
+          </a:prstGeom>
+          <a:solidFill>
+            <a:srgbClr val="3F3C38"/>
+          </a:solidFill>
+          <a:ln w="12700">
+            <a:solidFill>
+              <a:srgbClr val="3F3C38"/>
+            </a:solidFill>
+            <a:prstDash val="solid"/>
+          </a:ln>
+        </p:spPr>
+      </p:sp>
+      <p:sp>
+        <p:nvSpPr>
+          <p:cNvPr id="54" name="n3b-hill"/>
+          <p:cNvSpPr/>
+          <p:nvPr/>
+        </p:nvSpPr>
+        <p:spPr>
+          <a:xfrm>
+            <a:off x="10368382" y="2807208"/>
+            <a:ext cx="1198778" cy="576072"/>
+          </a:xfrm>
+          <a:prstGeom prst="rect">
+            <a:avLst/>
+          </a:prstGeom>
+          <a:solidFill>
+            <a:srgbClr val="D8D4CA"/>
+          </a:solidFill>
+          <a:ln w="12700">
+            <a:solidFill>
+              <a:srgbClr val="D8D4CA"/>
+            </a:solidFill>
+            <a:prstDash val="solid"/>
+          </a:ln>
+        </p:spPr>
+      </p:sp>
+      <p:sp>
+        <p:nvSpPr>
+          <p:cNvPr id="55" name="n3b-legsky"/>
+          <p:cNvSpPr/>
+          <p:nvPr/>
+        </p:nvSpPr>
+        <p:spPr>
+          <a:xfrm>
+            <a:off x="10919820" y="2240280"/>
+            <a:ext cx="109728" cy="566928"/>
+          </a:xfrm>
+          <a:prstGeom prst="rect">
+            <a:avLst/>
+          </a:prstGeom>
+          <a:solidFill>
+            <a:srgbClr val="D8D4CA"/>
+          </a:solidFill>
+          <a:ln w="12700">
+            <a:solidFill>
+              <a:srgbClr val="D8D4CA"/>
+            </a:solidFill>
+            <a:prstDash val="solid"/>
+          </a:ln>
+        </p:spPr>
+      </p:sp>
+      <p:sp>
+        <p:nvSpPr>
+          <p:cNvPr id="56" name="n3b-leghill"/>
+          <p:cNvSpPr/>
+          <p:nvPr/>
+        </p:nvSpPr>
+        <p:spPr>
+          <a:xfrm>
+            <a:off x="10919820" y="2807208"/>
+            <a:ext cx="109728" cy="409651"/>
+          </a:xfrm>
+          <a:prstGeom prst="rect">
+            <a:avLst/>
+          </a:prstGeom>
+          <a:solidFill>
+            <a:srgbClr val="F4F1EA"/>
+          </a:solidFill>
+          <a:ln w="12700">
+            <a:solidFill>
+              <a:srgbClr val="F4F1EA"/>
+            </a:solidFill>
+            <a:prstDash val="solid"/>
+          </a:ln>
+        </p:spPr>
+      </p:sp>
+      <p:sp>
+        <p:nvSpPr>
+          <p:cNvPr id="57" name="n3b-frame"/>
+          <p:cNvSpPr/>
+          <p:nvPr/>
+        </p:nvSpPr>
+        <p:spPr>
+          <a:xfrm>
+            <a:off x="10368382" y="2103120"/>
+            <a:ext cx="1198778" cy="1280160"/>
+          </a:xfrm>
+          <a:prstGeom prst="rect">
+            <a:avLst/>
+          </a:prstGeom>
+          <a:ln w="9525">
+            <a:solidFill>
+              <a:srgbClr val="8A877F"/>
+            </a:solidFill>
+            <a:prstDash val="solid"/>
+          </a:ln>
+        </p:spPr>
+      </p:sp>
+      <p:sp>
+        <p:nvSpPr>
+          <p:cNvPr id="58" name="negres3"/>
+          <p:cNvSpPr txBox="1"/>
+          <p:nvPr/>
+        </p:nvSpPr>
+        <p:spPr>
+          <a:xfrm>
+            <a:off x="8961120" y="3438144"/>
+            <a:ext cx="2606040" cy="274320"/>
+          </a:xfrm>
+          <a:prstGeom prst="rect">
+            <a:avLst/>
+          </a:prstGeom>
+          <a:noFill/>
+          <a:ln/>
+        </p:spPr>
+        <p:txBody>
+          <a:bodyPr wrap="square" lIns="0" tIns="0" rIns="0" bIns="0" rtlCol="0" anchor="ctr"/>
+          <a:lstStyle/>
+          <a:p>
+            <a:pPr indent="0" marL="0">
+              <a:buNone/>
+            </a:pPr>
+            <a:r>
+              <a:rPr lang="en-US" sz="1200" b="1" dirty="0">
+                <a:solidFill>
+                  <a:srgbClr val="A8321F"/>
+                </a:solidFill>
+              </a:rPr>
+              <a:t>底片｜2 張分開印：底片各自完整</a:t>
+            </a:r>
+            <a:endParaRPr lang="en-US" sz="1200" dirty="0"/>
+          </a:p>
+        </p:txBody>
+      </p:sp>
+      <p:sp>
+        <p:nvSpPr>
+          <p:cNvPr id="59" name="sky3"/>
+          <p:cNvSpPr/>
+          <p:nvPr/>
+        </p:nvSpPr>
+        <p:spPr>
+          <a:xfrm>
+            <a:off x="8961120" y="3840480"/>
+            <a:ext cx="2606040" cy="704088"/>
           </a:xfrm>
           <a:prstGeom prst="rect">
             <a:avLst/>
@@ -8750,14 +9613,14 @@
       </p:sp>
       <p:sp>
         <p:nvSpPr>
-          <p:cNvPr id="27" name="hill3"/>
+          <p:cNvPr id="60" name="hill3"/>
           <p:cNvSpPr/>
           <p:nvPr/>
         </p:nvSpPr>
         <p:spPr>
           <a:xfrm>
-            <a:off x="8961120" y="3493008"/>
-            <a:ext cx="2606040" cy="987552"/>
+            <a:off x="8961120" y="4544568"/>
+            <a:ext cx="2606040" cy="576072"/>
           </a:xfrm>
           <a:prstGeom prst="rect">
             <a:avLst/>
@@ -8775,14 +9638,14 @@
       </p:sp>
       <p:sp>
         <p:nvSpPr>
-          <p:cNvPr id="28" name="leg-sky3"/>
+          <p:cNvPr id="61" name="leg-sky3"/>
           <p:cNvSpPr/>
           <p:nvPr/>
         </p:nvSpPr>
         <p:spPr>
           <a:xfrm>
-            <a:off x="10149840" y="2514600"/>
-            <a:ext cx="201168" cy="978408"/>
+            <a:off x="10149840" y="3977640"/>
+            <a:ext cx="182880" cy="566928"/>
           </a:xfrm>
           <a:prstGeom prst="rect">
             <a:avLst/>
@@ -8800,14 +9663,14 @@
       </p:sp>
       <p:sp>
         <p:nvSpPr>
-          <p:cNvPr id="29" name="leg-hill3"/>
+          <p:cNvPr id="62" name="leg-hill3"/>
           <p:cNvSpPr/>
           <p:nvPr/>
         </p:nvSpPr>
         <p:spPr>
           <a:xfrm>
-            <a:off x="10149840" y="3493008"/>
-            <a:ext cx="201168" cy="768096"/>
+            <a:off x="10149840" y="4544568"/>
+            <a:ext cx="182880" cy="409651"/>
           </a:xfrm>
           <a:prstGeom prst="rect">
             <a:avLst/>
@@ -8825,14 +9688,14 @@
       </p:sp>
       <p:sp>
         <p:nvSpPr>
-          <p:cNvPr id="30" name="res3"/>
-          <p:cNvSpPr txBox="1"/>
-          <p:nvPr/>
-        </p:nvSpPr>
-        <p:spPr>
-          <a:xfrm>
-            <a:off x="8961120" y="4590288"/>
-            <a:ext cx="2606040" cy="365760"/>
+          <p:cNvPr id="63" name="res3"/>
+          <p:cNvSpPr txBox="1"/>
+          <p:nvPr/>
+        </p:nvSpPr>
+        <p:spPr>
+          <a:xfrm>
+            <a:off x="8961120" y="5175504"/>
+            <a:ext cx="2606040" cy="274320"/>
           </a:xfrm>
           <a:prstGeom prst="rect">
             <a:avLst/>
@@ -8848,27 +9711,27 @@
               <a:buNone/>
             </a:pPr>
             <a:r>
-              <a:rPr lang="en-US" sz="1400" b="1" dirty="0">
+              <a:rPr lang="en-US" sz="1200" b="1" dirty="0">
                 <a:solidFill>
                   <a:srgbClr val="A8321F"/>
                 </a:solidFill>
               </a:rPr>
-              <a:t>黑的贏：腳仍是實心黑</a:t>
-            </a:r>
-            <a:endParaRPr lang="en-US" sz="1400" dirty="0"/>
-          </a:p>
-        </p:txBody>
-      </p:sp>
-      <p:sp>
-        <p:nvSpPr>
-          <p:cNvPr id="31" name="丁 紅框"/>
+              <a:t>相紙｜黑的贏：腳仍是實心黑</a:t>
+            </a:r>
+            <a:endParaRPr lang="en-US" sz="1200" dirty="0"/>
+          </a:p>
+        </p:txBody>
+      </p:sp>
+      <p:sp>
+        <p:nvSpPr>
+          <p:cNvPr id="64" name="丁 紅框"/>
           <p:cNvSpPr/>
           <p:nvPr/>
         </p:nvSpPr>
         <p:spPr>
           <a:xfrm>
-            <a:off x="8887968" y="1344168"/>
-            <a:ext cx="2752344" cy="3703320"/>
+            <a:off x="8887968" y="1252728"/>
+            <a:ext cx="2752344" cy="4224528"/>
           </a:xfrm>
           <a:prstGeom prst="rect">
             <a:avLst/>
@@ -8883,14 +9746,14 @@
       </p:sp>
       <p:sp>
         <p:nvSpPr>
-          <p:cNvPr id="32" name="body"/>
-          <p:cNvSpPr txBox="1"/>
-          <p:nvPr/>
-        </p:nvSpPr>
-        <p:spPr>
-          <a:xfrm>
-            <a:off x="457200" y="5257800"/>
-            <a:ext cx="8229600" cy="731520"/>
+          <p:cNvPr id="65" name="body"/>
+          <p:cNvSpPr txBox="1"/>
+          <p:nvPr/>
+        </p:nvSpPr>
+        <p:spPr>
+          <a:xfrm>
+            <a:off x="457200" y="5532120"/>
+            <a:ext cx="7132320" cy="640080"/>
           </a:xfrm>
           <a:prstGeom prst="rect">
             <a:avLst/>
@@ -8904,48 +9767,48 @@
           <a:p>
             <a:pPr algn="l" indent="0" marL="0">
               <a:spcAft>
-                <a:spcPts val="200"/>
+                <a:spcPts val="100"/>
               </a:spcAft>
               <a:buNone/>
             </a:pPr>
             <a:r>
-              <a:rPr lang="en-US" sz="1500" b="1" dirty="0">
+              <a:rPr lang="en-US" sz="1400" b="1" dirty="0">
                 <a:solidFill>
                   <a:srgbClr val="1C1B1D"/>
                 </a:solidFill>
               </a:rPr>
-              <a:t>曝光加在相紙上 → 越曝越黑 → 黑的贏</a:t>
-            </a:r>
-            <a:endParaRPr lang="en-US" sz="1500" dirty="0"/>
+              <a:t>底片上相加的是「密度」：越密印出來越白 → 白的贏（乙、丙）</a:t>
+            </a:r>
+            <a:endParaRPr lang="en-US" sz="1400" dirty="0"/>
           </a:p>
           <a:p>
             <a:pPr algn="l" indent="0" marL="0">
               <a:spcAft>
-                <a:spcPts val="200"/>
+                <a:spcPts val="100"/>
               </a:spcAft>
               <a:buNone/>
             </a:pPr>
             <a:r>
-              <a:rPr lang="en-US" sz="1500" b="1" dirty="0">
+              <a:rPr lang="en-US" sz="1400" b="1" dirty="0">
                 <a:solidFill>
                   <a:srgbClr val="1C1B1D"/>
                 </a:solidFill>
               </a:rPr>
-              <a:t>曝光加在底片上，或兩張底片疊著透光 → 白的贏</a:t>
-            </a:r>
-            <a:endParaRPr lang="en-US" sz="1500" dirty="0"/>
-          </a:p>
-        </p:txBody>
-      </p:sp>
-      <p:sp>
-        <p:nvSpPr>
-          <p:cNvPr id="33" name="takeaway-bar"/>
+              <a:t>相紙上相加的是「曝光」：越曝越黑 → 黑的贏（丁）</a:t>
+            </a:r>
+            <a:endParaRPr lang="en-US" sz="1400" dirty="0"/>
+          </a:p>
+        </p:txBody>
+      </p:sp>
+      <p:sp>
+        <p:nvSpPr>
+          <p:cNvPr id="66" name="takeaway-bar"/>
           <p:cNvSpPr/>
           <p:nvPr/>
         </p:nvSpPr>
         <p:spPr>
           <a:xfrm>
-            <a:off x="8686800" y="5394960"/>
+            <a:off x="7863840" y="5641848"/>
             <a:ext cx="54864" cy="347472"/>
           </a:xfrm>
           <a:prstGeom prst="rect">
@@ -8964,14 +9827,14 @@
       </p:sp>
       <p:sp>
         <p:nvSpPr>
-          <p:cNvPr id="34" name="takeaway"/>
-          <p:cNvSpPr txBox="1"/>
-          <p:nvPr/>
-        </p:nvSpPr>
-        <p:spPr>
-          <a:xfrm>
-            <a:off x="8851392" y="5349240"/>
-            <a:ext cx="2944368" cy="438912"/>
+          <p:cNvPr id="67" name="takeaway"/>
+          <p:cNvSpPr txBox="1"/>
+          <p:nvPr/>
+        </p:nvSpPr>
+        <p:spPr>
+          <a:xfrm>
+            <a:off x="8028432" y="5596128"/>
+            <a:ext cx="3675888" cy="438912"/>
           </a:xfrm>
           <a:prstGeom prst="rect">
             <a:avLst/>
@@ -8992,7 +9855,7 @@
                   <a:srgbClr val="A8321F"/>
                 </a:solidFill>
               </a:rPr>
-              <a:t>看腳跨過山稜線那一段</a:t>
+              <a:t>p.244 的腳仍是黑 → 丁</a:t>
             </a:r>
             <a:endParaRPr lang="en-US" sz="1800" dirty="0"/>
           </a:p>
@@ -9000,7 +9863,7 @@
       </p:sp>
       <p:sp>
         <p:nvSpPr>
-          <p:cNvPr id="35" name="source"/>
+          <p:cNvPr id="68" name="source"/>
           <p:cNvSpPr txBox="1"/>
           <p:nvPr/>
         </p:nvSpPr>

--- a/flysfly/簡報/LIVE_1_48-1_20261021_Man_Ray_FlysFly_蜂飛記_鄭丁南20261021.pptx
+++ b/flysfly/簡報/LIVE_1_48-1_20261021_Man_Ray_FlysFly_蜂飛記_鄭丁南20261021.pptx
@@ -118,23 +118,23 @@
   <p:extLst>
     <p:ext uri="{521415D9-36F7-43E2-AB2F-B90AF26B5E84}">
       <p14:sectionLst xmlns:p14="http://schemas.microsoft.com/office/powerpoint/2010/main">
-        <p14:section name="封面" id="{b4184add-ee99-42a2-bb66-5ee892cbbd74}">
+        <p14:section name="封面" id="{46a84775-6376-e607-0041-0045cb8d4126}">
           <p14:sldIdLst>
             <p14:sldId id="256"/>
           </p14:sldIdLst>
         </p14:section>
-        <p14:section name="前菜" id="{d7a938e8-8cdf-0d24-a714-15c54849f2df}">
+        <p14:section name="前菜" id="{bcd8f36a-ff81-5cfb-4dfe-9a1775115f98}">
           <p14:sldIdLst>
             <p14:sldId id="257"/>
           </p14:sldIdLst>
         </p14:section>
-        <p14:section name="中場" id="{71a49d04-95ae-90c9-a341-4e3b6defd672}">
+        <p14:section name="中場" id="{bf8b316a-1da7-3e3d-88a6-bb3f4afb0e1e}">
           <p14:sldIdLst>
             <p14:sldId id="258"/>
             <p14:sldId id="259"/>
           </p14:sldIdLst>
         </p14:section>
-        <p14:section name="主菜" id="{7aebc178-d254-2bf6-f006-d9087e693427}">
+        <p14:section name="主菜" id="{b4639d81-356f-5040-8c0c-05111a77fe3a}">
           <p14:sldIdLst>
             <p14:sldId id="260"/>
             <p14:sldId id="261"/>
@@ -143,12 +143,12 @@
             <p14:sldId id="264"/>
           </p14:sldIdLst>
         </p14:section>
-        <p14:section name="甜點" id="{4a34bb3a-2f0c-5180-0954-18827377a15b}">
+        <p14:section name="甜點" id="{eaabc916-9537-73c5-a7b5-18c9eb3426a5}">
           <p14:sldIdLst>
             <p14:sldId id="265"/>
           </p14:sldIdLst>
         </p14:section>
-        <p14:section name="彩蛋" id="{45498f5b-0393-d5ef-6cc0-4ce29da0bbd0}">
+        <p14:section name="彩蛋" id="{cf9bbb35-6385-e1ce-dfa7-94383779be60}">
           <p14:sldIdLst>
             <p14:sldId id="266"/>
             <p14:sldId id="267"/>
@@ -1379,7 +1379,8 @@
           <a:p>
             <a:r>
               <a:rPr lang="en-US" dirty="0"/>
-              <a:t>上排是底片（看燈箱）：亮的天空在底片上是「密」（看起來暗），暗的腳和山丘在底片上是「薄」（看起來亮）。
+              <a:t>最上面一排是光路：物體黑 → 反射光少 → 光到負片少 → 銀作用少、銀留下少 → 負片透光變多 → 多光透過負片 → 打到相紙的光多 → 銀作用多、留下多 → 相紙底層白色露出少 → 光反射少 → 變黑，也就是物體黑的樣子。（Doorar 的說法）
+上排是底片（看燈箱）：亮的天空在底片上是「密」（看起來暗），暗的腳和山丘在底片上是「薄」（看起來亮）。
 甲 單次近攝：一張底片同時有蜂和風景；但 Pompidou 底片只有蜂、背景均勻，直接排除；景深也排除。
 乙 相機內重覆曝光：同一張底片曝光兩次，天空的密度加在腳上 → 腳在底片上被蓋成密的 → 印出來變白（Adorama：white and very light areas will “burn through” darker areas）。
 丙 夾印（sandwich print）：蜂底片和風景底片疊在一起放進放大機，光要穿過兩張，密度相加 → 腳壓在天空那段一樣變密 → 印出來是灰白鬼影。
@@ -8032,14 +8033,39 @@
       </p:sp>
       <p:sp>
         <p:nvSpPr>
-          <p:cNvPr id="4" name="way0"/>
-          <p:cNvSpPr txBox="1"/>
-          <p:nvPr/>
-        </p:nvSpPr>
-        <p:spPr>
-          <a:xfrm>
-            <a:off x="457200" y="1325880"/>
-            <a:ext cx="2606040" cy="365760"/>
+          <p:cNvPr id="4" name="chain0"/>
+          <p:cNvSpPr/>
+          <p:nvPr/>
+        </p:nvSpPr>
+        <p:spPr>
+          <a:xfrm>
+            <a:off x="457200" y="1243584"/>
+            <a:ext cx="1161288" cy="676656"/>
+          </a:xfrm>
+          <a:prstGeom prst="rect">
+            <a:avLst/>
+          </a:prstGeom>
+          <a:solidFill>
+            <a:srgbClr val="E7E3DA"/>
+          </a:solidFill>
+          <a:ln w="9525">
+            <a:solidFill>
+              <a:srgbClr val="8A877F"/>
+            </a:solidFill>
+            <a:prstDash val="solid"/>
+          </a:ln>
+        </p:spPr>
+      </p:sp>
+      <p:sp>
+        <p:nvSpPr>
+          <p:cNvPr id="5" name="chaint0"/>
+          <p:cNvSpPr txBox="1"/>
+          <p:nvPr/>
+        </p:nvSpPr>
+        <p:spPr>
+          <a:xfrm>
+            <a:off x="493776" y="1243584"/>
+            <a:ext cx="1088136" cy="676656"/>
           </a:xfrm>
           <a:prstGeom prst="rect">
             <a:avLst/>
@@ -8051,11 +8077,1019 @@
           <a:bodyPr wrap="square" lIns="0" tIns="0" rIns="0" bIns="0" rtlCol="0" anchor="ctr"/>
           <a:lstStyle/>
           <a:p>
+            <a:pPr algn="ctr" indent="0" marL="0">
+              <a:buNone/>
+            </a:pPr>
+            <a:r>
+              <a:rPr lang="en-US" sz="800" dirty="0">
+                <a:solidFill>
+                  <a:srgbClr val="5F5D63"/>
+                </a:solidFill>
+              </a:rPr>
+              <a:t>拍攝</a:t>
+            </a:r>
+            <a:endParaRPr lang="en-US" sz="800" dirty="0"/>
+          </a:p>
+          <a:p>
+            <a:pPr algn="ctr" indent="0" marL="0">
+              <a:buNone/>
+            </a:pPr>
+            <a:r>
+              <a:rPr lang="en-US" sz="1100" b="1" dirty="0">
+                <a:solidFill>
+                  <a:srgbClr val="1C1B1D"/>
+                </a:solidFill>
+              </a:rPr>
+              <a:t>物體黑</a:t>
+            </a:r>
+            <a:endParaRPr lang="en-US" sz="800" dirty="0"/>
+          </a:p>
+        </p:txBody>
+      </p:sp>
+      <p:sp>
+        <p:nvSpPr>
+          <p:cNvPr id="6" name="chaina0"/>
+          <p:cNvSpPr txBox="1"/>
+          <p:nvPr/>
+        </p:nvSpPr>
+        <p:spPr>
+          <a:xfrm>
+            <a:off x="1600200" y="1426464"/>
+            <a:ext cx="137160" cy="274320"/>
+          </a:xfrm>
+          <a:prstGeom prst="rect">
+            <a:avLst/>
+          </a:prstGeom>
+          <a:noFill/>
+          <a:ln/>
+        </p:spPr>
+        <p:txBody>
+          <a:bodyPr wrap="square" lIns="0" tIns="0" rIns="0" bIns="0" rtlCol="0" anchor="ctr"/>
+          <a:lstStyle/>
+          <a:p>
+            <a:pPr algn="ctr" indent="0" marL="0">
+              <a:buNone/>
+            </a:pPr>
+            <a:r>
+              <a:rPr lang="en-US" sz="1400" b="1" dirty="0">
+                <a:solidFill>
+                  <a:srgbClr val="A8321F"/>
+                </a:solidFill>
+              </a:rPr>
+              <a:t>›</a:t>
+            </a:r>
+            <a:endParaRPr lang="en-US" sz="1400" dirty="0"/>
+          </a:p>
+        </p:txBody>
+      </p:sp>
+      <p:sp>
+        <p:nvSpPr>
+          <p:cNvPr id="7" name="chain1"/>
+          <p:cNvSpPr/>
+          <p:nvPr/>
+        </p:nvSpPr>
+        <p:spPr>
+          <a:xfrm>
+            <a:off x="1721815" y="1243584"/>
+            <a:ext cx="1161288" cy="676656"/>
+          </a:xfrm>
+          <a:prstGeom prst="rect">
+            <a:avLst/>
+          </a:prstGeom>
+          <a:solidFill>
+            <a:srgbClr val="E7E3DA"/>
+          </a:solidFill>
+          <a:ln w="9525">
+            <a:solidFill>
+              <a:srgbClr val="8A877F"/>
+            </a:solidFill>
+            <a:prstDash val="solid"/>
+          </a:ln>
+        </p:spPr>
+      </p:sp>
+      <p:sp>
+        <p:nvSpPr>
+          <p:cNvPr id="8" name="chaint1"/>
+          <p:cNvSpPr txBox="1"/>
+          <p:nvPr/>
+        </p:nvSpPr>
+        <p:spPr>
+          <a:xfrm>
+            <a:off x="1758391" y="1243584"/>
+            <a:ext cx="1088136" cy="676656"/>
+          </a:xfrm>
+          <a:prstGeom prst="rect">
+            <a:avLst/>
+          </a:prstGeom>
+          <a:noFill/>
+          <a:ln/>
+        </p:spPr>
+        <p:txBody>
+          <a:bodyPr wrap="square" lIns="0" tIns="0" rIns="0" bIns="0" rtlCol="0" anchor="ctr"/>
+          <a:lstStyle/>
+          <a:p>
+            <a:pPr algn="ctr" indent="0" marL="0">
+              <a:buNone/>
+            </a:pPr>
+            <a:r>
+              <a:rPr lang="en-US" sz="800" dirty="0">
+                <a:solidFill>
+                  <a:srgbClr val="5F5D63"/>
+                </a:solidFill>
+              </a:rPr>
+              <a:t>拍攝</a:t>
+            </a:r>
+            <a:endParaRPr lang="en-US" sz="800" dirty="0"/>
+          </a:p>
+          <a:p>
+            <a:pPr algn="ctr" indent="0" marL="0">
+              <a:buNone/>
+            </a:pPr>
+            <a:r>
+              <a:rPr lang="en-US" sz="1100" dirty="0">
+                <a:solidFill>
+                  <a:srgbClr val="1C1B1D"/>
+                </a:solidFill>
+              </a:rPr>
+              <a:t>反射光少</a:t>
+            </a:r>
+            <a:endParaRPr lang="en-US" sz="800" dirty="0"/>
+          </a:p>
+        </p:txBody>
+      </p:sp>
+      <p:sp>
+        <p:nvSpPr>
+          <p:cNvPr id="9" name="chaina1"/>
+          <p:cNvSpPr txBox="1"/>
+          <p:nvPr/>
+        </p:nvSpPr>
+        <p:spPr>
+          <a:xfrm>
+            <a:off x="2864815" y="1426464"/>
+            <a:ext cx="137160" cy="274320"/>
+          </a:xfrm>
+          <a:prstGeom prst="rect">
+            <a:avLst/>
+          </a:prstGeom>
+          <a:noFill/>
+          <a:ln/>
+        </p:spPr>
+        <p:txBody>
+          <a:bodyPr wrap="square" lIns="0" tIns="0" rIns="0" bIns="0" rtlCol="0" anchor="ctr"/>
+          <a:lstStyle/>
+          <a:p>
+            <a:pPr algn="ctr" indent="0" marL="0">
+              <a:buNone/>
+            </a:pPr>
+            <a:r>
+              <a:rPr lang="en-US" sz="1400" b="1" dirty="0">
+                <a:solidFill>
+                  <a:srgbClr val="A8321F"/>
+                </a:solidFill>
+              </a:rPr>
+              <a:t>›</a:t>
+            </a:r>
+            <a:endParaRPr lang="en-US" sz="1400" dirty="0"/>
+          </a:p>
+        </p:txBody>
+      </p:sp>
+      <p:sp>
+        <p:nvSpPr>
+          <p:cNvPr id="10" name="chain2"/>
+          <p:cNvSpPr/>
+          <p:nvPr/>
+        </p:nvSpPr>
+        <p:spPr>
+          <a:xfrm>
+            <a:off x="2986430" y="1243584"/>
+            <a:ext cx="1161288" cy="676656"/>
+          </a:xfrm>
+          <a:prstGeom prst="rect">
+            <a:avLst/>
+          </a:prstGeom>
+          <a:solidFill>
+            <a:srgbClr val="3F3C38"/>
+          </a:solidFill>
+          <a:ln w="9525">
+            <a:solidFill>
+              <a:srgbClr val="8A877F"/>
+            </a:solidFill>
+            <a:prstDash val="solid"/>
+          </a:ln>
+        </p:spPr>
+      </p:sp>
+      <p:sp>
+        <p:nvSpPr>
+          <p:cNvPr id="11" name="chaint2"/>
+          <p:cNvSpPr txBox="1"/>
+          <p:nvPr/>
+        </p:nvSpPr>
+        <p:spPr>
+          <a:xfrm>
+            <a:off x="3023006" y="1243584"/>
+            <a:ext cx="1088136" cy="676656"/>
+          </a:xfrm>
+          <a:prstGeom prst="rect">
+            <a:avLst/>
+          </a:prstGeom>
+          <a:noFill/>
+          <a:ln/>
+        </p:spPr>
+        <p:txBody>
+          <a:bodyPr wrap="square" lIns="0" tIns="0" rIns="0" bIns="0" rtlCol="0" anchor="ctr"/>
+          <a:lstStyle/>
+          <a:p>
+            <a:pPr algn="ctr" indent="0" marL="0">
+              <a:buNone/>
+            </a:pPr>
+            <a:r>
+              <a:rPr lang="en-US" sz="800" dirty="0">
+                <a:solidFill>
+                  <a:srgbClr val="C8C3BA"/>
+                </a:solidFill>
+              </a:rPr>
+              <a:t>負片</a:t>
+            </a:r>
+            <a:endParaRPr lang="en-US" sz="800" dirty="0"/>
+          </a:p>
+          <a:p>
+            <a:pPr algn="ctr" indent="0" marL="0">
+              <a:buNone/>
+            </a:pPr>
+            <a:r>
+              <a:rPr lang="en-US" sz="1100" dirty="0">
+                <a:solidFill>
+                  <a:srgbClr val="F4F1EA"/>
+                </a:solidFill>
+              </a:rPr>
+              <a:t>到負片</a:t>
+            </a:r>
+            <a:endParaRPr lang="en-US" sz="800" dirty="0"/>
+          </a:p>
+          <a:p>
+            <a:pPr algn="ctr" indent="0" marL="0">
+              <a:buNone/>
+            </a:pPr>
+            <a:r>
+              <a:rPr lang="en-US" sz="1100" dirty="0">
+                <a:solidFill>
+                  <a:srgbClr val="F4F1EA"/>
+                </a:solidFill>
+              </a:rPr>
+              <a:t>的光少</a:t>
+            </a:r>
+            <a:endParaRPr lang="en-US" sz="800" dirty="0"/>
+          </a:p>
+        </p:txBody>
+      </p:sp>
+      <p:sp>
+        <p:nvSpPr>
+          <p:cNvPr id="12" name="chaina2"/>
+          <p:cNvSpPr txBox="1"/>
+          <p:nvPr/>
+        </p:nvSpPr>
+        <p:spPr>
+          <a:xfrm>
+            <a:off x="4129430" y="1426464"/>
+            <a:ext cx="137160" cy="274320"/>
+          </a:xfrm>
+          <a:prstGeom prst="rect">
+            <a:avLst/>
+          </a:prstGeom>
+          <a:noFill/>
+          <a:ln/>
+        </p:spPr>
+        <p:txBody>
+          <a:bodyPr wrap="square" lIns="0" tIns="0" rIns="0" bIns="0" rtlCol="0" anchor="ctr"/>
+          <a:lstStyle/>
+          <a:p>
+            <a:pPr algn="ctr" indent="0" marL="0">
+              <a:buNone/>
+            </a:pPr>
+            <a:r>
+              <a:rPr lang="en-US" sz="1400" b="1" dirty="0">
+                <a:solidFill>
+                  <a:srgbClr val="A8321F"/>
+                </a:solidFill>
+              </a:rPr>
+              <a:t>›</a:t>
+            </a:r>
+            <a:endParaRPr lang="en-US" sz="1400" dirty="0"/>
+          </a:p>
+        </p:txBody>
+      </p:sp>
+      <p:sp>
+        <p:nvSpPr>
+          <p:cNvPr id="13" name="chain3"/>
+          <p:cNvSpPr/>
+          <p:nvPr/>
+        </p:nvSpPr>
+        <p:spPr>
+          <a:xfrm>
+            <a:off x="4251046" y="1243584"/>
+            <a:ext cx="1161288" cy="676656"/>
+          </a:xfrm>
+          <a:prstGeom prst="rect">
+            <a:avLst/>
+          </a:prstGeom>
+          <a:solidFill>
+            <a:srgbClr val="3F3C38"/>
+          </a:solidFill>
+          <a:ln w="9525">
+            <a:solidFill>
+              <a:srgbClr val="8A877F"/>
+            </a:solidFill>
+            <a:prstDash val="solid"/>
+          </a:ln>
+        </p:spPr>
+      </p:sp>
+      <p:sp>
+        <p:nvSpPr>
+          <p:cNvPr id="14" name="chaint3"/>
+          <p:cNvSpPr txBox="1"/>
+          <p:nvPr/>
+        </p:nvSpPr>
+        <p:spPr>
+          <a:xfrm>
+            <a:off x="4287622" y="1243584"/>
+            <a:ext cx="1088136" cy="676656"/>
+          </a:xfrm>
+          <a:prstGeom prst="rect">
+            <a:avLst/>
+          </a:prstGeom>
+          <a:noFill/>
+          <a:ln/>
+        </p:spPr>
+        <p:txBody>
+          <a:bodyPr wrap="square" lIns="0" tIns="0" rIns="0" bIns="0" rtlCol="0" anchor="ctr"/>
+          <a:lstStyle/>
+          <a:p>
+            <a:pPr algn="ctr" indent="0" marL="0">
+              <a:buNone/>
+            </a:pPr>
+            <a:r>
+              <a:rPr lang="en-US" sz="800" dirty="0">
+                <a:solidFill>
+                  <a:srgbClr val="C8C3BA"/>
+                </a:solidFill>
+              </a:rPr>
+              <a:t>負片</a:t>
+            </a:r>
+            <a:endParaRPr lang="en-US" sz="800" dirty="0"/>
+          </a:p>
+          <a:p>
+            <a:pPr algn="ctr" indent="0" marL="0">
+              <a:buNone/>
+            </a:pPr>
+            <a:r>
+              <a:rPr lang="en-US" sz="1100" dirty="0">
+                <a:solidFill>
+                  <a:srgbClr val="F4F1EA"/>
+                </a:solidFill>
+              </a:rPr>
+              <a:t>銀作用少</a:t>
+            </a:r>
+            <a:endParaRPr lang="en-US" sz="800" dirty="0"/>
+          </a:p>
+          <a:p>
+            <a:pPr algn="ctr" indent="0" marL="0">
+              <a:buNone/>
+            </a:pPr>
+            <a:r>
+              <a:rPr lang="en-US" sz="1100" dirty="0">
+                <a:solidFill>
+                  <a:srgbClr val="F4F1EA"/>
+                </a:solidFill>
+              </a:rPr>
+              <a:t>銀留下少</a:t>
+            </a:r>
+            <a:endParaRPr lang="en-US" sz="800" dirty="0"/>
+          </a:p>
+        </p:txBody>
+      </p:sp>
+      <p:sp>
+        <p:nvSpPr>
+          <p:cNvPr id="15" name="chaina3"/>
+          <p:cNvSpPr txBox="1"/>
+          <p:nvPr/>
+        </p:nvSpPr>
+        <p:spPr>
+          <a:xfrm>
+            <a:off x="5394046" y="1426464"/>
+            <a:ext cx="137160" cy="274320"/>
+          </a:xfrm>
+          <a:prstGeom prst="rect">
+            <a:avLst/>
+          </a:prstGeom>
+          <a:noFill/>
+          <a:ln/>
+        </p:spPr>
+        <p:txBody>
+          <a:bodyPr wrap="square" lIns="0" tIns="0" rIns="0" bIns="0" rtlCol="0" anchor="ctr"/>
+          <a:lstStyle/>
+          <a:p>
+            <a:pPr algn="ctr" indent="0" marL="0">
+              <a:buNone/>
+            </a:pPr>
+            <a:r>
+              <a:rPr lang="en-US" sz="1400" b="1" dirty="0">
+                <a:solidFill>
+                  <a:srgbClr val="A8321F"/>
+                </a:solidFill>
+              </a:rPr>
+              <a:t>›</a:t>
+            </a:r>
+            <a:endParaRPr lang="en-US" sz="1400" dirty="0"/>
+          </a:p>
+        </p:txBody>
+      </p:sp>
+      <p:sp>
+        <p:nvSpPr>
+          <p:cNvPr id="16" name="chain4"/>
+          <p:cNvSpPr/>
+          <p:nvPr/>
+        </p:nvSpPr>
+        <p:spPr>
+          <a:xfrm>
+            <a:off x="5515661" y="1243584"/>
+            <a:ext cx="1161288" cy="676656"/>
+          </a:xfrm>
+          <a:prstGeom prst="rect">
+            <a:avLst/>
+          </a:prstGeom>
+          <a:solidFill>
+            <a:srgbClr val="3F3C38"/>
+          </a:solidFill>
+          <a:ln w="9525">
+            <a:solidFill>
+              <a:srgbClr val="8A877F"/>
+            </a:solidFill>
+            <a:prstDash val="solid"/>
+          </a:ln>
+        </p:spPr>
+      </p:sp>
+      <p:sp>
+        <p:nvSpPr>
+          <p:cNvPr id="17" name="chaint4"/>
+          <p:cNvSpPr txBox="1"/>
+          <p:nvPr/>
+        </p:nvSpPr>
+        <p:spPr>
+          <a:xfrm>
+            <a:off x="5552237" y="1243584"/>
+            <a:ext cx="1088136" cy="676656"/>
+          </a:xfrm>
+          <a:prstGeom prst="rect">
+            <a:avLst/>
+          </a:prstGeom>
+          <a:noFill/>
+          <a:ln/>
+        </p:spPr>
+        <p:txBody>
+          <a:bodyPr wrap="square" lIns="0" tIns="0" rIns="0" bIns="0" rtlCol="0" anchor="ctr"/>
+          <a:lstStyle/>
+          <a:p>
+            <a:pPr algn="ctr" indent="0" marL="0">
+              <a:buNone/>
+            </a:pPr>
+            <a:r>
+              <a:rPr lang="en-US" sz="800" dirty="0">
+                <a:solidFill>
+                  <a:srgbClr val="C8C3BA"/>
+                </a:solidFill>
+              </a:rPr>
+              <a:t>負片</a:t>
+            </a:r>
+            <a:endParaRPr lang="en-US" sz="800" dirty="0"/>
+          </a:p>
+          <a:p>
+            <a:pPr algn="ctr" indent="0" marL="0">
+              <a:buNone/>
+            </a:pPr>
+            <a:r>
+              <a:rPr lang="en-US" sz="1100" dirty="0">
+                <a:solidFill>
+                  <a:srgbClr val="F4F1EA"/>
+                </a:solidFill>
+              </a:rPr>
+              <a:t>負片透光多</a:t>
+            </a:r>
+            <a:endParaRPr lang="en-US" sz="800" dirty="0"/>
+          </a:p>
+        </p:txBody>
+      </p:sp>
+      <p:sp>
+        <p:nvSpPr>
+          <p:cNvPr id="18" name="chaina4"/>
+          <p:cNvSpPr txBox="1"/>
+          <p:nvPr/>
+        </p:nvSpPr>
+        <p:spPr>
+          <a:xfrm>
+            <a:off x="6658661" y="1426464"/>
+            <a:ext cx="137160" cy="274320"/>
+          </a:xfrm>
+          <a:prstGeom prst="rect">
+            <a:avLst/>
+          </a:prstGeom>
+          <a:noFill/>
+          <a:ln/>
+        </p:spPr>
+        <p:txBody>
+          <a:bodyPr wrap="square" lIns="0" tIns="0" rIns="0" bIns="0" rtlCol="0" anchor="ctr"/>
+          <a:lstStyle/>
+          <a:p>
+            <a:pPr algn="ctr" indent="0" marL="0">
+              <a:buNone/>
+            </a:pPr>
+            <a:r>
+              <a:rPr lang="en-US" sz="1400" b="1" dirty="0">
+                <a:solidFill>
+                  <a:srgbClr val="A8321F"/>
+                </a:solidFill>
+              </a:rPr>
+              <a:t>›</a:t>
+            </a:r>
+            <a:endParaRPr lang="en-US" sz="1400" dirty="0"/>
+          </a:p>
+        </p:txBody>
+      </p:sp>
+      <p:sp>
+        <p:nvSpPr>
+          <p:cNvPr id="19" name="chain5"/>
+          <p:cNvSpPr/>
+          <p:nvPr/>
+        </p:nvSpPr>
+        <p:spPr>
+          <a:xfrm>
+            <a:off x="6780276" y="1243584"/>
+            <a:ext cx="1161288" cy="676656"/>
+          </a:xfrm>
+          <a:prstGeom prst="rect">
+            <a:avLst/>
+          </a:prstGeom>
+          <a:solidFill>
+            <a:srgbClr val="F4F1EA"/>
+          </a:solidFill>
+          <a:ln w="9525">
+            <a:solidFill>
+              <a:srgbClr val="8A877F"/>
+            </a:solidFill>
+            <a:prstDash val="solid"/>
+          </a:ln>
+        </p:spPr>
+      </p:sp>
+      <p:sp>
+        <p:nvSpPr>
+          <p:cNvPr id="20" name="chaint5"/>
+          <p:cNvSpPr txBox="1"/>
+          <p:nvPr/>
+        </p:nvSpPr>
+        <p:spPr>
+          <a:xfrm>
+            <a:off x="6816852" y="1243584"/>
+            <a:ext cx="1088136" cy="676656"/>
+          </a:xfrm>
+          <a:prstGeom prst="rect">
+            <a:avLst/>
+          </a:prstGeom>
+          <a:noFill/>
+          <a:ln/>
+        </p:spPr>
+        <p:txBody>
+          <a:bodyPr wrap="square" lIns="0" tIns="0" rIns="0" bIns="0" rtlCol="0" anchor="ctr"/>
+          <a:lstStyle/>
+          <a:p>
+            <a:pPr algn="ctr" indent="0" marL="0">
+              <a:buNone/>
+            </a:pPr>
+            <a:r>
+              <a:rPr lang="en-US" sz="800" dirty="0">
+                <a:solidFill>
+                  <a:srgbClr val="5F5D63"/>
+                </a:solidFill>
+              </a:rPr>
+              <a:t>相紙</a:t>
+            </a:r>
+            <a:endParaRPr lang="en-US" sz="800" dirty="0"/>
+          </a:p>
+          <a:p>
+            <a:pPr algn="ctr" indent="0" marL="0">
+              <a:buNone/>
+            </a:pPr>
+            <a:r>
+              <a:rPr lang="en-US" sz="1100" dirty="0">
+                <a:solidFill>
+                  <a:srgbClr val="1C1B1D"/>
+                </a:solidFill>
+              </a:rPr>
+              <a:t>打到相紙</a:t>
+            </a:r>
+            <a:endParaRPr lang="en-US" sz="800" dirty="0"/>
+          </a:p>
+          <a:p>
+            <a:pPr algn="ctr" indent="0" marL="0">
+              <a:buNone/>
+            </a:pPr>
+            <a:r>
+              <a:rPr lang="en-US" sz="1100" dirty="0">
+                <a:solidFill>
+                  <a:srgbClr val="1C1B1D"/>
+                </a:solidFill>
+              </a:rPr>
+              <a:t>的光多</a:t>
+            </a:r>
+            <a:endParaRPr lang="en-US" sz="800" dirty="0"/>
+          </a:p>
+        </p:txBody>
+      </p:sp>
+      <p:sp>
+        <p:nvSpPr>
+          <p:cNvPr id="21" name="chaina5"/>
+          <p:cNvSpPr txBox="1"/>
+          <p:nvPr/>
+        </p:nvSpPr>
+        <p:spPr>
+          <a:xfrm>
+            <a:off x="7923276" y="1426464"/>
+            <a:ext cx="137160" cy="274320"/>
+          </a:xfrm>
+          <a:prstGeom prst="rect">
+            <a:avLst/>
+          </a:prstGeom>
+          <a:noFill/>
+          <a:ln/>
+        </p:spPr>
+        <p:txBody>
+          <a:bodyPr wrap="square" lIns="0" tIns="0" rIns="0" bIns="0" rtlCol="0" anchor="ctr"/>
+          <a:lstStyle/>
+          <a:p>
+            <a:pPr algn="ctr" indent="0" marL="0">
+              <a:buNone/>
+            </a:pPr>
+            <a:r>
+              <a:rPr lang="en-US" sz="1400" b="1" dirty="0">
+                <a:solidFill>
+                  <a:srgbClr val="A8321F"/>
+                </a:solidFill>
+              </a:rPr>
+              <a:t>›</a:t>
+            </a:r>
+            <a:endParaRPr lang="en-US" sz="1400" dirty="0"/>
+          </a:p>
+        </p:txBody>
+      </p:sp>
+      <p:sp>
+        <p:nvSpPr>
+          <p:cNvPr id="22" name="chain6"/>
+          <p:cNvSpPr/>
+          <p:nvPr/>
+        </p:nvSpPr>
+        <p:spPr>
+          <a:xfrm>
+            <a:off x="8044891" y="1243584"/>
+            <a:ext cx="1161288" cy="676656"/>
+          </a:xfrm>
+          <a:prstGeom prst="rect">
+            <a:avLst/>
+          </a:prstGeom>
+          <a:solidFill>
+            <a:srgbClr val="F4F1EA"/>
+          </a:solidFill>
+          <a:ln w="9525">
+            <a:solidFill>
+              <a:srgbClr val="8A877F"/>
+            </a:solidFill>
+            <a:prstDash val="solid"/>
+          </a:ln>
+        </p:spPr>
+      </p:sp>
+      <p:sp>
+        <p:nvSpPr>
+          <p:cNvPr id="23" name="chaint6"/>
+          <p:cNvSpPr txBox="1"/>
+          <p:nvPr/>
+        </p:nvSpPr>
+        <p:spPr>
+          <a:xfrm>
+            <a:off x="8081467" y="1243584"/>
+            <a:ext cx="1088136" cy="676656"/>
+          </a:xfrm>
+          <a:prstGeom prst="rect">
+            <a:avLst/>
+          </a:prstGeom>
+          <a:noFill/>
+          <a:ln/>
+        </p:spPr>
+        <p:txBody>
+          <a:bodyPr wrap="square" lIns="0" tIns="0" rIns="0" bIns="0" rtlCol="0" anchor="ctr"/>
+          <a:lstStyle/>
+          <a:p>
+            <a:pPr algn="ctr" indent="0" marL="0">
+              <a:buNone/>
+            </a:pPr>
+            <a:r>
+              <a:rPr lang="en-US" sz="800" dirty="0">
+                <a:solidFill>
+                  <a:srgbClr val="5F5D63"/>
+                </a:solidFill>
+              </a:rPr>
+              <a:t>相紙</a:t>
+            </a:r>
+            <a:endParaRPr lang="en-US" sz="800" dirty="0"/>
+          </a:p>
+          <a:p>
+            <a:pPr algn="ctr" indent="0" marL="0">
+              <a:buNone/>
+            </a:pPr>
+            <a:r>
+              <a:rPr lang="en-US" sz="1100" dirty="0">
+                <a:solidFill>
+                  <a:srgbClr val="1C1B1D"/>
+                </a:solidFill>
+              </a:rPr>
+              <a:t>銀作用多</a:t>
+            </a:r>
+            <a:endParaRPr lang="en-US" sz="800" dirty="0"/>
+          </a:p>
+          <a:p>
+            <a:pPr algn="ctr" indent="0" marL="0">
+              <a:buNone/>
+            </a:pPr>
+            <a:r>
+              <a:rPr lang="en-US" sz="1100" dirty="0">
+                <a:solidFill>
+                  <a:srgbClr val="1C1B1D"/>
+                </a:solidFill>
+              </a:rPr>
+              <a:t>銀留下多</a:t>
+            </a:r>
+            <a:endParaRPr lang="en-US" sz="800" dirty="0"/>
+          </a:p>
+        </p:txBody>
+      </p:sp>
+      <p:sp>
+        <p:nvSpPr>
+          <p:cNvPr id="24" name="chaina6"/>
+          <p:cNvSpPr txBox="1"/>
+          <p:nvPr/>
+        </p:nvSpPr>
+        <p:spPr>
+          <a:xfrm>
+            <a:off x="9187891" y="1426464"/>
+            <a:ext cx="137160" cy="274320"/>
+          </a:xfrm>
+          <a:prstGeom prst="rect">
+            <a:avLst/>
+          </a:prstGeom>
+          <a:noFill/>
+          <a:ln/>
+        </p:spPr>
+        <p:txBody>
+          <a:bodyPr wrap="square" lIns="0" tIns="0" rIns="0" bIns="0" rtlCol="0" anchor="ctr"/>
+          <a:lstStyle/>
+          <a:p>
+            <a:pPr algn="ctr" indent="0" marL="0">
+              <a:buNone/>
+            </a:pPr>
+            <a:r>
+              <a:rPr lang="en-US" sz="1400" b="1" dirty="0">
+                <a:solidFill>
+                  <a:srgbClr val="A8321F"/>
+                </a:solidFill>
+              </a:rPr>
+              <a:t>›</a:t>
+            </a:r>
+            <a:endParaRPr lang="en-US" sz="1400" dirty="0"/>
+          </a:p>
+        </p:txBody>
+      </p:sp>
+      <p:sp>
+        <p:nvSpPr>
+          <p:cNvPr id="25" name="chain7"/>
+          <p:cNvSpPr/>
+          <p:nvPr/>
+        </p:nvSpPr>
+        <p:spPr>
+          <a:xfrm>
+            <a:off x="9309506" y="1243584"/>
+            <a:ext cx="1161288" cy="676656"/>
+          </a:xfrm>
+          <a:prstGeom prst="rect">
+            <a:avLst/>
+          </a:prstGeom>
+          <a:solidFill>
+            <a:srgbClr val="F4F1EA"/>
+          </a:solidFill>
+          <a:ln w="9525">
+            <a:solidFill>
+              <a:srgbClr val="8A877F"/>
+            </a:solidFill>
+            <a:prstDash val="solid"/>
+          </a:ln>
+        </p:spPr>
+      </p:sp>
+      <p:sp>
+        <p:nvSpPr>
+          <p:cNvPr id="26" name="chaint7"/>
+          <p:cNvSpPr txBox="1"/>
+          <p:nvPr/>
+        </p:nvSpPr>
+        <p:spPr>
+          <a:xfrm>
+            <a:off x="9346082" y="1243584"/>
+            <a:ext cx="1088136" cy="676656"/>
+          </a:xfrm>
+          <a:prstGeom prst="rect">
+            <a:avLst/>
+          </a:prstGeom>
+          <a:noFill/>
+          <a:ln/>
+        </p:spPr>
+        <p:txBody>
+          <a:bodyPr wrap="square" lIns="0" tIns="0" rIns="0" bIns="0" rtlCol="0" anchor="ctr"/>
+          <a:lstStyle/>
+          <a:p>
+            <a:pPr algn="ctr" indent="0" marL="0">
+              <a:buNone/>
+            </a:pPr>
+            <a:r>
+              <a:rPr lang="en-US" sz="800" dirty="0">
+                <a:solidFill>
+                  <a:srgbClr val="5F5D63"/>
+                </a:solidFill>
+              </a:rPr>
+              <a:t>相紙</a:t>
+            </a:r>
+            <a:endParaRPr lang="en-US" sz="800" dirty="0"/>
+          </a:p>
+          <a:p>
+            <a:pPr algn="ctr" indent="0" marL="0">
+              <a:buNone/>
+            </a:pPr>
+            <a:r>
+              <a:rPr lang="en-US" sz="1100" dirty="0">
+                <a:solidFill>
+                  <a:srgbClr val="1C1B1D"/>
+                </a:solidFill>
+              </a:rPr>
+              <a:t>白底露出少</a:t>
+            </a:r>
+            <a:endParaRPr lang="en-US" sz="800" dirty="0"/>
+          </a:p>
+          <a:p>
+            <a:pPr algn="ctr" indent="0" marL="0">
+              <a:buNone/>
+            </a:pPr>
+            <a:r>
+              <a:rPr lang="en-US" sz="1100" dirty="0">
+                <a:solidFill>
+                  <a:srgbClr val="1C1B1D"/>
+                </a:solidFill>
+              </a:rPr>
+              <a:t>反射少</a:t>
+            </a:r>
+            <a:endParaRPr lang="en-US" sz="800" dirty="0"/>
+          </a:p>
+        </p:txBody>
+      </p:sp>
+      <p:sp>
+        <p:nvSpPr>
+          <p:cNvPr id="27" name="chaina7"/>
+          <p:cNvSpPr txBox="1"/>
+          <p:nvPr/>
+        </p:nvSpPr>
+        <p:spPr>
+          <a:xfrm>
+            <a:off x="10452506" y="1426464"/>
+            <a:ext cx="137160" cy="274320"/>
+          </a:xfrm>
+          <a:prstGeom prst="rect">
+            <a:avLst/>
+          </a:prstGeom>
+          <a:noFill/>
+          <a:ln/>
+        </p:spPr>
+        <p:txBody>
+          <a:bodyPr wrap="square" lIns="0" tIns="0" rIns="0" bIns="0" rtlCol="0" anchor="ctr"/>
+          <a:lstStyle/>
+          <a:p>
+            <a:pPr algn="ctr" indent="0" marL="0">
+              <a:buNone/>
+            </a:pPr>
+            <a:r>
+              <a:rPr lang="en-US" sz="1400" b="1" dirty="0">
+                <a:solidFill>
+                  <a:srgbClr val="A8321F"/>
+                </a:solidFill>
+              </a:rPr>
+              <a:t>›</a:t>
+            </a:r>
+            <a:endParaRPr lang="en-US" sz="1400" dirty="0"/>
+          </a:p>
+        </p:txBody>
+      </p:sp>
+      <p:sp>
+        <p:nvSpPr>
+          <p:cNvPr id="28" name="chain8"/>
+          <p:cNvSpPr/>
+          <p:nvPr/>
+        </p:nvSpPr>
+        <p:spPr>
+          <a:xfrm>
+            <a:off x="10574122" y="1243584"/>
+            <a:ext cx="1161288" cy="676656"/>
+          </a:xfrm>
+          <a:prstGeom prst="rect">
+            <a:avLst/>
+          </a:prstGeom>
+          <a:solidFill>
+            <a:srgbClr val="F4F1EA"/>
+          </a:solidFill>
+          <a:ln w="19050">
+            <a:solidFill>
+              <a:srgbClr val="A8321F"/>
+            </a:solidFill>
+            <a:prstDash val="solid"/>
+          </a:ln>
+        </p:spPr>
+      </p:sp>
+      <p:sp>
+        <p:nvSpPr>
+          <p:cNvPr id="29" name="chaint8"/>
+          <p:cNvSpPr txBox="1"/>
+          <p:nvPr/>
+        </p:nvSpPr>
+        <p:spPr>
+          <a:xfrm>
+            <a:off x="10610698" y="1243584"/>
+            <a:ext cx="1088136" cy="676656"/>
+          </a:xfrm>
+          <a:prstGeom prst="rect">
+            <a:avLst/>
+          </a:prstGeom>
+          <a:noFill/>
+          <a:ln/>
+        </p:spPr>
+        <p:txBody>
+          <a:bodyPr wrap="square" lIns="0" tIns="0" rIns="0" bIns="0" rtlCol="0" anchor="ctr"/>
+          <a:lstStyle/>
+          <a:p>
+            <a:pPr algn="ctr" indent="0" marL="0">
+              <a:buNone/>
+            </a:pPr>
+            <a:r>
+              <a:rPr lang="en-US" sz="800" dirty="0">
+                <a:solidFill>
+                  <a:srgbClr val="5F5D63"/>
+                </a:solidFill>
+              </a:rPr>
+              <a:t>相紙</a:t>
+            </a:r>
+            <a:endParaRPr lang="en-US" sz="800" dirty="0"/>
+          </a:p>
+          <a:p>
+            <a:pPr algn="ctr" indent="0" marL="0">
+              <a:buNone/>
+            </a:pPr>
+            <a:r>
+              <a:rPr lang="en-US" sz="1100" b="1" dirty="0">
+                <a:solidFill>
+                  <a:srgbClr val="A8321F"/>
+                </a:solidFill>
+              </a:rPr>
+              <a:t>變黑＝物體黑</a:t>
+            </a:r>
+            <a:endParaRPr lang="en-US" sz="800" dirty="0"/>
+          </a:p>
+        </p:txBody>
+      </p:sp>
+      <p:sp>
+        <p:nvSpPr>
+          <p:cNvPr id="30" name="way0"/>
+          <p:cNvSpPr txBox="1"/>
+          <p:nvPr/>
+        </p:nvSpPr>
+        <p:spPr>
+          <a:xfrm>
+            <a:off x="457200" y="2103120"/>
+            <a:ext cx="2606040" cy="347472"/>
+          </a:xfrm>
+          <a:prstGeom prst="rect">
+            <a:avLst/>
+          </a:prstGeom>
+          <a:noFill/>
+          <a:ln/>
+        </p:spPr>
+        <p:txBody>
+          <a:bodyPr wrap="square" lIns="0" tIns="0" rIns="0" bIns="0" rtlCol="0" anchor="ctr"/>
+          <a:lstStyle/>
+          <a:p>
             <a:pPr indent="0" marL="0">
               <a:buNone/>
             </a:pPr>
             <a:r>
-              <a:rPr lang="en-US" sz="1800" b="1" dirty="0">
+              <a:rPr lang="en-US" sz="1600" b="1" dirty="0">
                 <a:solidFill>
                   <a:srgbClr val="1C1B1D"/>
                 </a:solidFill>
@@ -8065,56 +9099,20 @@
               </a:rPr>
               <a:t>甲　單次近攝</a:t>
             </a:r>
-            <a:endParaRPr lang="en-US" sz="1800" dirty="0"/>
-          </a:p>
-        </p:txBody>
-      </p:sp>
-      <p:sp>
-        <p:nvSpPr>
-          <p:cNvPr id="5" name="caption"/>
-          <p:cNvSpPr txBox="1"/>
-          <p:nvPr/>
-        </p:nvSpPr>
-        <p:spPr>
-          <a:xfrm>
-            <a:off x="457200" y="1691640"/>
-            <a:ext cx="2606040" cy="256032"/>
-          </a:xfrm>
-          <a:prstGeom prst="rect">
-            <a:avLst/>
-          </a:prstGeom>
-          <a:noFill/>
-          <a:ln/>
-        </p:spPr>
-        <p:txBody>
-          <a:bodyPr wrap="square" lIns="0" tIns="0" rIns="0" bIns="0" rtlCol="0" anchor="t"/>
-          <a:lstStyle/>
-          <a:p>
-            <a:pPr algn="l" indent="0" marL="0">
-              <a:buNone/>
-            </a:pPr>
-            <a:r>
-              <a:rPr lang="en-US" sz="1200" dirty="0">
-                <a:solidFill>
-                  <a:srgbClr val="5F5D63"/>
-                </a:solidFill>
-              </a:rPr>
-              <a:t>蜂和風景一次拍</a:t>
-            </a:r>
-            <a:endParaRPr lang="en-US" sz="1200" dirty="0"/>
-          </a:p>
-        </p:txBody>
-      </p:sp>
-      <p:sp>
-        <p:nvSpPr>
-          <p:cNvPr id="6" name="n0-sky"/>
+            <a:endParaRPr lang="en-US" sz="1600" dirty="0"/>
+          </a:p>
+        </p:txBody>
+      </p:sp>
+      <p:sp>
+        <p:nvSpPr>
+          <p:cNvPr id="31" name="n0-sky"/>
           <p:cNvSpPr/>
           <p:nvPr/>
         </p:nvSpPr>
         <p:spPr>
           <a:xfrm>
-            <a:off x="457200" y="2103120"/>
-            <a:ext cx="2606040" cy="704088"/>
+            <a:off x="457200" y="2542032"/>
+            <a:ext cx="2606040" cy="528066"/>
           </a:xfrm>
           <a:prstGeom prst="rect">
             <a:avLst/>
@@ -8132,14 +9130,14 @@
       </p:sp>
       <p:sp>
         <p:nvSpPr>
-          <p:cNvPr id="7" name="n0-hill"/>
+          <p:cNvPr id="32" name="n0-hill"/>
           <p:cNvSpPr/>
           <p:nvPr/>
         </p:nvSpPr>
         <p:spPr>
           <a:xfrm>
-            <a:off x="457200" y="2807208"/>
-            <a:ext cx="2606040" cy="576072"/>
+            <a:off x="457200" y="3070098"/>
+            <a:ext cx="2606040" cy="432054"/>
           </a:xfrm>
           <a:prstGeom prst="rect">
             <a:avLst/>
@@ -8157,14 +9155,14 @@
       </p:sp>
       <p:sp>
         <p:nvSpPr>
-          <p:cNvPr id="8" name="n0-legsky"/>
+          <p:cNvPr id="33" name="n0-legsky"/>
           <p:cNvSpPr/>
           <p:nvPr/>
         </p:nvSpPr>
         <p:spPr>
           <a:xfrm>
-            <a:off x="1655978" y="2240280"/>
-            <a:ext cx="208483" cy="566928"/>
+            <a:off x="1655978" y="2679192"/>
+            <a:ext cx="208483" cy="390906"/>
           </a:xfrm>
           <a:prstGeom prst="rect">
             <a:avLst/>
@@ -8182,14 +9180,14 @@
       </p:sp>
       <p:sp>
         <p:nvSpPr>
-          <p:cNvPr id="9" name="n0-leghill"/>
+          <p:cNvPr id="34" name="n0-leghill"/>
           <p:cNvSpPr/>
           <p:nvPr/>
         </p:nvSpPr>
         <p:spPr>
           <a:xfrm>
-            <a:off x="1655978" y="2807208"/>
-            <a:ext cx="208483" cy="409651"/>
+            <a:off x="1655978" y="3070098"/>
+            <a:ext cx="208483" cy="307238"/>
           </a:xfrm>
           <a:prstGeom prst="rect">
             <a:avLst/>
@@ -8207,14 +9205,14 @@
       </p:sp>
       <p:sp>
         <p:nvSpPr>
-          <p:cNvPr id="10" name="n0-frame"/>
+          <p:cNvPr id="35" name="n0-frame"/>
           <p:cNvSpPr/>
           <p:nvPr/>
         </p:nvSpPr>
         <p:spPr>
           <a:xfrm>
-            <a:off x="457200" y="2103120"/>
-            <a:ext cx="2606040" cy="1280160"/>
+            <a:off x="457200" y="2542032"/>
+            <a:ext cx="2606040" cy="960120"/>
           </a:xfrm>
           <a:prstGeom prst="rect">
             <a:avLst/>
@@ -8229,14 +9227,14 @@
       </p:sp>
       <p:sp>
         <p:nvSpPr>
-          <p:cNvPr id="11" name="n0-x"/>
-          <p:cNvSpPr txBox="1"/>
-          <p:nvPr/>
-        </p:nvSpPr>
-        <p:spPr>
-          <a:xfrm>
-            <a:off x="457200" y="2103120"/>
-            <a:ext cx="2606040" cy="1280160"/>
+          <p:cNvPr id="36" name="n0-x"/>
+          <p:cNvSpPr txBox="1"/>
+          <p:nvPr/>
+        </p:nvSpPr>
+        <p:spPr>
+          <a:xfrm>
+            <a:off x="457200" y="2542032"/>
+            <a:ext cx="2606040" cy="960120"/>
           </a:xfrm>
           <a:prstGeom prst="rect">
             <a:avLst/>
@@ -8252,27 +9250,27 @@
               <a:buNone/>
             </a:pPr>
             <a:r>
-              <a:rPr lang="en-US" sz="4000" dirty="0">
+              <a:rPr lang="en-US" sz="3200" dirty="0">
                 <a:solidFill>
                   <a:srgbClr val="A8321F"/>
                 </a:solidFill>
               </a:rPr>
               <a:t>✕</a:t>
             </a:r>
-            <a:endParaRPr lang="en-US" sz="4000" dirty="0"/>
-          </a:p>
-        </p:txBody>
-      </p:sp>
-      <p:sp>
-        <p:nvSpPr>
-          <p:cNvPr id="12" name="negres0"/>
-          <p:cNvSpPr txBox="1"/>
-          <p:nvPr/>
-        </p:nvSpPr>
-        <p:spPr>
-          <a:xfrm>
-            <a:off x="457200" y="3438144"/>
-            <a:ext cx="2606040" cy="274320"/>
+            <a:endParaRPr lang="en-US" sz="3200" dirty="0"/>
+          </a:p>
+        </p:txBody>
+      </p:sp>
+      <p:sp>
+        <p:nvSpPr>
+          <p:cNvPr id="37" name="negres0"/>
+          <p:cNvSpPr txBox="1"/>
+          <p:nvPr/>
+        </p:nvSpPr>
+        <p:spPr>
+          <a:xfrm>
+            <a:off x="457200" y="3538728"/>
+            <a:ext cx="2606040" cy="256032"/>
           </a:xfrm>
           <a:prstGeom prst="rect">
             <a:avLst/>
@@ -8288,27 +9286,27 @@
               <a:buNone/>
             </a:pPr>
             <a:r>
-              <a:rPr lang="en-US" sz="1200" dirty="0">
+              <a:rPr lang="en-US" sz="1100" dirty="0">
                 <a:solidFill>
                   <a:srgbClr val="1C1B1D"/>
                 </a:solidFill>
               </a:rPr>
               <a:t>底片｜1 張底片，腳是透明的</a:t>
             </a:r>
-            <a:endParaRPr lang="en-US" sz="1200" dirty="0"/>
-          </a:p>
-        </p:txBody>
-      </p:sp>
-      <p:sp>
-        <p:nvSpPr>
-          <p:cNvPr id="13" name="sky0"/>
+            <a:endParaRPr lang="en-US" sz="1100" dirty="0"/>
+          </a:p>
+        </p:txBody>
+      </p:sp>
+      <p:sp>
+        <p:nvSpPr>
+          <p:cNvPr id="38" name="sky0"/>
           <p:cNvSpPr/>
           <p:nvPr/>
         </p:nvSpPr>
         <p:spPr>
           <a:xfrm>
-            <a:off x="457200" y="3840480"/>
-            <a:ext cx="2606040" cy="704088"/>
+            <a:off x="457200" y="3931920"/>
+            <a:ext cx="2606040" cy="528066"/>
           </a:xfrm>
           <a:prstGeom prst="rect">
             <a:avLst/>
@@ -8326,14 +9324,14 @@
       </p:sp>
       <p:sp>
         <p:nvSpPr>
-          <p:cNvPr id="14" name="hill0"/>
+          <p:cNvPr id="39" name="hill0"/>
           <p:cNvSpPr/>
           <p:nvPr/>
         </p:nvSpPr>
         <p:spPr>
           <a:xfrm>
-            <a:off x="457200" y="4544568"/>
-            <a:ext cx="2606040" cy="576072"/>
+            <a:off x="457200" y="4459986"/>
+            <a:ext cx="2606040" cy="432054"/>
           </a:xfrm>
           <a:prstGeom prst="rect">
             <a:avLst/>
@@ -8351,14 +9349,14 @@
       </p:sp>
       <p:sp>
         <p:nvSpPr>
-          <p:cNvPr id="15" name="cross"/>
-          <p:cNvSpPr txBox="1"/>
-          <p:nvPr/>
-        </p:nvSpPr>
-        <p:spPr>
-          <a:xfrm>
-            <a:off x="457200" y="3840480"/>
-            <a:ext cx="2606040" cy="1280160"/>
+          <p:cNvPr id="40" name="cross"/>
+          <p:cNvSpPr txBox="1"/>
+          <p:nvPr/>
+        </p:nvSpPr>
+        <p:spPr>
+          <a:xfrm>
+            <a:off x="457200" y="3931920"/>
+            <a:ext cx="2606040" cy="960120"/>
           </a:xfrm>
           <a:prstGeom prst="rect">
             <a:avLst/>
@@ -8374,27 +9372,27 @@
               <a:buNone/>
             </a:pPr>
             <a:r>
-              <a:rPr lang="en-US" sz="4000" dirty="0">
+              <a:rPr lang="en-US" sz="3200" dirty="0">
                 <a:solidFill>
                   <a:srgbClr val="A8321F"/>
                 </a:solidFill>
               </a:rPr>
               <a:t>✕</a:t>
             </a:r>
-            <a:endParaRPr lang="en-US" sz="4000" dirty="0"/>
-          </a:p>
-        </p:txBody>
-      </p:sp>
-      <p:sp>
-        <p:nvSpPr>
-          <p:cNvPr id="16" name="res0"/>
-          <p:cNvSpPr txBox="1"/>
-          <p:nvPr/>
-        </p:nvSpPr>
-        <p:spPr>
-          <a:xfrm>
-            <a:off x="457200" y="5175504"/>
-            <a:ext cx="2606040" cy="274320"/>
+            <a:endParaRPr lang="en-US" sz="3200" dirty="0"/>
+          </a:p>
+        </p:txBody>
+      </p:sp>
+      <p:sp>
+        <p:nvSpPr>
+          <p:cNvPr id="41" name="res0"/>
+          <p:cNvSpPr txBox="1"/>
+          <p:nvPr/>
+        </p:nvSpPr>
+        <p:spPr>
+          <a:xfrm>
+            <a:off x="457200" y="4928616"/>
+            <a:ext cx="2606040" cy="256032"/>
           </a:xfrm>
           <a:prstGeom prst="rect">
             <a:avLst/>
@@ -8410,27 +9408,27 @@
               <a:buNone/>
             </a:pPr>
             <a:r>
-              <a:rPr lang="en-US" sz="1200" dirty="0">
+              <a:rPr lang="en-US" sz="1100" dirty="0">
                 <a:solidFill>
                   <a:srgbClr val="1C1B1D"/>
                 </a:solidFill>
               </a:rPr>
               <a:t>相紙｜底片上沒有風景</a:t>
             </a:r>
-            <a:endParaRPr lang="en-US" sz="1200" dirty="0"/>
-          </a:p>
-        </p:txBody>
-      </p:sp>
-      <p:sp>
-        <p:nvSpPr>
-          <p:cNvPr id="17" name="way1"/>
-          <p:cNvSpPr txBox="1"/>
-          <p:nvPr/>
-        </p:nvSpPr>
-        <p:spPr>
-          <a:xfrm>
-            <a:off x="3291840" y="1325880"/>
-            <a:ext cx="2606040" cy="365760"/>
+            <a:endParaRPr lang="en-US" sz="1100" dirty="0"/>
+          </a:p>
+        </p:txBody>
+      </p:sp>
+      <p:sp>
+        <p:nvSpPr>
+          <p:cNvPr id="42" name="way1"/>
+          <p:cNvSpPr txBox="1"/>
+          <p:nvPr/>
+        </p:nvSpPr>
+        <p:spPr>
+          <a:xfrm>
+            <a:off x="3291840" y="2103120"/>
+            <a:ext cx="2606040" cy="347472"/>
           </a:xfrm>
           <a:prstGeom prst="rect">
             <a:avLst/>
@@ -8446,7 +9444,7 @@
               <a:buNone/>
             </a:pPr>
             <a:r>
-              <a:rPr lang="en-US" sz="1800" b="1" dirty="0">
+              <a:rPr lang="en-US" sz="1600" b="1" dirty="0">
                 <a:solidFill>
                   <a:srgbClr val="1C1B1D"/>
                 </a:solidFill>
@@ -8456,56 +9454,20 @@
               </a:rPr>
               <a:t>乙　相機內重覆曝光</a:t>
             </a:r>
-            <a:endParaRPr lang="en-US" sz="1800" dirty="0"/>
-          </a:p>
-        </p:txBody>
-      </p:sp>
-      <p:sp>
-        <p:nvSpPr>
-          <p:cNvPr id="18" name="caption"/>
-          <p:cNvSpPr txBox="1"/>
-          <p:nvPr/>
-        </p:nvSpPr>
-        <p:spPr>
-          <a:xfrm>
-            <a:off x="3291840" y="1691640"/>
-            <a:ext cx="2606040" cy="256032"/>
-          </a:xfrm>
-          <a:prstGeom prst="rect">
-            <a:avLst/>
-          </a:prstGeom>
-          <a:noFill/>
-          <a:ln/>
-        </p:spPr>
-        <p:txBody>
-          <a:bodyPr wrap="square" lIns="0" tIns="0" rIns="0" bIns="0" rtlCol="0" anchor="t"/>
-          <a:lstStyle/>
-          <a:p>
-            <a:pPr algn="l" indent="0" marL="0">
-              <a:buNone/>
-            </a:pPr>
-            <a:r>
-              <a:rPr lang="en-US" sz="1200" dirty="0">
-                <a:solidFill>
-                  <a:srgbClr val="5F5D63"/>
-                </a:solidFill>
-              </a:rPr>
-              <a:t>同一張底片曝光兩次</a:t>
-            </a:r>
-            <a:endParaRPr lang="en-US" sz="1200" dirty="0"/>
-          </a:p>
-        </p:txBody>
-      </p:sp>
-      <p:sp>
-        <p:nvSpPr>
-          <p:cNvPr id="19" name="n1-sky"/>
+            <a:endParaRPr lang="en-US" sz="1600" dirty="0"/>
+          </a:p>
+        </p:txBody>
+      </p:sp>
+      <p:sp>
+        <p:nvSpPr>
+          <p:cNvPr id="43" name="n1-sky"/>
           <p:cNvSpPr/>
           <p:nvPr/>
         </p:nvSpPr>
         <p:spPr>
           <a:xfrm>
-            <a:off x="3291840" y="2103120"/>
-            <a:ext cx="2606040" cy="704088"/>
+            <a:off x="3291840" y="2542032"/>
+            <a:ext cx="2606040" cy="528066"/>
           </a:xfrm>
           <a:prstGeom prst="rect">
             <a:avLst/>
@@ -8523,14 +9485,14 @@
       </p:sp>
       <p:sp>
         <p:nvSpPr>
-          <p:cNvPr id="20" name="n1-hill"/>
+          <p:cNvPr id="44" name="n1-hill"/>
           <p:cNvSpPr/>
           <p:nvPr/>
         </p:nvSpPr>
         <p:spPr>
           <a:xfrm>
-            <a:off x="3291840" y="2807208"/>
-            <a:ext cx="2606040" cy="576072"/>
+            <a:off x="3291840" y="3070098"/>
+            <a:ext cx="2606040" cy="432054"/>
           </a:xfrm>
           <a:prstGeom prst="rect">
             <a:avLst/>
@@ -8548,14 +9510,14 @@
       </p:sp>
       <p:sp>
         <p:nvSpPr>
-          <p:cNvPr id="21" name="n1-legsky"/>
+          <p:cNvPr id="45" name="n1-legsky"/>
           <p:cNvSpPr/>
           <p:nvPr/>
         </p:nvSpPr>
         <p:spPr>
           <a:xfrm>
-            <a:off x="4490618" y="2240280"/>
-            <a:ext cx="208483" cy="566928"/>
+            <a:off x="4490618" y="2679192"/>
+            <a:ext cx="208483" cy="390906"/>
           </a:xfrm>
           <a:prstGeom prst="rect">
             <a:avLst/>
@@ -8573,14 +9535,14 @@
       </p:sp>
       <p:sp>
         <p:nvSpPr>
-          <p:cNvPr id="22" name="n1-leghill"/>
+          <p:cNvPr id="46" name="n1-leghill"/>
           <p:cNvSpPr/>
           <p:nvPr/>
         </p:nvSpPr>
         <p:spPr>
           <a:xfrm>
-            <a:off x="4490618" y="2807208"/>
-            <a:ext cx="208483" cy="409651"/>
+            <a:off x="4490618" y="3070098"/>
+            <a:ext cx="208483" cy="307238"/>
           </a:xfrm>
           <a:prstGeom prst="rect">
             <a:avLst/>
@@ -8598,14 +9560,14 @@
       </p:sp>
       <p:sp>
         <p:nvSpPr>
-          <p:cNvPr id="23" name="n1-frame"/>
+          <p:cNvPr id="47" name="n1-frame"/>
           <p:cNvSpPr/>
           <p:nvPr/>
         </p:nvSpPr>
         <p:spPr>
           <a:xfrm>
-            <a:off x="3291840" y="2103120"/>
-            <a:ext cx="2606040" cy="1280160"/>
+            <a:off x="3291840" y="2542032"/>
+            <a:ext cx="2606040" cy="960120"/>
           </a:xfrm>
           <a:prstGeom prst="rect">
             <a:avLst/>
@@ -8620,14 +9582,14 @@
       </p:sp>
       <p:sp>
         <p:nvSpPr>
-          <p:cNvPr id="24" name="negres1"/>
-          <p:cNvSpPr txBox="1"/>
-          <p:nvPr/>
-        </p:nvSpPr>
-        <p:spPr>
-          <a:xfrm>
-            <a:off x="3291840" y="3438144"/>
-            <a:ext cx="2606040" cy="274320"/>
+          <p:cNvPr id="48" name="negres1"/>
+          <p:cNvSpPr txBox="1"/>
+          <p:nvPr/>
+        </p:nvSpPr>
+        <p:spPr>
+          <a:xfrm>
+            <a:off x="3291840" y="3538728"/>
+            <a:ext cx="2606040" cy="256032"/>
           </a:xfrm>
           <a:prstGeom prst="rect">
             <a:avLst/>
@@ -8643,27 +9605,27 @@
               <a:buNone/>
             </a:pPr>
             <a:r>
-              <a:rPr lang="en-US" sz="1200" dirty="0">
+              <a:rPr lang="en-US" sz="1100" dirty="0">
                 <a:solidFill>
                   <a:srgbClr val="1C1B1D"/>
                 </a:solidFill>
               </a:rPr>
               <a:t>底片｜1 張底片：天空的密度蓋過腳</a:t>
             </a:r>
-            <a:endParaRPr lang="en-US" sz="1200" dirty="0"/>
-          </a:p>
-        </p:txBody>
-      </p:sp>
-      <p:sp>
-        <p:nvSpPr>
-          <p:cNvPr id="25" name="sky1"/>
+            <a:endParaRPr lang="en-US" sz="1100" dirty="0"/>
+          </a:p>
+        </p:txBody>
+      </p:sp>
+      <p:sp>
+        <p:nvSpPr>
+          <p:cNvPr id="49" name="sky1"/>
           <p:cNvSpPr/>
           <p:nvPr/>
         </p:nvSpPr>
         <p:spPr>
           <a:xfrm>
-            <a:off x="3291840" y="3840480"/>
-            <a:ext cx="2606040" cy="704088"/>
+            <a:off x="3291840" y="3931920"/>
+            <a:ext cx="2606040" cy="528066"/>
           </a:xfrm>
           <a:prstGeom prst="rect">
             <a:avLst/>
@@ -8681,14 +9643,14 @@
       </p:sp>
       <p:sp>
         <p:nvSpPr>
-          <p:cNvPr id="26" name="hill1"/>
+          <p:cNvPr id="50" name="hill1"/>
           <p:cNvSpPr/>
           <p:nvPr/>
         </p:nvSpPr>
         <p:spPr>
           <a:xfrm>
-            <a:off x="3291840" y="4544568"/>
-            <a:ext cx="2606040" cy="576072"/>
+            <a:off x="3291840" y="4459986"/>
+            <a:ext cx="2606040" cy="432054"/>
           </a:xfrm>
           <a:prstGeom prst="rect">
             <a:avLst/>
@@ -8706,14 +9668,14 @@
       </p:sp>
       <p:sp>
         <p:nvSpPr>
-          <p:cNvPr id="27" name="leg-sky1"/>
+          <p:cNvPr id="51" name="leg-sky1"/>
           <p:cNvSpPr/>
           <p:nvPr/>
         </p:nvSpPr>
         <p:spPr>
           <a:xfrm>
-            <a:off x="4480560" y="3977640"/>
-            <a:ext cx="182880" cy="566928"/>
+            <a:off x="4480560" y="4023360"/>
+            <a:ext cx="182880" cy="436626"/>
           </a:xfrm>
           <a:prstGeom prst="rect">
             <a:avLst/>
@@ -8731,14 +9693,14 @@
       </p:sp>
       <p:sp>
         <p:nvSpPr>
-          <p:cNvPr id="28" name="leg-hill1"/>
+          <p:cNvPr id="52" name="leg-hill1"/>
           <p:cNvSpPr/>
           <p:nvPr/>
         </p:nvSpPr>
         <p:spPr>
           <a:xfrm>
-            <a:off x="4480560" y="4544568"/>
-            <a:ext cx="182880" cy="409651"/>
+            <a:off x="4480560" y="4459986"/>
+            <a:ext cx="182880" cy="307238"/>
           </a:xfrm>
           <a:prstGeom prst="rect">
             <a:avLst/>
@@ -8756,14 +9718,14 @@
       </p:sp>
       <p:sp>
         <p:nvSpPr>
-          <p:cNvPr id="29" name="res1"/>
-          <p:cNvSpPr txBox="1"/>
-          <p:nvPr/>
-        </p:nvSpPr>
-        <p:spPr>
-          <a:xfrm>
-            <a:off x="3291840" y="5175504"/>
-            <a:ext cx="2606040" cy="274320"/>
+          <p:cNvPr id="53" name="res1"/>
+          <p:cNvSpPr txBox="1"/>
+          <p:nvPr/>
+        </p:nvSpPr>
+        <p:spPr>
+          <a:xfrm>
+            <a:off x="3291840" y="4928616"/>
+            <a:ext cx="2606040" cy="256032"/>
           </a:xfrm>
           <a:prstGeom prst="rect">
             <a:avLst/>
@@ -8779,27 +9741,27 @@
               <a:buNone/>
             </a:pPr>
             <a:r>
-              <a:rPr lang="en-US" sz="1200" dirty="0">
+              <a:rPr lang="en-US" sz="1100" dirty="0">
                 <a:solidFill>
                   <a:srgbClr val="1C1B1D"/>
                 </a:solidFill>
               </a:rPr>
               <a:t>相紙｜白的贏：亮天空燒穿腳</a:t>
             </a:r>
-            <a:endParaRPr lang="en-US" sz="1200" dirty="0"/>
-          </a:p>
-        </p:txBody>
-      </p:sp>
-      <p:sp>
-        <p:nvSpPr>
-          <p:cNvPr id="30" name="way2"/>
-          <p:cNvSpPr txBox="1"/>
-          <p:nvPr/>
-        </p:nvSpPr>
-        <p:spPr>
-          <a:xfrm>
-            <a:off x="6126480" y="1325880"/>
-            <a:ext cx="2606040" cy="365760"/>
+            <a:endParaRPr lang="en-US" sz="1100" dirty="0"/>
+          </a:p>
+        </p:txBody>
+      </p:sp>
+      <p:sp>
+        <p:nvSpPr>
+          <p:cNvPr id="54" name="way2"/>
+          <p:cNvSpPr txBox="1"/>
+          <p:nvPr/>
+        </p:nvSpPr>
+        <p:spPr>
+          <a:xfrm>
+            <a:off x="6126480" y="2103120"/>
+            <a:ext cx="2606040" cy="347472"/>
           </a:xfrm>
           <a:prstGeom prst="rect">
             <a:avLst/>
@@ -8815,7 +9777,7 @@
               <a:buNone/>
             </a:pPr>
             <a:r>
-              <a:rPr lang="en-US" sz="1800" b="1" dirty="0">
+              <a:rPr lang="en-US" sz="1600" b="1" dirty="0">
                 <a:solidFill>
                   <a:srgbClr val="1C1B1D"/>
                 </a:solidFill>
@@ -8825,56 +9787,20 @@
               </a:rPr>
               <a:t>丙　夾印</a:t>
             </a:r>
-            <a:endParaRPr lang="en-US" sz="1800" dirty="0"/>
-          </a:p>
-        </p:txBody>
-      </p:sp>
-      <p:sp>
-        <p:nvSpPr>
-          <p:cNvPr id="31" name="caption"/>
-          <p:cNvSpPr txBox="1"/>
-          <p:nvPr/>
-        </p:nvSpPr>
-        <p:spPr>
-          <a:xfrm>
-            <a:off x="6126480" y="1691640"/>
-            <a:ext cx="2606040" cy="256032"/>
-          </a:xfrm>
-          <a:prstGeom prst="rect">
-            <a:avLst/>
-          </a:prstGeom>
-          <a:noFill/>
-          <a:ln/>
-        </p:spPr>
-        <p:txBody>
-          <a:bodyPr wrap="square" lIns="0" tIns="0" rIns="0" bIns="0" rtlCol="0" anchor="t"/>
-          <a:lstStyle/>
-          <a:p>
-            <a:pPr algn="l" indent="0" marL="0">
-              <a:buNone/>
-            </a:pPr>
-            <a:r>
-              <a:rPr lang="en-US" sz="1200" dirty="0">
-                <a:solidFill>
-                  <a:srgbClr val="5F5D63"/>
-                </a:solidFill>
-              </a:rPr>
-              <a:t>兩張底片疊著一起印</a:t>
-            </a:r>
-            <a:endParaRPr lang="en-US" sz="1200" dirty="0"/>
-          </a:p>
-        </p:txBody>
-      </p:sp>
-      <p:sp>
-        <p:nvSpPr>
-          <p:cNvPr id="32" name="n2b-bg"/>
+            <a:endParaRPr lang="en-US" sz="1600" dirty="0"/>
+          </a:p>
+        </p:txBody>
+      </p:sp>
+      <p:sp>
+        <p:nvSpPr>
+          <p:cNvPr id="55" name="n2b-bg"/>
           <p:cNvSpPr/>
           <p:nvPr/>
         </p:nvSpPr>
         <p:spPr>
           <a:xfrm>
-            <a:off x="6291072" y="2011680"/>
-            <a:ext cx="2441448" cy="1280160"/>
+            <a:off x="6291072" y="2450592"/>
+            <a:ext cx="2441448" cy="960120"/>
           </a:xfrm>
           <a:prstGeom prst="rect">
             <a:avLst/>
@@ -8892,14 +9818,14 @@
       </p:sp>
       <p:sp>
         <p:nvSpPr>
-          <p:cNvPr id="33" name="n2b-legsky"/>
+          <p:cNvPr id="56" name="n2b-legsky"/>
           <p:cNvSpPr/>
           <p:nvPr/>
         </p:nvSpPr>
         <p:spPr>
           <a:xfrm>
-            <a:off x="7414138" y="2148840"/>
-            <a:ext cx="195316" cy="566928"/>
+            <a:off x="7414138" y="2587752"/>
+            <a:ext cx="195316" cy="390906"/>
           </a:xfrm>
           <a:prstGeom prst="rect">
             <a:avLst/>
@@ -8917,14 +9843,14 @@
       </p:sp>
       <p:sp>
         <p:nvSpPr>
-          <p:cNvPr id="34" name="n2b-leghill"/>
+          <p:cNvPr id="57" name="n2b-leghill"/>
           <p:cNvSpPr/>
           <p:nvPr/>
         </p:nvSpPr>
         <p:spPr>
           <a:xfrm>
-            <a:off x="7414138" y="2715768"/>
-            <a:ext cx="195316" cy="409651"/>
+            <a:off x="7414138" y="2978658"/>
+            <a:ext cx="195316" cy="307238"/>
           </a:xfrm>
           <a:prstGeom prst="rect">
             <a:avLst/>
@@ -8942,14 +9868,14 @@
       </p:sp>
       <p:sp>
         <p:nvSpPr>
-          <p:cNvPr id="35" name="n2b-frame"/>
+          <p:cNvPr id="58" name="n2b-frame"/>
           <p:cNvSpPr/>
           <p:nvPr/>
         </p:nvSpPr>
         <p:spPr>
           <a:xfrm>
-            <a:off x="6291072" y="2011680"/>
-            <a:ext cx="2441448" cy="1280160"/>
+            <a:off x="6291072" y="2450592"/>
+            <a:ext cx="2441448" cy="960120"/>
           </a:xfrm>
           <a:prstGeom prst="rect">
             <a:avLst/>
@@ -8964,14 +9890,14 @@
       </p:sp>
       <p:sp>
         <p:nvSpPr>
-          <p:cNvPr id="36" name="n2a-sky"/>
+          <p:cNvPr id="59" name="n2a-sky"/>
           <p:cNvSpPr/>
           <p:nvPr/>
         </p:nvSpPr>
         <p:spPr>
           <a:xfrm>
-            <a:off x="6126480" y="2103120"/>
-            <a:ext cx="2441448" cy="704088"/>
+            <a:off x="6126480" y="2542032"/>
+            <a:ext cx="2441448" cy="528066"/>
           </a:xfrm>
           <a:prstGeom prst="rect">
             <a:avLst/>
@@ -8989,14 +9915,14 @@
       </p:sp>
       <p:sp>
         <p:nvSpPr>
-          <p:cNvPr id="37" name="n2a-hill"/>
+          <p:cNvPr id="60" name="n2a-hill"/>
           <p:cNvSpPr/>
           <p:nvPr/>
         </p:nvSpPr>
         <p:spPr>
           <a:xfrm>
-            <a:off x="6126480" y="2807208"/>
-            <a:ext cx="2441448" cy="576072"/>
+            <a:off x="6126480" y="3070098"/>
+            <a:ext cx="2441448" cy="432054"/>
           </a:xfrm>
           <a:prstGeom prst="rect">
             <a:avLst/>
@@ -9014,14 +9940,14 @@
       </p:sp>
       <p:sp>
         <p:nvSpPr>
-          <p:cNvPr id="38" name="n2a-legsky"/>
+          <p:cNvPr id="61" name="n2a-legsky"/>
           <p:cNvSpPr/>
           <p:nvPr/>
         </p:nvSpPr>
         <p:spPr>
           <a:xfrm>
-            <a:off x="7249546" y="2240280"/>
-            <a:ext cx="195316" cy="566928"/>
+            <a:off x="7249546" y="2679192"/>
+            <a:ext cx="195316" cy="390906"/>
           </a:xfrm>
           <a:prstGeom prst="rect">
             <a:avLst/>
@@ -9039,14 +9965,14 @@
       </p:sp>
       <p:sp>
         <p:nvSpPr>
-          <p:cNvPr id="39" name="n2a-leghill"/>
+          <p:cNvPr id="62" name="n2a-leghill"/>
           <p:cNvSpPr/>
           <p:nvPr/>
         </p:nvSpPr>
         <p:spPr>
           <a:xfrm>
-            <a:off x="7249546" y="2807208"/>
-            <a:ext cx="195316" cy="409651"/>
+            <a:off x="7249546" y="3070098"/>
+            <a:ext cx="195316" cy="307238"/>
           </a:xfrm>
           <a:prstGeom prst="rect">
             <a:avLst/>
@@ -9064,14 +9990,14 @@
       </p:sp>
       <p:sp>
         <p:nvSpPr>
-          <p:cNvPr id="40" name="n2a-frame"/>
+          <p:cNvPr id="63" name="n2a-frame"/>
           <p:cNvSpPr/>
           <p:nvPr/>
         </p:nvSpPr>
         <p:spPr>
           <a:xfrm>
-            <a:off x="6126480" y="2103120"/>
-            <a:ext cx="2441448" cy="1280160"/>
+            <a:off x="6126480" y="2542032"/>
+            <a:ext cx="2441448" cy="960120"/>
           </a:xfrm>
           <a:prstGeom prst="rect">
             <a:avLst/>
@@ -9086,14 +10012,14 @@
       </p:sp>
       <p:sp>
         <p:nvSpPr>
-          <p:cNvPr id="41" name="negres2"/>
-          <p:cNvSpPr txBox="1"/>
-          <p:nvPr/>
-        </p:nvSpPr>
-        <p:spPr>
-          <a:xfrm>
-            <a:off x="6126480" y="3438144"/>
-            <a:ext cx="2606040" cy="274320"/>
+          <p:cNvPr id="64" name="negres2"/>
+          <p:cNvSpPr txBox="1"/>
+          <p:nvPr/>
+        </p:nvSpPr>
+        <p:spPr>
+          <a:xfrm>
+            <a:off x="6126480" y="3538728"/>
+            <a:ext cx="2606040" cy="256032"/>
           </a:xfrm>
           <a:prstGeom prst="rect">
             <a:avLst/>
@@ -9109,27 +10035,27 @@
               <a:buNone/>
             </a:pPr>
             <a:r>
-              <a:rPr lang="en-US" sz="1200" dirty="0">
+              <a:rPr lang="en-US" sz="1100" dirty="0">
                 <a:solidFill>
                   <a:srgbClr val="1C1B1D"/>
                 </a:solidFill>
               </a:rPr>
               <a:t>底片｜2 張疊著透光：密度相加</a:t>
             </a:r>
-            <a:endParaRPr lang="en-US" sz="1200" dirty="0"/>
-          </a:p>
-        </p:txBody>
-      </p:sp>
-      <p:sp>
-        <p:nvSpPr>
-          <p:cNvPr id="42" name="sky2"/>
+            <a:endParaRPr lang="en-US" sz="1100" dirty="0"/>
+          </a:p>
+        </p:txBody>
+      </p:sp>
+      <p:sp>
+        <p:nvSpPr>
+          <p:cNvPr id="65" name="sky2"/>
           <p:cNvSpPr/>
           <p:nvPr/>
         </p:nvSpPr>
         <p:spPr>
           <a:xfrm>
-            <a:off x="6126480" y="3840480"/>
-            <a:ext cx="2606040" cy="704088"/>
+            <a:off x="6126480" y="3931920"/>
+            <a:ext cx="2606040" cy="528066"/>
           </a:xfrm>
           <a:prstGeom prst="rect">
             <a:avLst/>
@@ -9147,14 +10073,14 @@
       </p:sp>
       <p:sp>
         <p:nvSpPr>
-          <p:cNvPr id="43" name="hill2"/>
+          <p:cNvPr id="66" name="hill2"/>
           <p:cNvSpPr/>
           <p:nvPr/>
         </p:nvSpPr>
         <p:spPr>
           <a:xfrm>
-            <a:off x="6126480" y="4544568"/>
-            <a:ext cx="2606040" cy="576072"/>
+            <a:off x="6126480" y="4459986"/>
+            <a:ext cx="2606040" cy="432054"/>
           </a:xfrm>
           <a:prstGeom prst="rect">
             <a:avLst/>
@@ -9172,14 +10098,14 @@
       </p:sp>
       <p:sp>
         <p:nvSpPr>
-          <p:cNvPr id="44" name="leg-sky2"/>
+          <p:cNvPr id="67" name="leg-sky2"/>
           <p:cNvSpPr/>
           <p:nvPr/>
         </p:nvSpPr>
         <p:spPr>
           <a:xfrm>
-            <a:off x="7315200" y="3977640"/>
-            <a:ext cx="182880" cy="566928"/>
+            <a:off x="7315200" y="4023360"/>
+            <a:ext cx="182880" cy="436626"/>
           </a:xfrm>
           <a:prstGeom prst="rect">
             <a:avLst/>
@@ -9197,14 +10123,14 @@
       </p:sp>
       <p:sp>
         <p:nvSpPr>
-          <p:cNvPr id="45" name="leg-hill2"/>
+          <p:cNvPr id="68" name="leg-hill2"/>
           <p:cNvSpPr/>
           <p:nvPr/>
         </p:nvSpPr>
         <p:spPr>
           <a:xfrm>
-            <a:off x="7315200" y="4544568"/>
-            <a:ext cx="182880" cy="409651"/>
+            <a:off x="7315200" y="4459986"/>
+            <a:ext cx="182880" cy="307238"/>
           </a:xfrm>
           <a:prstGeom prst="rect">
             <a:avLst/>
@@ -9222,14 +10148,14 @@
       </p:sp>
       <p:sp>
         <p:nvSpPr>
-          <p:cNvPr id="46" name="res2"/>
-          <p:cNvSpPr txBox="1"/>
-          <p:nvPr/>
-        </p:nvSpPr>
-        <p:spPr>
-          <a:xfrm>
-            <a:off x="6126480" y="5175504"/>
-            <a:ext cx="2606040" cy="274320"/>
+          <p:cNvPr id="69" name="res2"/>
+          <p:cNvSpPr txBox="1"/>
+          <p:nvPr/>
+        </p:nvSpPr>
+        <p:spPr>
+          <a:xfrm>
+            <a:off x="6126480" y="4928616"/>
+            <a:ext cx="2606040" cy="256032"/>
           </a:xfrm>
           <a:prstGeom prst="rect">
             <a:avLst/>
@@ -9245,27 +10171,27 @@
               <a:buNone/>
             </a:pPr>
             <a:r>
-              <a:rPr lang="en-US" sz="1200" dirty="0">
+              <a:rPr lang="en-US" sz="1100" dirty="0">
                 <a:solidFill>
                   <a:srgbClr val="1C1B1D"/>
                 </a:solidFill>
               </a:rPr>
               <a:t>相紙｜白的贏：腳變灰白鬼影</a:t>
             </a:r>
-            <a:endParaRPr lang="en-US" sz="1200" dirty="0"/>
-          </a:p>
-        </p:txBody>
-      </p:sp>
-      <p:sp>
-        <p:nvSpPr>
-          <p:cNvPr id="47" name="way3"/>
-          <p:cNvSpPr txBox="1"/>
-          <p:nvPr/>
-        </p:nvSpPr>
-        <p:spPr>
-          <a:xfrm>
-            <a:off x="8961120" y="1325880"/>
-            <a:ext cx="2606040" cy="365760"/>
+            <a:endParaRPr lang="en-US" sz="1100" dirty="0"/>
+          </a:p>
+        </p:txBody>
+      </p:sp>
+      <p:sp>
+        <p:nvSpPr>
+          <p:cNvPr id="70" name="way3"/>
+          <p:cNvSpPr txBox="1"/>
+          <p:nvPr/>
+        </p:nvSpPr>
+        <p:spPr>
+          <a:xfrm>
+            <a:off x="8961120" y="2103120"/>
+            <a:ext cx="2606040" cy="347472"/>
           </a:xfrm>
           <a:prstGeom prst="rect">
             <a:avLst/>
@@ -9281,7 +10207,7 @@
               <a:buNone/>
             </a:pPr>
             <a:r>
-              <a:rPr lang="en-US" sz="1800" b="1" dirty="0">
+              <a:rPr lang="en-US" sz="1600" b="1" dirty="0">
                 <a:solidFill>
                   <a:srgbClr val="A8321F"/>
                 </a:solidFill>
@@ -9291,56 +10217,20 @@
               </a:rPr>
               <a:t>丁　暗房依序印相</a:t>
             </a:r>
-            <a:endParaRPr lang="en-US" sz="1800" dirty="0"/>
-          </a:p>
-        </p:txBody>
-      </p:sp>
-      <p:sp>
-        <p:nvSpPr>
-          <p:cNvPr id="48" name="caption"/>
-          <p:cNvSpPr txBox="1"/>
-          <p:nvPr/>
-        </p:nvSpPr>
-        <p:spPr>
-          <a:xfrm>
-            <a:off x="8961120" y="1691640"/>
-            <a:ext cx="2606040" cy="256032"/>
-          </a:xfrm>
-          <a:prstGeom prst="rect">
-            <a:avLst/>
-          </a:prstGeom>
-          <a:noFill/>
-          <a:ln/>
-        </p:spPr>
-        <p:txBody>
-          <a:bodyPr wrap="square" lIns="0" tIns="0" rIns="0" bIns="0" rtlCol="0" anchor="t"/>
-          <a:lstStyle/>
-          <a:p>
-            <a:pPr algn="l" indent="0" marL="0">
-              <a:buNone/>
-            </a:pPr>
-            <a:r>
-              <a:rPr lang="en-US" sz="1200" dirty="0">
-                <a:solidFill>
-                  <a:srgbClr val="5F5D63"/>
-                </a:solidFill>
-              </a:rPr>
-              <a:t>同一張相紙先後印兩次</a:t>
-            </a:r>
-            <a:endParaRPr lang="en-US" sz="1200" dirty="0"/>
-          </a:p>
-        </p:txBody>
-      </p:sp>
-      <p:sp>
-        <p:nvSpPr>
-          <p:cNvPr id="49" name="n3a-bg"/>
+            <a:endParaRPr lang="en-US" sz="1600" dirty="0"/>
+          </a:p>
+        </p:txBody>
+      </p:sp>
+      <p:sp>
+        <p:nvSpPr>
+          <p:cNvPr id="71" name="n3a-bg"/>
           <p:cNvSpPr/>
           <p:nvPr/>
         </p:nvSpPr>
         <p:spPr>
           <a:xfrm>
-            <a:off x="8961120" y="2103120"/>
-            <a:ext cx="1198778" cy="1280160"/>
+            <a:off x="8961120" y="2542032"/>
+            <a:ext cx="1198778" cy="960120"/>
           </a:xfrm>
           <a:prstGeom prst="rect">
             <a:avLst/>
@@ -9358,14 +10248,14 @@
       </p:sp>
       <p:sp>
         <p:nvSpPr>
-          <p:cNvPr id="50" name="n3a-legsky"/>
+          <p:cNvPr id="72" name="n3a-legsky"/>
           <p:cNvSpPr/>
           <p:nvPr/>
         </p:nvSpPr>
         <p:spPr>
           <a:xfrm>
-            <a:off x="9512558" y="2240280"/>
-            <a:ext cx="109728" cy="566928"/>
+            <a:off x="9512558" y="2679192"/>
+            <a:ext cx="109728" cy="390906"/>
           </a:xfrm>
           <a:prstGeom prst="rect">
             <a:avLst/>
@@ -9383,14 +10273,14 @@
       </p:sp>
       <p:sp>
         <p:nvSpPr>
-          <p:cNvPr id="51" name="n3a-leghill"/>
+          <p:cNvPr id="73" name="n3a-leghill"/>
           <p:cNvSpPr/>
           <p:nvPr/>
         </p:nvSpPr>
         <p:spPr>
           <a:xfrm>
-            <a:off x="9512558" y="2807208"/>
-            <a:ext cx="109728" cy="409651"/>
+            <a:off x="9512558" y="3070098"/>
+            <a:ext cx="109728" cy="307238"/>
           </a:xfrm>
           <a:prstGeom prst="rect">
             <a:avLst/>
@@ -9408,14 +10298,14 @@
       </p:sp>
       <p:sp>
         <p:nvSpPr>
-          <p:cNvPr id="52" name="n3a-frame"/>
+          <p:cNvPr id="74" name="n3a-frame"/>
           <p:cNvSpPr/>
           <p:nvPr/>
         </p:nvSpPr>
         <p:spPr>
           <a:xfrm>
-            <a:off x="8961120" y="2103120"/>
-            <a:ext cx="1198778" cy="1280160"/>
+            <a:off x="8961120" y="2542032"/>
+            <a:ext cx="1198778" cy="960120"/>
           </a:xfrm>
           <a:prstGeom prst="rect">
             <a:avLst/>
@@ -9430,14 +10320,14 @@
       </p:sp>
       <p:sp>
         <p:nvSpPr>
-          <p:cNvPr id="53" name="n3b-sky"/>
+          <p:cNvPr id="75" name="n3b-sky"/>
           <p:cNvSpPr/>
           <p:nvPr/>
         </p:nvSpPr>
         <p:spPr>
           <a:xfrm>
-            <a:off x="10368382" y="2103120"/>
-            <a:ext cx="1198778" cy="704088"/>
+            <a:off x="10368382" y="2542032"/>
+            <a:ext cx="1198778" cy="528066"/>
           </a:xfrm>
           <a:prstGeom prst="rect">
             <a:avLst/>
@@ -9455,14 +10345,14 @@
       </p:sp>
       <p:sp>
         <p:nvSpPr>
-          <p:cNvPr id="54" name="n3b-hill"/>
+          <p:cNvPr id="76" name="n3b-hill"/>
           <p:cNvSpPr/>
           <p:nvPr/>
         </p:nvSpPr>
         <p:spPr>
           <a:xfrm>
-            <a:off x="10368382" y="2807208"/>
-            <a:ext cx="1198778" cy="576072"/>
+            <a:off x="10368382" y="3070098"/>
+            <a:ext cx="1198778" cy="432054"/>
           </a:xfrm>
           <a:prstGeom prst="rect">
             <a:avLst/>
@@ -9480,14 +10370,14 @@
       </p:sp>
       <p:sp>
         <p:nvSpPr>
-          <p:cNvPr id="55" name="n3b-legsky"/>
+          <p:cNvPr id="77" name="n3b-legsky"/>
           <p:cNvSpPr/>
           <p:nvPr/>
         </p:nvSpPr>
         <p:spPr>
           <a:xfrm>
-            <a:off x="10919820" y="2240280"/>
-            <a:ext cx="109728" cy="566928"/>
+            <a:off x="10919820" y="2679192"/>
+            <a:ext cx="109728" cy="390906"/>
           </a:xfrm>
           <a:prstGeom prst="rect">
             <a:avLst/>
@@ -9505,14 +10395,14 @@
       </p:sp>
       <p:sp>
         <p:nvSpPr>
-          <p:cNvPr id="56" name="n3b-leghill"/>
+          <p:cNvPr id="78" name="n3b-leghill"/>
           <p:cNvSpPr/>
           <p:nvPr/>
         </p:nvSpPr>
         <p:spPr>
           <a:xfrm>
-            <a:off x="10919820" y="2807208"/>
-            <a:ext cx="109728" cy="409651"/>
+            <a:off x="10919820" y="3070098"/>
+            <a:ext cx="109728" cy="307238"/>
           </a:xfrm>
           <a:prstGeom prst="rect">
             <a:avLst/>
@@ -9530,14 +10420,14 @@
       </p:sp>
       <p:sp>
         <p:nvSpPr>
-          <p:cNvPr id="57" name="n3b-frame"/>
+          <p:cNvPr id="79" name="n3b-frame"/>
           <p:cNvSpPr/>
           <p:nvPr/>
         </p:nvSpPr>
         <p:spPr>
           <a:xfrm>
-            <a:off x="10368382" y="2103120"/>
-            <a:ext cx="1198778" cy="1280160"/>
+            <a:off x="10368382" y="2542032"/>
+            <a:ext cx="1198778" cy="960120"/>
           </a:xfrm>
           <a:prstGeom prst="rect">
             <a:avLst/>
@@ -9552,14 +10442,14 @@
       </p:sp>
       <p:sp>
         <p:nvSpPr>
-          <p:cNvPr id="58" name="negres3"/>
-          <p:cNvSpPr txBox="1"/>
-          <p:nvPr/>
-        </p:nvSpPr>
-        <p:spPr>
-          <a:xfrm>
-            <a:off x="8961120" y="3438144"/>
-            <a:ext cx="2606040" cy="274320"/>
+          <p:cNvPr id="80" name="negres3"/>
+          <p:cNvSpPr txBox="1"/>
+          <p:nvPr/>
+        </p:nvSpPr>
+        <p:spPr>
+          <a:xfrm>
+            <a:off x="8961120" y="3538728"/>
+            <a:ext cx="2606040" cy="256032"/>
           </a:xfrm>
           <a:prstGeom prst="rect">
             <a:avLst/>
@@ -9575,27 +10465,27 @@
               <a:buNone/>
             </a:pPr>
             <a:r>
-              <a:rPr lang="en-US" sz="1200" b="1" dirty="0">
+              <a:rPr lang="en-US" sz="1100" b="1" dirty="0">
                 <a:solidFill>
                   <a:srgbClr val="A8321F"/>
                 </a:solidFill>
               </a:rPr>
               <a:t>底片｜2 張分開印：底片各自完整</a:t>
             </a:r>
-            <a:endParaRPr lang="en-US" sz="1200" dirty="0"/>
-          </a:p>
-        </p:txBody>
-      </p:sp>
-      <p:sp>
-        <p:nvSpPr>
-          <p:cNvPr id="59" name="sky3"/>
+            <a:endParaRPr lang="en-US" sz="1100" dirty="0"/>
+          </a:p>
+        </p:txBody>
+      </p:sp>
+      <p:sp>
+        <p:nvSpPr>
+          <p:cNvPr id="81" name="sky3"/>
           <p:cNvSpPr/>
           <p:nvPr/>
         </p:nvSpPr>
         <p:spPr>
           <a:xfrm>
-            <a:off x="8961120" y="3840480"/>
-            <a:ext cx="2606040" cy="704088"/>
+            <a:off x="8961120" y="3931920"/>
+            <a:ext cx="2606040" cy="528066"/>
           </a:xfrm>
           <a:prstGeom prst="rect">
             <a:avLst/>
@@ -9613,14 +10503,14 @@
       </p:sp>
       <p:sp>
         <p:nvSpPr>
-          <p:cNvPr id="60" name="hill3"/>
+          <p:cNvPr id="82" name="hill3"/>
           <p:cNvSpPr/>
           <p:nvPr/>
         </p:nvSpPr>
         <p:spPr>
           <a:xfrm>
-            <a:off x="8961120" y="4544568"/>
-            <a:ext cx="2606040" cy="576072"/>
+            <a:off x="8961120" y="4459986"/>
+            <a:ext cx="2606040" cy="432054"/>
           </a:xfrm>
           <a:prstGeom prst="rect">
             <a:avLst/>
@@ -9638,14 +10528,14 @@
       </p:sp>
       <p:sp>
         <p:nvSpPr>
-          <p:cNvPr id="61" name="leg-sky3"/>
+          <p:cNvPr id="83" name="leg-sky3"/>
           <p:cNvSpPr/>
           <p:nvPr/>
         </p:nvSpPr>
         <p:spPr>
           <a:xfrm>
-            <a:off x="10149840" y="3977640"/>
-            <a:ext cx="182880" cy="566928"/>
+            <a:off x="10149840" y="4023360"/>
+            <a:ext cx="182880" cy="436626"/>
           </a:xfrm>
           <a:prstGeom prst="rect">
             <a:avLst/>
@@ -9663,14 +10553,14 @@
       </p:sp>
       <p:sp>
         <p:nvSpPr>
-          <p:cNvPr id="62" name="leg-hill3"/>
+          <p:cNvPr id="84" name="leg-hill3"/>
           <p:cNvSpPr/>
           <p:nvPr/>
         </p:nvSpPr>
         <p:spPr>
           <a:xfrm>
-            <a:off x="10149840" y="4544568"/>
-            <a:ext cx="182880" cy="409651"/>
+            <a:off x="10149840" y="4459986"/>
+            <a:ext cx="182880" cy="307238"/>
           </a:xfrm>
           <a:prstGeom prst="rect">
             <a:avLst/>
@@ -9688,14 +10578,14 @@
       </p:sp>
       <p:sp>
         <p:nvSpPr>
-          <p:cNvPr id="63" name="res3"/>
-          <p:cNvSpPr txBox="1"/>
-          <p:nvPr/>
-        </p:nvSpPr>
-        <p:spPr>
-          <a:xfrm>
-            <a:off x="8961120" y="5175504"/>
-            <a:ext cx="2606040" cy="274320"/>
+          <p:cNvPr id="85" name="res3"/>
+          <p:cNvSpPr txBox="1"/>
+          <p:nvPr/>
+        </p:nvSpPr>
+        <p:spPr>
+          <a:xfrm>
+            <a:off x="8961120" y="4928616"/>
+            <a:ext cx="2606040" cy="256032"/>
           </a:xfrm>
           <a:prstGeom prst="rect">
             <a:avLst/>
@@ -9711,27 +10601,27 @@
               <a:buNone/>
             </a:pPr>
             <a:r>
-              <a:rPr lang="en-US" sz="1200" b="1" dirty="0">
+              <a:rPr lang="en-US" sz="1100" b="1" dirty="0">
                 <a:solidFill>
                   <a:srgbClr val="A8321F"/>
                 </a:solidFill>
               </a:rPr>
               <a:t>相紙｜黑的贏：腳仍是實心黑</a:t>
             </a:r>
-            <a:endParaRPr lang="en-US" sz="1200" dirty="0"/>
-          </a:p>
-        </p:txBody>
-      </p:sp>
-      <p:sp>
-        <p:nvSpPr>
-          <p:cNvPr id="64" name="丁 紅框"/>
+            <a:endParaRPr lang="en-US" sz="1100" dirty="0"/>
+          </a:p>
+        </p:txBody>
+      </p:sp>
+      <p:sp>
+        <p:nvSpPr>
+          <p:cNvPr id="86" name="丁 紅框"/>
           <p:cNvSpPr/>
           <p:nvPr/>
         </p:nvSpPr>
         <p:spPr>
           <a:xfrm>
-            <a:off x="8887968" y="1252728"/>
-            <a:ext cx="2752344" cy="4224528"/>
+            <a:off x="8887968" y="2048256"/>
+            <a:ext cx="2752344" cy="3118104"/>
           </a:xfrm>
           <a:prstGeom prst="rect">
             <a:avLst/>
@@ -9746,14 +10636,14 @@
       </p:sp>
       <p:sp>
         <p:nvSpPr>
-          <p:cNvPr id="65" name="body"/>
-          <p:cNvSpPr txBox="1"/>
-          <p:nvPr/>
-        </p:nvSpPr>
-        <p:spPr>
-          <a:xfrm>
-            <a:off x="457200" y="5532120"/>
-            <a:ext cx="7132320" cy="640080"/>
+          <p:cNvPr id="87" name="body"/>
+          <p:cNvSpPr txBox="1"/>
+          <p:nvPr/>
+        </p:nvSpPr>
+        <p:spPr>
+          <a:xfrm>
+            <a:off x="457200" y="5257800"/>
+            <a:ext cx="7863840" cy="731520"/>
           </a:xfrm>
           <a:prstGeom prst="rect">
             <a:avLst/>
@@ -9767,48 +10657,48 @@
           <a:p>
             <a:pPr algn="l" indent="0" marL="0">
               <a:spcAft>
-                <a:spcPts val="100"/>
+                <a:spcPts val="200"/>
               </a:spcAft>
               <a:buNone/>
             </a:pPr>
             <a:r>
-              <a:rPr lang="en-US" sz="1400" b="1" dirty="0">
+              <a:rPr lang="en-US" sz="1300" b="1" dirty="0">
                 <a:solidFill>
                   <a:srgbClr val="1C1B1D"/>
                 </a:solidFill>
               </a:rPr>
-              <a:t>底片上相加的是「密度」：越密印出來越白 → 白的贏（乙、丙）</a:t>
-            </a:r>
-            <a:endParaRPr lang="en-US" sz="1400" dirty="0"/>
+              <a:t>乙、丙：天空的光也打到腳那段負片 → 銀留下多、透光少 → 到相紙的光少 → 腳變白（白的贏）</a:t>
+            </a:r>
+            <a:endParaRPr lang="en-US" sz="1300" dirty="0"/>
           </a:p>
           <a:p>
             <a:pPr algn="l" indent="0" marL="0">
               <a:spcAft>
-                <a:spcPts val="100"/>
+                <a:spcPts val="200"/>
               </a:spcAft>
               <a:buNone/>
             </a:pPr>
             <a:r>
-              <a:rPr lang="en-US" sz="1400" b="1" dirty="0">
+              <a:rPr lang="en-US" sz="1300" b="1" dirty="0">
                 <a:solidFill>
                   <a:srgbClr val="1C1B1D"/>
                 </a:solidFill>
               </a:rPr>
-              <a:t>相紙上相加的是「曝光」：越曝越黑 → 黑的贏（丁）</a:t>
-            </a:r>
-            <a:endParaRPr lang="en-US" sz="1400" dirty="0"/>
-          </a:p>
-        </p:txBody>
-      </p:sp>
-      <p:sp>
-        <p:nvSpPr>
-          <p:cNvPr id="66" name="takeaway-bar"/>
+              <a:t>丁：兩張負片分開，腳那段一直透光多 → 相紙銀多 → 黑；再印風景只會更黑（黑的贏）</a:t>
+            </a:r>
+            <a:endParaRPr lang="en-US" sz="1300" dirty="0"/>
+          </a:p>
+        </p:txBody>
+      </p:sp>
+      <p:sp>
+        <p:nvSpPr>
+          <p:cNvPr id="88" name="takeaway-bar"/>
           <p:cNvSpPr/>
           <p:nvPr/>
         </p:nvSpPr>
         <p:spPr>
           <a:xfrm>
-            <a:off x="7863840" y="5641848"/>
+            <a:off x="8412480" y="5394960"/>
             <a:ext cx="54864" cy="347472"/>
           </a:xfrm>
           <a:prstGeom prst="rect">
@@ -9827,14 +10717,14 @@
       </p:sp>
       <p:sp>
         <p:nvSpPr>
-          <p:cNvPr id="67" name="takeaway"/>
-          <p:cNvSpPr txBox="1"/>
-          <p:nvPr/>
-        </p:nvSpPr>
-        <p:spPr>
-          <a:xfrm>
-            <a:off x="8028432" y="5596128"/>
-            <a:ext cx="3675888" cy="438912"/>
+          <p:cNvPr id="89" name="takeaway"/>
+          <p:cNvSpPr txBox="1"/>
+          <p:nvPr/>
+        </p:nvSpPr>
+        <p:spPr>
+          <a:xfrm>
+            <a:off x="8577072" y="5349240"/>
+            <a:ext cx="3127248" cy="438912"/>
           </a:xfrm>
           <a:prstGeom prst="rect">
             <a:avLst/>
@@ -9863,7 +10753,7 @@
       </p:sp>
       <p:sp>
         <p:nvSpPr>
-          <p:cNvPr id="68" name="source"/>
+          <p:cNvPr id="90" name="source"/>
           <p:cNvSpPr txBox="1"/>
           <p:nvPr/>
         </p:nvSpPr>

--- a/flysfly/簡報/LIVE_1_48-1_20261021_Man_Ray_FlysFly_蜂飛記_鄭丁南20261021.pptx
+++ b/flysfly/簡報/LIVE_1_48-1_20261021_Man_Ray_FlysFly_蜂飛記_鄭丁南20261021.pptx
@@ -924,7 +924,12 @@
             <a:r>
               <a:rPr lang="en-US" dirty="0"/>
               <a:t>V&amp;A：At the horizon, the clouds are cut off where they meet the sea. This indicates the join between two separate negatives.（海平線處雲被截斷，就是兩張底片的接縫。）
-Cleveland：當時乳劑對各色光敏感度不一，海與天無法在同一張底片同時曝光正確，所以印兩張底片。
+根本原因是「現場亮度差」，色感是放大器：天空是光源、海是反射面，亮度本來就差好幾級；濕版火棉膠（wet collodion）只感藍紫光，天空富含藍光，在底片上顯得更亮。
+Getty：Collodion as a negative was overly sensitive to blue light … the sky was overexposed and printed white.（曝到前景夠，天空就過曝、印成一片白。）
+The Met：two negatives—one exposed properly for the shore and sea, the second for the sky.（一張為海與岸正確曝光，一張為天空。）
+反證：《The Brig》1856 只用一張底片，Getty：the equal luminosity of sea and sky required only a single negative；The Met：利用海面反光、做成黃昏或月光效果而非白天強光 → 亮度接近就不必合成，證明關鍵是亮度差，不是顏色本身。
+成像階調：底片寬容度有限，蛋白相紙能印出的階調更短；超出的亮部全白、暗部全黑。
+今天：感光元件寬容度大很多，但日出日落、逆光時天空仍超出範圍 → 包圍曝光（bracketing）後合成（HDR），或用漸層減光鏡（graduated ND）壓暗天空（Canon：Blend the best bits of each when you process the images）。同一個問題，1857 在暗房解，今天在相機與軟體裡解。
 The Met 2005.100.48《Mer Méditerranée – Sète》1857：海、天兩張底片有時在不同時間、甚至不同地點拍攝。
 Rejlander《Two Ways of Life》1857（32 張底片）、Robinson《Fading Away》1858（約 5 張底片）：combination printing 是 19 世紀就有的標準技法。
 這張要讓聽眾記住「交界處」：主菜第 7 張會用同一個原理反過來檢驗 p.244。</a:t>
@@ -5441,7 +5446,7 @@
         <p:spPr>
           <a:xfrm>
             <a:off x="7589520" y="1371600"/>
-            <a:ext cx="4206240" cy="3017520"/>
+            <a:ext cx="4206240" cy="3154680"/>
           </a:xfrm>
           <a:prstGeom prst="rect">
             <a:avLst/>
@@ -5460,14 +5465,14 @@
               <a:buNone/>
             </a:pPr>
             <a:r>
-              <a:rPr lang="en-US" sz="1700" dirty="0">
+              <a:rPr lang="zh-TW" altLang="en-US" sz="1500" dirty="0">
                 <a:solidFill>
                   <a:srgbClr val="1C1B1D"/>
                 </a:solidFill>
               </a:rPr>
-              <a:t>當時的感光乳劑對顏色敏感度不一，</a:t>
-            </a:r>
-            <a:endParaRPr lang="en-US" sz="1700" dirty="0"/>
+              <a:t>天空是光源、海是反射面，</a:t>
+            </a:r>
+            <a:endParaRPr lang="zh-TW" sz="1500" dirty="0"/>
           </a:p>
           <a:p>
             <a:pPr algn="l" indent="0" marL="0">
@@ -5477,14 +5482,14 @@
               <a:buNone/>
             </a:pPr>
             <a:r>
-              <a:rPr lang="en-US" sz="1700" dirty="0">
+              <a:rPr lang="zh-TW" altLang="en-US" sz="1500" dirty="0">
                 <a:solidFill>
                   <a:srgbClr val="1C1B1D"/>
                 </a:solidFill>
               </a:rPr>
-              <a:t>海與天無法在同一張底片同時曝光正確。</a:t>
-            </a:r>
-            <a:endParaRPr lang="en-US" sz="1700" dirty="0"/>
+              <a:t>兩者亮度相差好幾級（stop）；</a:t>
+            </a:r>
+            <a:endParaRPr lang="zh-TW" sz="1500" dirty="0"/>
           </a:p>
           <a:p>
             <a:pPr algn="l" indent="0" marL="0">
@@ -5494,14 +5499,31 @@
               <a:buNone/>
             </a:pPr>
             <a:r>
-              <a:rPr lang="en-US" sz="1700" dirty="0">
+              <a:rPr lang="zh-TW" altLang="en-US" sz="1500" dirty="0">
                 <a:solidFill>
                   <a:srgbClr val="1C1B1D"/>
                 </a:solidFill>
               </a:rPr>
-              <a:t> </a:t>
-            </a:r>
-            <a:endParaRPr lang="en-US" sz="1700" dirty="0"/>
+              <a:t>火棉膠又只感藍紫光，</a:t>
+            </a:r>
+            <a:endParaRPr lang="zh-TW" sz="1500" dirty="0"/>
+          </a:p>
+          <a:p>
+            <a:pPr algn="l" indent="0" marL="0">
+              <a:spcAft>
+                <a:spcPts val="600"/>
+              </a:spcAft>
+              <a:buNone/>
+            </a:pPr>
+            <a:r>
+              <a:rPr lang="zh-TW" altLang="en-US" sz="1500" dirty="0">
+                <a:solidFill>
+                  <a:srgbClr val="1C1B1D"/>
+                </a:solidFill>
+              </a:rPr>
+              <a:t>天空的藍光讓差距再拉大。</a:t>
+            </a:r>
+            <a:endParaRPr lang="zh-TW" sz="1500" dirty="0"/>
           </a:p>
           <a:p>
             <a:pPr algn="l" indent="0" marL="0">
@@ -5511,14 +5533,31 @@
               <a:buNone/>
             </a:pPr>
             <a:r>
-              <a:rPr lang="en-US" sz="1700" b="1" dirty="0">
+              <a:rPr lang="zh-TW" altLang="en-US" sz="1500" dirty="0">
                 <a:solidFill>
                   <a:srgbClr val="1C1B1D"/>
                 </a:solidFill>
               </a:rPr>
-              <a:t>→ 海一張底片、天一張底片，</a:t>
-            </a:r>
-            <a:endParaRPr lang="en-US" sz="1700" dirty="0"/>
+              <a:t>一張底片的寬容度（latitude）不夠：</a:t>
+            </a:r>
+            <a:endParaRPr lang="zh-TW" sz="1500" dirty="0"/>
+          </a:p>
+          <a:p>
+            <a:pPr algn="l" indent="0" marL="0">
+              <a:spcAft>
+                <a:spcPts val="900"/>
+              </a:spcAft>
+              <a:buNone/>
+            </a:pPr>
+            <a:r>
+              <a:rPr lang="zh-TW" altLang="en-US" sz="1500" dirty="0">
+                <a:solidFill>
+                  <a:srgbClr val="1C1B1D"/>
+                </a:solidFill>
+              </a:rPr>
+              <a:t>曝海，天空印成一片白；曝天，海變黑。</a:t>
+            </a:r>
+            <a:endParaRPr lang="zh-TW" sz="1500" dirty="0"/>
           </a:p>
           <a:p>
             <a:pPr algn="l" indent="0" marL="0">
@@ -5528,14 +5567,31 @@
               <a:buNone/>
             </a:pPr>
             <a:r>
-              <a:rPr lang="en-US" sz="1700" b="1" dirty="0">
+              <a:rPr lang="zh-TW" altLang="en-US" sz="1700" b="1" dirty="0">
                 <a:solidFill>
                   <a:srgbClr val="1C1B1D"/>
                 </a:solidFill>
               </a:rPr>
+              <a:t>→ 海一張底片、天一張底片，</a:t>
+            </a:r>
+            <a:endParaRPr lang="zh-TW" sz="1700" dirty="0"/>
+          </a:p>
+          <a:p>
+            <a:pPr algn="l" indent="0" marL="0">
+              <a:spcAft>
+                <a:spcPts val="600"/>
+              </a:spcAft>
+              <a:buNone/>
+            </a:pPr>
+            <a:r>
+              <a:rPr lang="zh-TW" altLang="en-US" sz="1700" b="1" dirty="0">
+                <a:solidFill>
+                  <a:srgbClr val="1C1B1D"/>
+                </a:solidFill>
+              </a:rPr>
               <a:t>印在同一張相紙上</a:t>
             </a:r>
-            <a:endParaRPr lang="en-US" sz="1700" dirty="0"/>
+            <a:endParaRPr lang="zh-TW" sz="1700" dirty="0"/>
           </a:p>
           <a:p>
             <a:pPr algn="l" indent="0" marL="0">
@@ -5545,14 +5601,14 @@
               <a:buNone/>
             </a:pPr>
             <a:r>
-              <a:rPr lang="en-US" sz="1700" dirty="0">
-                <a:solidFill>
-                  <a:srgbClr val="1C1B1D"/>
-                </a:solidFill>
-              </a:rPr>
-              <a:t> </a:t>
-            </a:r>
-            <a:endParaRPr lang="en-US" sz="1700" dirty="0"/>
+              <a:rPr lang="zh-TW" altLang="en-US" sz="1300" dirty="0">
+                <a:solidFill>
+                  <a:srgbClr val="5F5D63"/>
+                </a:solidFill>
+              </a:rPr>
+              <a:t>合成印放（combination printing）</a:t>
+            </a:r>
+            <a:endParaRPr lang="zh-TW" sz="1300" dirty="0"/>
           </a:p>
           <a:p>
             <a:pPr algn="l" indent="0" marL="0">
@@ -5562,14 +5618,14 @@
               <a:buNone/>
             </a:pPr>
             <a:r>
-              <a:rPr lang="en-US" sz="1500" dirty="0">
+              <a:rPr lang="zh-TW" altLang="en-US" sz="1300" dirty="0">
                 <a:solidFill>
                   <a:srgbClr val="5F5D63"/>
                 </a:solidFill>
               </a:rPr>
-              <a:t>合成印放（combination printing）</a:t>
-            </a:r>
-            <a:endParaRPr lang="en-US" sz="1700" dirty="0"/>
+              <a:t>今天亮度差超過寬容度，一樣拍兩張合成（HDR）</a:t>
+            </a:r>
+            <a:endParaRPr lang="zh-TW" sz="1300" dirty="0"/>
           </a:p>
         </p:txBody>
       </p:sp>
@@ -5589,8 +5645,8 @@
         </p:blipFill>
         <p:spPr>
           <a:xfrm>
-            <a:off x="7589520" y="4578272"/>
-            <a:ext cx="2011680" cy="1091008"/>
+            <a:off x="7589520" y="4796474"/>
+            <a:ext cx="1609344" cy="872806"/>
           </a:xfrm>
           <a:prstGeom prst="rect">
             <a:avLst/>
@@ -5649,8 +5705,8 @@
         </p:blipFill>
         <p:spPr>
           <a:xfrm>
-            <a:off x="9738360" y="4388510"/>
-            <a:ext cx="2011680" cy="1280770"/>
+            <a:off x="9738360" y="4644664"/>
+            <a:ext cx="1609344" cy="1024616"/>
           </a:xfrm>
           <a:prstGeom prst="rect">
             <a:avLst/>
@@ -5784,7 +5840,7 @@
                   <a:srgbClr val="8A877F"/>
                 </a:solidFill>
               </a:rPr>
-              <a:t>出處：V&amp;A《The Great Wave, Sète》；The Met 2005.100.48；Cleveland Museum of Art 1987.54；圖：The Met 藏本（Wikimedia Commons）</a:t>
+              <a:t>出處：Getty〈Gustave Le Gray: Technique〉；The Met 261937《Brig on the Water》、2005.100.48；V&amp;A《The Great Wave, Sète》；Canon〈Better landscape exposures〉；圖：The Met 藏本（Wikimedia Commons）</a:t>
             </a:r>
             <a:endParaRPr lang="en-US" sz="900" dirty="0"/>
           </a:p>
